--- a/Day_02_Analytics_Types_and_Ethics/Day_02_deck.pptx
+++ b/Day_02_Analytics_Types_and_Ethics/Day_02_deck.pptx
@@ -15,9 +15,10 @@
     <p:sldId id="263" r:id="rId9"/>
     <p:sldId id="264" r:id="rId10"/>
     <p:sldId id="265" r:id="rId11"/>
+    <p:sldId id="266" r:id="rId12"/>
   </p:sldIdLst>
   <p:notesMasterIdLst>
-    <p:notesMasterId r:id="rId12"/>
+    <p:notesMasterId r:id="rId13"/>
   </p:notesMasterIdLst>
   <p:sldSz cx="12188952" cy="6858000"/>
   <p:notesSz cx="6858000" cy="12188952"/>
@@ -599,7 +600,7 @@
           <a:p>
             <a:r>
               <a:rPr lang="en-US" dirty="0"/>
-              <a:t>Bridge: now we know what questions to ask; the next 4 days are about getting data clean enough to answer them in Excel.</a:t>
+              <a:t/>
             </a:r>
             <a:endParaRPr lang="en-US" dirty="0"/>
           </a:p>
@@ -623,6 +624,94 @@
             <a:fld id="{F7021451-1387-4CA6-816F-3879F97B5CBC}" type="slidenum">
               <a:rPr lang="en-US"/>
               <a:t>10</a:t>
+            </a:fld>
+            <a:endParaRPr lang="en-US"/>
+          </a:p>
+        </p:txBody>
+      </p:sp>
+    </p:spTree>
+    <p:extLst>
+      <p:ext uri="{BB962C8B-B14F-4D97-AF65-F5344CB8AC3E}">
+        <p14:creationId xmlns:p14="http://schemas.microsoft.com/office/powerpoint/2010/main" val="1024086991"/>
+      </p:ext>
+    </p:extLst>
+  </p:cSld>
+  <p:clrMapOvr>
+    <a:masterClrMapping/>
+  </p:clrMapOvr>
+</p:notes>
+</file>
+
+<file path=ppt/notesSlides/notesSlide11.xml><?xml version="1.0" encoding="utf-8"?>
+<p:notes xmlns:a="http://schemas.openxmlformats.org/drawingml/2006/main" xmlns:r="http://schemas.openxmlformats.org/officeDocument/2006/relationships" xmlns:p="http://schemas.openxmlformats.org/presentationml/2006/main">
+  <p:cSld>
+    <p:spTree>
+      <p:nvGrpSpPr>
+        <p:cNvPr id="1" name=""/>
+        <p:cNvGrpSpPr/>
+        <p:nvPr/>
+      </p:nvGrpSpPr>
+      <p:grpSpPr>
+        <a:xfrm>
+          <a:off x="0" y="0"/>
+          <a:ext cx="0" cy="0"/>
+          <a:chOff x="0" y="0"/>
+          <a:chExt cx="0" cy="0"/>
+        </a:xfrm>
+      </p:grpSpPr>
+      <p:sp>
+        <p:nvSpPr>
+          <p:cNvPr id="2" name="Slide Image Placeholder 1"/>
+          <p:cNvSpPr>
+            <a:spLocks noGrp="1" noRot="1" noChangeAspect="1"/>
+          </p:cNvSpPr>
+          <p:nvPr>
+            <p:ph type="sldImg"/>
+          </p:nvPr>
+        </p:nvSpPr>
+        <p:spPr/>
+      </p:sp>
+      <p:sp>
+        <p:nvSpPr>
+          <p:cNvPr id="3" name="Notes Placeholder 2"/>
+          <p:cNvSpPr>
+            <a:spLocks noGrp="1"/>
+          </p:cNvSpPr>
+          <p:nvPr>
+            <p:ph type="body" idx="1"/>
+          </p:nvPr>
+        </p:nvSpPr>
+        <p:spPr/>
+        <p:txBody>
+          <a:bodyPr/>
+          <a:lstStyle/>
+          <a:p>
+            <a:r>
+              <a:rPr lang="en-US" dirty="0"/>
+              <a:t>Bridge: now we know what questions to ask; the next 4 days are about getting data clean enough to answer them in Excel.</a:t>
+            </a:r>
+            <a:endParaRPr lang="en-US" dirty="0"/>
+          </a:p>
+        </p:txBody>
+      </p:sp>
+      <p:sp>
+        <p:nvSpPr>
+          <p:cNvPr id="4" name="Slide Number Placeholder 3"/>
+          <p:cNvSpPr>
+            <a:spLocks noGrp="1"/>
+          </p:cNvSpPr>
+          <p:nvPr>
+            <p:ph type="sldNum" sz="quarter" idx="10"/>
+          </p:nvPr>
+        </p:nvSpPr>
+        <p:spPr/>
+        <p:txBody>
+          <a:bodyPr/>
+          <a:lstStyle/>
+          <a:p>
+            <a:fld id="{F7021451-1387-4CA6-816F-3879F97B5CBC}" type="slidenum">
+              <a:rPr lang="en-US"/>
+              <a:t>11</a:t>
             </a:fld>
             <a:endParaRPr lang="en-US"/>
           </a:p>
@@ -775,7 +864,7 @@
           <a:p>
             <a:r>
               <a:rPr lang="en-US" dirty="0"/>
-              <a:t>Hook on the tension: the business wants answers, Legal wants safety. Both are your job now.</a:t>
+              <a:t>Hook on the tension: the business wants answers, Legal wants safety. Both are your job now. 15 questions (10 core + 5 bonus) and a real masking build.</a:t>
             </a:r>
             <a:endParaRPr lang="en-US" dirty="0"/>
           </a:p>
@@ -951,7 +1040,7 @@
           <a:p>
             <a:r>
               <a:rPr lang="en-US" dirty="0"/>
-              <a:t>Mask a phone live. The 'unethical' one is usually the question that targets individuals by sensitive attribute — let them debate which.</a:t>
+              <a:t>This IS Build B. Every formula is one they used yesterday — LEFT / RIGHT / MID / FIND / TEXT. The lesson: masking isn't a new skill, it's yesterday's skill aimed at a privacy problem. Do NOT let them mask customer_id — that's the analysis key you keep.</a:t>
             </a:r>
             <a:endParaRPr lang="en-US" dirty="0"/>
           </a:p>
@@ -1039,7 +1128,7 @@
           <a:p>
             <a:r>
               <a:rPr lang="en-US" dirty="0"/>
-              <a:t>Type both live. Let the COUNT answer instantly; then ask the room what 'who will churn' would actually require. Mask the phone in one formula.</a:t>
+              <a:t>FoodCo is an Indian company, so DPDP is their real law — four words they'll remember. Land 'capability ≠ permission': the whole ethics-desk role-play hangs on it.</a:t>
             </a:r>
             <a:endParaRPr lang="en-US" dirty="0"/>
           </a:p>
@@ -1127,7 +1216,7 @@
           <a:p>
             <a:r>
               <a:rPr lang="en-US" dirty="0"/>
-              <a:t>Float and challenge their tags — many questions sit between two types. That debate is the lesson.</a:t>
+              <a:t>Demo 1 (4 lenses): type the COUNTIFS live — instant — then ask the room what 'who will churn' actually requires (history + a model). Demo 2 (mask): mask a phone with RIGHT, then an email with LEFT+MID+FIND. Say out loud: these are yesterday's functions.</a:t>
             </a:r>
             <a:endParaRPr lang="en-US" dirty="0"/>
           </a:p>
@@ -1215,7 +1304,7 @@
           <a:p>
             <a:r>
               <a:rPr lang="en-US" dirty="0"/>
-              <a:t/>
+              <a:t>Float and challenge their tags — many questions sit between two types. In Build B, don't let them mask customer_id. In the ethics desk, 'refuse everything' is wrong — the skill is knowing when masked-&amp;-aggregated makes it OK.</a:t>
             </a:r>
             <a:endParaRPr lang="en-US" dirty="0"/>
           </a:p>
@@ -2067,6 +2156,57 @@
         </p:nvSpPr>
         <p:spPr>
           <a:xfrm>
+            <a:off x="6291072" y="5074920"/>
+            <a:ext cx="768096" cy="420624"/>
+          </a:xfrm>
+          <a:prstGeom prst="roundRect">
+            <a:avLst>
+              <a:gd name="adj" fmla="val 21739"/>
+            </a:avLst>
+          </a:prstGeom>
+          <a:solidFill>
+            <a:srgbClr val="FFFFFF">
+              <a:alpha val="12000"/>
+            </a:srgbClr>
+          </a:solidFill>
+          <a:ln w="9525">
+            <a:solidFill>
+              <a:srgbClr val="FFFFFF">
+                <a:alpha val="50000"/>
+              </a:srgbClr>
+            </a:solidFill>
+          </a:ln>
+        </p:spPr>
+        <p:txBody>
+          <a:bodyPr wrap="square" lIns="0" tIns="0" rIns="0" bIns="0" rtlCol="0" anchor="ctr"/>
+          <a:lstStyle/>
+          <a:p>
+            <a:pPr algn="ctr" indent="0" marL="0">
+              <a:buNone/>
+            </a:pPr>
+            <a:r>
+              <a:rPr lang="en-US" sz="1200" dirty="0">
+                <a:solidFill>
+                  <a:srgbClr val="FFFFFF"/>
+                </a:solidFill>
+                <a:latin typeface="Calibri" pitchFamily="34" charset="0"/>
+                <a:ea typeface="Calibri" pitchFamily="34" charset="-122"/>
+                <a:cs typeface="Calibri" pitchFamily="34" charset="-120"/>
+              </a:rPr>
+              <a:t>DPDP</a:t>
+            </a:r>
+            <a:endParaRPr lang="en-US" sz="1200" dirty="0"/>
+          </a:p>
+        </p:txBody>
+      </p:sp>
+      <p:sp>
+        <p:nvSpPr>
+          <p:cNvPr id="13" name="Text 11"/>
+          <p:cNvSpPr txBox="1"/>
+          <p:nvPr/>
+        </p:nvSpPr>
+        <p:spPr>
+          <a:xfrm>
             <a:off x="566928" y="6080760"/>
             <a:ext cx="10058400" cy="365760"/>
           </a:xfrm>
@@ -2092,7 +2232,7 @@
                 <a:ea typeface="Calibri" pitchFamily="34" charset="-122"/>
                 <a:cs typeface="Calibri" pitchFamily="34" charset="-120"/>
               </a:rPr>
-              <a:t>100% hands-on  ·  3-hour session  ·  Module 1 of 3</a:t>
+              <a:t>100% hands-on  ·  6-hour session  ·  Module 1 of 3</a:t>
             </a:r>
             <a:endParaRPr lang="en-US" sz="1200" dirty="0"/>
           </a:p>
@@ -2109,6 +2249,562 @@
 <file path=ppt/slides/slide10.xml><?xml version="1.0" encoding="utf-8"?>
 <p:sld xmlns:a="http://schemas.openxmlformats.org/drawingml/2006/main" xmlns:r="http://schemas.openxmlformats.org/officeDocument/2006/relationships" xmlns:p="http://schemas.openxmlformats.org/presentationml/2006/main">
   <p:cSld name="Slide 10">
+    <p:bg>
+      <p:bgPr>
+        <a:solidFill>
+          <a:srgbClr val="FFFFFF"/>
+        </a:solidFill>
+      </p:bgPr>
+    </p:bg>
+    <p:spTree>
+      <p:nvGrpSpPr>
+        <p:cNvPr id="1" name=""/>
+        <p:cNvGrpSpPr/>
+        <p:nvPr/>
+      </p:nvGrpSpPr>
+      <p:grpSpPr>
+        <a:xfrm>
+          <a:off x="0" y="0"/>
+          <a:ext cx="0" cy="0"/>
+          <a:chOff x="0" y="0"/>
+          <a:chExt cx="0" cy="0"/>
+        </a:xfrm>
+      </p:grpSpPr>
+      <p:sp>
+        <p:nvSpPr>
+          <p:cNvPr id="2" name="Text 0"/>
+          <p:cNvSpPr txBox="1"/>
+          <p:nvPr/>
+        </p:nvSpPr>
+        <p:spPr>
+          <a:xfrm>
+            <a:off x="566928" y="420624"/>
+            <a:ext cx="10972800" cy="292608"/>
+          </a:xfrm>
+          <a:prstGeom prst="rect">
+            <a:avLst/>
+          </a:prstGeom>
+          <a:noFill/>
+          <a:ln/>
+        </p:spPr>
+        <p:txBody>
+          <a:bodyPr wrap="square" lIns="0" tIns="0" rIns="0" bIns="0" rtlCol="0" anchor="ctr"/>
+          <a:lstStyle/>
+          <a:p>
+            <a:pPr indent="0" marL="0">
+              <a:buNone/>
+            </a:pPr>
+            <a:r>
+              <a:rPr lang="en-US" sz="1150" b="1" spc="250" kern="0" dirty="0">
+                <a:solidFill>
+                  <a:srgbClr val="F0544F"/>
+                </a:solidFill>
+                <a:latin typeface="Calibri" pitchFamily="34" charset="0"/>
+                <a:ea typeface="Calibri" pitchFamily="34" charset="-122"/>
+                <a:cs typeface="Calibri" pitchFamily="34" charset="-120"/>
+              </a:rPr>
+              <a:t>WRAP · 15 MIN</a:t>
+            </a:r>
+            <a:endParaRPr lang="en-US" sz="1150" dirty="0"/>
+          </a:p>
+        </p:txBody>
+      </p:sp>
+      <p:sp>
+        <p:nvSpPr>
+          <p:cNvPr id="3" name="Text 1"/>
+          <p:cNvSpPr txBox="1"/>
+          <p:nvPr/>
+        </p:nvSpPr>
+        <p:spPr>
+          <a:xfrm>
+            <a:off x="566928" y="713232"/>
+            <a:ext cx="11064240" cy="822960"/>
+          </a:xfrm>
+          <a:prstGeom prst="rect">
+            <a:avLst/>
+          </a:prstGeom>
+          <a:noFill/>
+          <a:ln/>
+        </p:spPr>
+        <p:txBody>
+          <a:bodyPr wrap="square" lIns="0" tIns="0" rIns="0" bIns="0" rtlCol="0" anchor="ctr"/>
+          <a:lstStyle/>
+          <a:p>
+            <a:pPr algn="l" indent="0" marL="0">
+              <a:buNone/>
+            </a:pPr>
+            <a:r>
+              <a:rPr lang="en-US" sz="3000" b="1" dirty="0">
+                <a:solidFill>
+                  <a:srgbClr val="1B1B2F"/>
+                </a:solidFill>
+                <a:latin typeface="Calibri" pitchFamily="34" charset="0"/>
+                <a:ea typeface="Calibri" pitchFamily="34" charset="-122"/>
+                <a:cs typeface="Calibri" pitchFamily="34" charset="-120"/>
+              </a:rPr>
+              <a:t>Hand it in — your Pull Request</a:t>
+            </a:r>
+            <a:endParaRPr lang="en-US" sz="3000" dirty="0"/>
+          </a:p>
+        </p:txBody>
+      </p:sp>
+      <p:sp>
+        <p:nvSpPr>
+          <p:cNvPr id="4" name="Shape 2"/>
+          <p:cNvSpPr/>
+          <p:nvPr/>
+        </p:nvSpPr>
+        <p:spPr>
+          <a:xfrm>
+            <a:off x="566928" y="1783080"/>
+            <a:ext cx="6858000" cy="3566160"/>
+          </a:xfrm>
+          <a:prstGeom prst="roundRect">
+            <a:avLst>
+              <a:gd name="adj" fmla="val 1538"/>
+            </a:avLst>
+          </a:prstGeom>
+          <a:solidFill>
+            <a:srgbClr val="151E42"/>
+          </a:solidFill>
+          <a:ln/>
+          <a:effectLst>
+            <a:outerShdw sx="100000" sy="100000" kx="0" ky="0" algn="bl" rotWithShape="0" blurRad="88900" dist="38100" dir="5400000">
+              <a:srgbClr val="1B1B2F">
+                <a:alpha val="16000"/>
+              </a:srgbClr>
+            </a:outerShdw>
+          </a:effectLst>
+        </p:spPr>
+      </p:sp>
+      <p:sp>
+        <p:nvSpPr>
+          <p:cNvPr id="5" name="Text 3"/>
+          <p:cNvSpPr txBox="1"/>
+          <p:nvPr/>
+        </p:nvSpPr>
+        <p:spPr>
+          <a:xfrm>
+            <a:off x="768096" y="1911096"/>
+            <a:ext cx="6455664" cy="3310128"/>
+          </a:xfrm>
+          <a:prstGeom prst="rect">
+            <a:avLst/>
+          </a:prstGeom>
+          <a:noFill/>
+          <a:ln/>
+        </p:spPr>
+        <p:txBody>
+          <a:bodyPr wrap="square" lIns="0" tIns="0" rIns="0" bIns="0" rtlCol="0" anchor="t"/>
+          <a:lstStyle/>
+          <a:p>
+            <a:pPr algn="l" indent="0" marL="0">
+              <a:lnSpc>
+                <a:spcPct val="115000"/>
+              </a:lnSpc>
+              <a:buNone/>
+            </a:pPr>
+            <a:r>
+              <a:rPr lang="en-US" sz="1400" dirty="0">
+                <a:solidFill>
+                  <a:srgbClr val="7FE3CF"/>
+                </a:solidFill>
+                <a:latin typeface="Consolas" pitchFamily="34" charset="0"/>
+                <a:ea typeface="Consolas" pitchFamily="34" charset="-122"/>
+                <a:cs typeface="Consolas" pitchFamily="34" charset="-120"/>
+              </a:rPr>
+              <a:t>git pull upstream main
+</a:t>
+            </a:r>
+            <a:endParaRPr lang="en-US" sz="1400" dirty="0"/>
+          </a:p>
+          <a:p>
+            <a:pPr algn="l" indent="0" marL="0">
+              <a:lnSpc>
+                <a:spcPct val="115000"/>
+              </a:lnSpc>
+              <a:buNone/>
+            </a:pPr>
+            <a:r>
+              <a:rPr lang="en-US" sz="1400" dirty="0">
+                <a:solidFill>
+                  <a:srgbClr val="7FE3CF"/>
+                </a:solidFill>
+                <a:latin typeface="Consolas" pitchFamily="34" charset="0"/>
+                <a:ea typeface="Consolas" pitchFamily="34" charset="-122"/>
+                <a:cs typeface="Consolas" pitchFamily="34" charset="-120"/>
+              </a:rPr>
+              <a:t>git checkout -b day02-yourname
+</a:t>
+            </a:r>
+            <a:endParaRPr lang="en-US" sz="1400" dirty="0"/>
+          </a:p>
+          <a:p>
+            <a:pPr algn="l" indent="0" marL="0">
+              <a:lnSpc>
+                <a:spcPct val="115000"/>
+              </a:lnSpc>
+              <a:buNone/>
+            </a:pPr>
+            <a:r>
+              <a:rPr lang="en-US" sz="1400" dirty="0">
+                <a:solidFill>
+                  <a:srgbClr val="7FE3CF"/>
+                </a:solidFill>
+                <a:latin typeface="Consolas" pitchFamily="34" charset="0"/>
+                <a:ea typeface="Consolas" pitchFamily="34" charset="-122"/>
+                <a:cs typeface="Consolas" pitchFamily="34" charset="-120"/>
+              </a:rPr>
+              <a:t>git add Day_02_Analytics_Types_and_Ethics/
+</a:t>
+            </a:r>
+            <a:endParaRPr lang="en-US" sz="1400" dirty="0"/>
+          </a:p>
+          <a:p>
+            <a:pPr algn="l" indent="0" marL="0">
+              <a:lnSpc>
+                <a:spcPct val="115000"/>
+              </a:lnSpc>
+              <a:buNone/>
+            </a:pPr>
+            <a:r>
+              <a:rPr lang="en-US" sz="1400" dirty="0">
+                <a:solidFill>
+                  <a:srgbClr val="7FE3CF"/>
+                </a:solidFill>
+                <a:latin typeface="Consolas" pitchFamily="34" charset="0"/>
+                <a:ea typeface="Consolas" pitchFamily="34" charset="-122"/>
+                <a:cs typeface="Consolas" pitchFamily="34" charset="-120"/>
+              </a:rPr>
+              <a:t>git commit -m "Day 2: analytics types + PII masking audit"
+</a:t>
+            </a:r>
+            <a:endParaRPr lang="en-US" sz="1400" dirty="0"/>
+          </a:p>
+          <a:p>
+            <a:pPr algn="l" indent="0" marL="0">
+              <a:lnSpc>
+                <a:spcPct val="115000"/>
+              </a:lnSpc>
+              <a:buNone/>
+            </a:pPr>
+            <a:r>
+              <a:rPr lang="en-US" sz="1400" dirty="0">
+                <a:solidFill>
+                  <a:srgbClr val="7FE3CF"/>
+                </a:solidFill>
+                <a:latin typeface="Consolas" pitchFamily="34" charset="0"/>
+                <a:ea typeface="Consolas" pitchFamily="34" charset="-122"/>
+                <a:cs typeface="Consolas" pitchFamily="34" charset="-120"/>
+              </a:rPr>
+              <a:t>git push origin day02-yourname
+</a:t>
+            </a:r>
+            <a:endParaRPr lang="en-US" sz="1400" dirty="0"/>
+          </a:p>
+          <a:p>
+            <a:pPr algn="l" indent="0" marL="0">
+              <a:lnSpc>
+                <a:spcPct val="115000"/>
+              </a:lnSpc>
+              <a:buNone/>
+            </a:pPr>
+            <a:r>
+              <a:rPr lang="en-US" sz="1400" dirty="0">
+                <a:solidFill>
+                  <a:srgbClr val="7F8AB5"/>
+                </a:solidFill>
+                <a:latin typeface="Consolas" pitchFamily="34" charset="0"/>
+                <a:ea typeface="Consolas" pitchFamily="34" charset="-122"/>
+                <a:cs typeface="Consolas" pitchFamily="34" charset="-120"/>
+              </a:rPr>
+              <a:t># then click 'Compare &amp; pull request' on GitHub</a:t>
+            </a:r>
+            <a:endParaRPr lang="en-US" sz="1400" dirty="0"/>
+          </a:p>
+        </p:txBody>
+      </p:sp>
+      <p:sp>
+        <p:nvSpPr>
+          <p:cNvPr id="6" name="Shape 4"/>
+          <p:cNvSpPr/>
+          <p:nvPr/>
+        </p:nvSpPr>
+        <p:spPr>
+          <a:xfrm>
+            <a:off x="7726680" y="1783080"/>
+            <a:ext cx="3886200" cy="1051560"/>
+          </a:xfrm>
+          <a:prstGeom prst="roundRect">
+            <a:avLst>
+              <a:gd name="adj" fmla="val 6957"/>
+            </a:avLst>
+          </a:prstGeom>
+          <a:solidFill>
+            <a:srgbClr val="F4F6F9"/>
+          </a:solidFill>
+          <a:ln w="12700">
+            <a:solidFill>
+              <a:srgbClr val="DCE2EA"/>
+            </a:solidFill>
+            <a:prstDash val="solid"/>
+          </a:ln>
+        </p:spPr>
+      </p:sp>
+      <p:sp>
+        <p:nvSpPr>
+          <p:cNvPr id="7" name="Text 5"/>
+          <p:cNvSpPr txBox="1"/>
+          <p:nvPr/>
+        </p:nvSpPr>
+        <p:spPr>
+          <a:xfrm>
+            <a:off x="7955280" y="1856232"/>
+            <a:ext cx="3474720" cy="914400"/>
+          </a:xfrm>
+          <a:prstGeom prst="rect">
+            <a:avLst/>
+          </a:prstGeom>
+          <a:noFill/>
+          <a:ln/>
+        </p:spPr>
+        <p:txBody>
+          <a:bodyPr wrap="square" lIns="0" tIns="0" rIns="0" bIns="0" rtlCol="0" anchor="ctr"/>
+          <a:lstStyle/>
+          <a:p>
+            <a:pPr algn="l" indent="0" marL="0">
+              <a:lnSpc>
+                <a:spcPct val="100000"/>
+              </a:lnSpc>
+              <a:buNone/>
+            </a:pPr>
+            <a:r>
+              <a:rPr lang="en-US" sz="1350" b="1" dirty="0">
+                <a:solidFill>
+                  <a:srgbClr val="1B1B2F"/>
+                </a:solidFill>
+                <a:latin typeface="Calibri" pitchFamily="34" charset="0"/>
+                <a:ea typeface="Calibri" pitchFamily="34" charset="-122"/>
+                <a:cs typeface="Calibri" pitchFamily="34" charset="-120"/>
+              </a:rPr>
+              <a:t>Stage only your folder
+</a:t>
+            </a:r>
+            <a:endParaRPr lang="en-US" sz="1350" dirty="0"/>
+          </a:p>
+          <a:p>
+            <a:pPr algn="l" indent="0" marL="0">
+              <a:lnSpc>
+                <a:spcPct val="100000"/>
+              </a:lnSpc>
+              <a:buNone/>
+            </a:pPr>
+            <a:r>
+              <a:rPr lang="en-US" sz="1100" dirty="0">
+                <a:solidFill>
+                  <a:srgbClr val="5B6472"/>
+                </a:solidFill>
+                <a:latin typeface="Consolas" pitchFamily="34" charset="0"/>
+                <a:ea typeface="Consolas" pitchFamily="34" charset="-122"/>
+                <a:cs typeface="Consolas" pitchFamily="34" charset="-120"/>
+              </a:rPr>
+              <a:t>git add Day_02_Analytics_Types_and_Ethics/ — never git add .</a:t>
+            </a:r>
+            <a:endParaRPr lang="en-US" sz="1350" dirty="0"/>
+          </a:p>
+        </p:txBody>
+      </p:sp>
+      <p:sp>
+        <p:nvSpPr>
+          <p:cNvPr id="8" name="Shape 6"/>
+          <p:cNvSpPr/>
+          <p:nvPr/>
+        </p:nvSpPr>
+        <p:spPr>
+          <a:xfrm>
+            <a:off x="7726680" y="2990088"/>
+            <a:ext cx="3886200" cy="1051560"/>
+          </a:xfrm>
+          <a:prstGeom prst="roundRect">
+            <a:avLst>
+              <a:gd name="adj" fmla="val 6957"/>
+            </a:avLst>
+          </a:prstGeom>
+          <a:solidFill>
+            <a:srgbClr val="F4F6F9"/>
+          </a:solidFill>
+          <a:ln w="12700">
+            <a:solidFill>
+              <a:srgbClr val="DCE2EA"/>
+            </a:solidFill>
+            <a:prstDash val="solid"/>
+          </a:ln>
+        </p:spPr>
+      </p:sp>
+      <p:sp>
+        <p:nvSpPr>
+          <p:cNvPr id="9" name="Text 7"/>
+          <p:cNvSpPr txBox="1"/>
+          <p:nvPr/>
+        </p:nvSpPr>
+        <p:spPr>
+          <a:xfrm>
+            <a:off x="7955280" y="3063240"/>
+            <a:ext cx="3474720" cy="914400"/>
+          </a:xfrm>
+          <a:prstGeom prst="rect">
+            <a:avLst/>
+          </a:prstGeom>
+          <a:noFill/>
+          <a:ln/>
+        </p:spPr>
+        <p:txBody>
+          <a:bodyPr wrap="square" lIns="0" tIns="0" rIns="0" bIns="0" rtlCol="0" anchor="ctr"/>
+          <a:lstStyle/>
+          <a:p>
+            <a:pPr algn="l" indent="0" marL="0">
+              <a:lnSpc>
+                <a:spcPct val="100000"/>
+              </a:lnSpc>
+              <a:buNone/>
+            </a:pPr>
+            <a:r>
+              <a:rPr lang="en-US" sz="1350" b="1" dirty="0">
+                <a:solidFill>
+                  <a:srgbClr val="1B1B2F"/>
+                </a:solidFill>
+                <a:latin typeface="Calibri" pitchFamily="34" charset="0"/>
+                <a:ea typeface="Calibri" pitchFamily="34" charset="-122"/>
+                <a:cs typeface="Calibri" pitchFamily="34" charset="-120"/>
+              </a:rPr>
+              <a:t>Push to origin (your fork)
+</a:t>
+            </a:r>
+            <a:endParaRPr lang="en-US" sz="1350" dirty="0"/>
+          </a:p>
+          <a:p>
+            <a:pPr algn="l" indent="0" marL="0">
+              <a:lnSpc>
+                <a:spcPct val="100000"/>
+              </a:lnSpc>
+              <a:buNone/>
+            </a:pPr>
+            <a:r>
+              <a:rPr lang="en-US" sz="1100" dirty="0">
+                <a:solidFill>
+                  <a:srgbClr val="5B6472"/>
+                </a:solidFill>
+                <a:latin typeface="Calibri" pitchFamily="34" charset="0"/>
+                <a:ea typeface="Calibri" pitchFamily="34" charset="-122"/>
+                <a:cs typeface="Calibri" pitchFamily="34" charset="-120"/>
+              </a:rPr>
+              <a:t>not upstream — that's the trainer's.</a:t>
+            </a:r>
+            <a:endParaRPr lang="en-US" sz="1350" dirty="0"/>
+          </a:p>
+        </p:txBody>
+      </p:sp>
+      <p:sp>
+        <p:nvSpPr>
+          <p:cNvPr id="10" name="Shape 8"/>
+          <p:cNvSpPr/>
+          <p:nvPr/>
+        </p:nvSpPr>
+        <p:spPr>
+          <a:xfrm>
+            <a:off x="7726680" y="4197096"/>
+            <a:ext cx="3886200" cy="1051560"/>
+          </a:xfrm>
+          <a:prstGeom prst="roundRect">
+            <a:avLst>
+              <a:gd name="adj" fmla="val 6957"/>
+            </a:avLst>
+          </a:prstGeom>
+          <a:solidFill>
+            <a:srgbClr val="F4F6F9"/>
+          </a:solidFill>
+          <a:ln w="12700">
+            <a:solidFill>
+              <a:srgbClr val="DCE2EA"/>
+            </a:solidFill>
+            <a:prstDash val="solid"/>
+          </a:ln>
+        </p:spPr>
+      </p:sp>
+      <p:sp>
+        <p:nvSpPr>
+          <p:cNvPr id="11" name="Text 9"/>
+          <p:cNvSpPr txBox="1"/>
+          <p:nvPr/>
+        </p:nvSpPr>
+        <p:spPr>
+          <a:xfrm>
+            <a:off x="7955280" y="4270248"/>
+            <a:ext cx="3474720" cy="914400"/>
+          </a:xfrm>
+          <a:prstGeom prst="rect">
+            <a:avLst/>
+          </a:prstGeom>
+          <a:noFill/>
+          <a:ln/>
+        </p:spPr>
+        <p:txBody>
+          <a:bodyPr wrap="square" lIns="0" tIns="0" rIns="0" bIns="0" rtlCol="0" anchor="ctr"/>
+          <a:lstStyle/>
+          <a:p>
+            <a:pPr algn="l" indent="0" marL="0">
+              <a:lnSpc>
+                <a:spcPct val="100000"/>
+              </a:lnSpc>
+              <a:buNone/>
+            </a:pPr>
+            <a:r>
+              <a:rPr lang="en-US" sz="1350" b="1" dirty="0">
+                <a:solidFill>
+                  <a:srgbClr val="1B1B2F"/>
+                </a:solidFill>
+                <a:latin typeface="Calibri" pitchFamily="34" charset="0"/>
+                <a:ea typeface="Calibri" pitchFamily="34" charset="-122"/>
+                <a:cs typeface="Calibri" pitchFamily="34" charset="-120"/>
+              </a:rPr>
+              <a:t>The PR is your submission
+</a:t>
+            </a:r>
+            <a:endParaRPr lang="en-US" sz="1350" dirty="0"/>
+          </a:p>
+          <a:p>
+            <a:pPr algn="l" indent="0" marL="0">
+              <a:lnSpc>
+                <a:spcPct val="100000"/>
+              </a:lnSpc>
+              <a:buNone/>
+            </a:pPr>
+            <a:r>
+              <a:rPr lang="en-US" sz="1100" dirty="0">
+                <a:solidFill>
+                  <a:srgbClr val="5B6472"/>
+                </a:solidFill>
+                <a:latin typeface="Calibri" pitchFamily="34" charset="0"/>
+                <a:ea typeface="Calibri" pitchFamily="34" charset="-122"/>
+                <a:cs typeface="Calibri" pitchFamily="34" charset="-120"/>
+              </a:rPr>
+              <a:t>the trainer reviews a couple live.</a:t>
+            </a:r>
+            <a:endParaRPr lang="en-US" sz="1350" dirty="0"/>
+          </a:p>
+        </p:txBody>
+      </p:sp>
+    </p:spTree>
+  </p:cSld>
+  <p:clrMapOvr>
+    <a:masterClrMapping/>
+  </p:clrMapOvr>
+</p:sld>
+</file>
+
+<file path=ppt/slides/slide11.xml><?xml version="1.0" encoding="utf-8"?>
+<p:sld xmlns:a="http://schemas.openxmlformats.org/drawingml/2006/main" xmlns:r="http://schemas.openxmlformats.org/officeDocument/2006/relationships" xmlns:p="http://schemas.openxmlformats.org/presentationml/2006/main">
+  <p:cSld name="Slide 11">
     <p:bg>
       <p:bgPr>
         <a:solidFill>
@@ -2246,7 +2942,7 @@
                 <a:ea typeface="Calibri" pitchFamily="34" charset="-122"/>
                 <a:cs typeface="Calibri" pitchFamily="34" charset="-120"/>
               </a:rPr>
-              <a:t>You can classify questions — and spot unsafe data</a:t>
+              <a:t>You can classify questions — and make data safe to share</a:t>
             </a:r>
             <a:endParaRPr lang="en-US" sz="3400" dirty="0"/>
           </a:p>
@@ -2348,7 +3044,7 @@
                 <a:ea typeface="Calibri" pitchFamily="34" charset="-122"/>
                 <a:cs typeface="Calibri" pitchFamily="34" charset="-120"/>
               </a:rPr>
-              <a:t>a PII / governance audit</a:t>
+              <a:t>a safe-to-share masked table</a:t>
             </a:r>
             <a:endParaRPr lang="en-US" sz="1450" dirty="0"/>
           </a:p>
@@ -2399,7 +3095,7 @@
                 <a:ea typeface="Calibri" pitchFamily="34" charset="-122"/>
                 <a:cs typeface="Calibri" pitchFamily="34" charset="-120"/>
               </a:rPr>
-              <a:t>the ethics gut-check</a:t>
+              <a:t>DPDP &amp; the ethics desk</a:t>
             </a:r>
             <a:endParaRPr lang="en-US" sz="1450" dirty="0"/>
           </a:p>
@@ -2580,8 +3276,8 @@
         </p:nvSpPr>
         <p:spPr>
           <a:xfrm>
-            <a:off x="1672438" y="3429000"/>
-            <a:ext cx="8844077" cy="0"/>
+            <a:off x="1488186" y="3429000"/>
+            <a:ext cx="9212580" cy="0"/>
           </a:xfrm>
           <a:prstGeom prst="line">
             <a:avLst/>
@@ -2604,7 +3300,7 @@
         <p:spPr>
           <a:xfrm>
             <a:off x="566928" y="2331720"/>
-            <a:ext cx="2211019" cy="457200"/>
+            <a:ext cx="1842516" cy="457200"/>
           </a:xfrm>
           <a:prstGeom prst="rect">
             <a:avLst/>
@@ -2628,7 +3324,7 @@
                 <a:ea typeface="Calibri" pitchFamily="34" charset="-122"/>
                 <a:cs typeface="Calibri" pitchFamily="34" charset="-120"/>
               </a:rPr>
-              <a:t>10 min</a:t>
+              <a:t>25 min</a:t>
             </a:r>
             <a:endParaRPr lang="en-US" sz="1900" dirty="0"/>
           </a:p>
@@ -2642,7 +3338,7 @@
         </p:nvSpPr>
         <p:spPr>
           <a:xfrm>
-            <a:off x="1370686" y="3127248"/>
+            <a:off x="1186434" y="3127248"/>
             <a:ext cx="603504" cy="603504"/>
           </a:xfrm>
           <a:prstGeom prst="ellipse">
@@ -2662,7 +3358,7 @@
         </p:nvSpPr>
         <p:spPr>
           <a:xfrm>
-            <a:off x="1370686" y="3127248"/>
+            <a:off x="1186434" y="3127248"/>
             <a:ext cx="603504" cy="603504"/>
           </a:xfrm>
           <a:prstGeom prst="rect">
@@ -2702,7 +3398,7 @@
         <p:spPr>
           <a:xfrm>
             <a:off x="566928" y="3840480"/>
-            <a:ext cx="2211019" cy="822960"/>
+            <a:ext cx="1842516" cy="822960"/>
           </a:xfrm>
           <a:prstGeom prst="rect">
             <a:avLst/>
@@ -2726,7 +3422,7 @@
                 <a:ea typeface="Calibri" pitchFamily="34" charset="-122"/>
                 <a:cs typeface="Calibri" pitchFamily="34" charset="-120"/>
               </a:rPr>
-              <a:t>Live demo</a:t>
+              <a:t>2 demos — 4 lenses + mask a phone</a:t>
             </a:r>
             <a:endParaRPr lang="en-US" sz="1400" dirty="0"/>
           </a:p>
@@ -2740,8 +3436,8 @@
         </p:nvSpPr>
         <p:spPr>
           <a:xfrm>
-            <a:off x="2777947" y="2331720"/>
-            <a:ext cx="2211019" cy="457200"/>
+            <a:off x="2409444" y="2331720"/>
+            <a:ext cx="1842516" cy="457200"/>
           </a:xfrm>
           <a:prstGeom prst="rect">
             <a:avLst/>
@@ -2765,7 +3461,7 @@
                 <a:ea typeface="Calibri" pitchFamily="34" charset="-122"/>
                 <a:cs typeface="Calibri" pitchFamily="34" charset="-120"/>
               </a:rPr>
-              <a:t>5 min</a:t>
+              <a:t>75 min</a:t>
             </a:r>
             <a:endParaRPr lang="en-US" sz="1900" dirty="0"/>
           </a:p>
@@ -2779,7 +3475,144 @@
         </p:nvSpPr>
         <p:spPr>
           <a:xfrm>
-            <a:off x="3581705" y="3127248"/>
+            <a:off x="3028950" y="3127248"/>
+            <a:ext cx="603504" cy="603504"/>
+          </a:xfrm>
+          <a:prstGeom prst="ellipse">
+            <a:avLst/>
+          </a:prstGeom>
+          <a:solidFill>
+            <a:srgbClr val="FF8C42"/>
+          </a:solidFill>
+          <a:ln/>
+        </p:spPr>
+      </p:sp>
+      <p:sp>
+        <p:nvSpPr>
+          <p:cNvPr id="11" name="Text 9"/>
+          <p:cNvSpPr txBox="1"/>
+          <p:nvPr/>
+        </p:nvSpPr>
+        <p:spPr>
+          <a:xfrm>
+            <a:off x="3028950" y="3127248"/>
+            <a:ext cx="603504" cy="603504"/>
+          </a:xfrm>
+          <a:prstGeom prst="rect">
+            <a:avLst/>
+          </a:prstGeom>
+          <a:noFill/>
+          <a:ln/>
+        </p:spPr>
+        <p:txBody>
+          <a:bodyPr wrap="square" lIns="0" tIns="0" rIns="0" bIns="0" rtlCol="0" anchor="ctr"/>
+          <a:lstStyle/>
+          <a:p>
+            <a:pPr algn="ctr" indent="0" marL="0">
+              <a:buNone/>
+            </a:pPr>
+            <a:r>
+              <a:rPr lang="en-US" sz="1452" b="1" dirty="0">
+                <a:solidFill>
+                  <a:srgbClr val="FFFFFF"/>
+                </a:solidFill>
+                <a:latin typeface="Calibri" pitchFamily="34" charset="0"/>
+                <a:ea typeface="Calibri" pitchFamily="34" charset="-122"/>
+                <a:cs typeface="Calibri" pitchFamily="34" charset="-120"/>
+              </a:rPr>
+              <a:t>2</a:t>
+            </a:r>
+            <a:endParaRPr lang="en-US" sz="1452" dirty="0"/>
+          </a:p>
+        </p:txBody>
+      </p:sp>
+      <p:sp>
+        <p:nvSpPr>
+          <p:cNvPr id="12" name="Text 10"/>
+          <p:cNvSpPr txBox="1"/>
+          <p:nvPr/>
+        </p:nvSpPr>
+        <p:spPr>
+          <a:xfrm>
+            <a:off x="2409444" y="3840480"/>
+            <a:ext cx="1842516" cy="822960"/>
+          </a:xfrm>
+          <a:prstGeom prst="rect">
+            <a:avLst/>
+          </a:prstGeom>
+          <a:noFill/>
+          <a:ln/>
+        </p:spPr>
+        <p:txBody>
+          <a:bodyPr wrap="square" lIns="0" tIns="0" rIns="0" bIns="0" rtlCol="0" anchor="t"/>
+          <a:lstStyle/>
+          <a:p>
+            <a:pPr algn="ctr" indent="0" marL="0">
+              <a:buNone/>
+            </a:pPr>
+            <a:r>
+              <a:rPr lang="en-US" sz="1400" dirty="0">
+                <a:solidFill>
+                  <a:srgbClr val="5B6472"/>
+                </a:solidFill>
+                <a:latin typeface="Calibri" pitchFamily="34" charset="0"/>
+                <a:ea typeface="Calibri" pitchFamily="34" charset="-122"/>
+                <a:cs typeface="Calibri" pitchFamily="34" charset="-120"/>
+              </a:rPr>
+              <a:t>Build A — tag &amp; debate 15 Qs</a:t>
+            </a:r>
+            <a:endParaRPr lang="en-US" sz="1400" dirty="0"/>
+          </a:p>
+        </p:txBody>
+      </p:sp>
+      <p:sp>
+        <p:nvSpPr>
+          <p:cNvPr id="13" name="Text 11"/>
+          <p:cNvSpPr txBox="1"/>
+          <p:nvPr/>
+        </p:nvSpPr>
+        <p:spPr>
+          <a:xfrm>
+            <a:off x="4251960" y="2331720"/>
+            <a:ext cx="1842516" cy="457200"/>
+          </a:xfrm>
+          <a:prstGeom prst="rect">
+            <a:avLst/>
+          </a:prstGeom>
+          <a:noFill/>
+          <a:ln/>
+        </p:spPr>
+        <p:txBody>
+          <a:bodyPr wrap="square" lIns="0" tIns="0" rIns="0" bIns="0" rtlCol="0" anchor="ctr"/>
+          <a:lstStyle/>
+          <a:p>
+            <a:pPr algn="ctr" indent="0" marL="0">
+              <a:buNone/>
+            </a:pPr>
+            <a:r>
+              <a:rPr lang="en-US" sz="1900" b="1" dirty="0">
+                <a:solidFill>
+                  <a:srgbClr val="1B1B2F"/>
+                </a:solidFill>
+                <a:latin typeface="Calibri" pitchFamily="34" charset="0"/>
+                <a:ea typeface="Calibri" pitchFamily="34" charset="-122"/>
+                <a:cs typeface="Calibri" pitchFamily="34" charset="-120"/>
+              </a:rPr>
+              <a:t>70 min</a:t>
+            </a:r>
+            <a:endParaRPr lang="en-US" sz="1900" dirty="0"/>
+          </a:p>
+        </p:txBody>
+      </p:sp>
+      <p:sp>
+        <p:nvSpPr>
+          <p:cNvPr id="14" name="Shape 12"/>
+          <p:cNvSpPr/>
+          <p:nvPr/>
+        </p:nvSpPr>
+        <p:spPr>
+          <a:xfrm>
+            <a:off x="4871466" y="3127248"/>
             <a:ext cx="603504" cy="603504"/>
           </a:xfrm>
           <a:prstGeom prst="ellipse">
@@ -2793,13 +3626,13 @@
       </p:sp>
       <p:sp>
         <p:nvSpPr>
-          <p:cNvPr id="11" name="Text 9"/>
-          <p:cNvSpPr txBox="1"/>
-          <p:nvPr/>
-        </p:nvSpPr>
-        <p:spPr>
-          <a:xfrm>
-            <a:off x="3581705" y="3127248"/>
+          <p:cNvPr id="15" name="Text 13"/>
+          <p:cNvSpPr txBox="1"/>
+          <p:nvPr/>
+        </p:nvSpPr>
+        <p:spPr>
+          <a:xfrm>
+            <a:off x="4871466" y="3127248"/>
             <a:ext cx="603504" cy="603504"/>
           </a:xfrm>
           <a:prstGeom prst="rect">
@@ -2824,7 +3657,7 @@
                 <a:ea typeface="Calibri" pitchFamily="34" charset="-122"/>
                 <a:cs typeface="Calibri" pitchFamily="34" charset="-120"/>
               </a:rPr>
-              <a:t>2</a:t>
+              <a:t>3</a:t>
             </a:r>
             <a:endParaRPr lang="en-US" sz="1452" dirty="0"/>
           </a:p>
@@ -2832,14 +3665,14 @@
       </p:sp>
       <p:sp>
         <p:nvSpPr>
-          <p:cNvPr id="12" name="Text 10"/>
-          <p:cNvSpPr txBox="1"/>
-          <p:nvPr/>
-        </p:nvSpPr>
-        <p:spPr>
-          <a:xfrm>
-            <a:off x="2777947" y="3840480"/>
-            <a:ext cx="2211019" cy="822960"/>
+          <p:cNvPr id="16" name="Text 14"/>
+          <p:cNvSpPr txBox="1"/>
+          <p:nvPr/>
+        </p:nvSpPr>
+        <p:spPr>
+          <a:xfrm>
+            <a:off x="4251960" y="3840480"/>
+            <a:ext cx="1842516" cy="822960"/>
           </a:xfrm>
           <a:prstGeom prst="rect">
             <a:avLst/>
@@ -2863,7 +3696,7 @@
                 <a:ea typeface="Calibri" pitchFamily="34" charset="-122"/>
                 <a:cs typeface="Calibri" pitchFamily="34" charset="-120"/>
               </a:rPr>
-              <a:t>Read the brief</a:t>
+              <a:t>Build B — safe-to-share table</a:t>
             </a:r>
             <a:endParaRPr lang="en-US" sz="1400" dirty="0"/>
           </a:p>
@@ -2871,14 +3704,14 @@
       </p:sp>
       <p:sp>
         <p:nvSpPr>
-          <p:cNvPr id="13" name="Text 11"/>
-          <p:cNvSpPr txBox="1"/>
-          <p:nvPr/>
-        </p:nvSpPr>
-        <p:spPr>
-          <a:xfrm>
-            <a:off x="4988966" y="2331720"/>
-            <a:ext cx="2211019" cy="457200"/>
+          <p:cNvPr id="17" name="Text 15"/>
+          <p:cNvSpPr txBox="1"/>
+          <p:nvPr/>
+        </p:nvSpPr>
+        <p:spPr>
+          <a:xfrm>
+            <a:off x="6094476" y="2331720"/>
+            <a:ext cx="1842516" cy="457200"/>
           </a:xfrm>
           <a:prstGeom prst="rect">
             <a:avLst/>
@@ -2902,144 +3735,7 @@
                 <a:ea typeface="Calibri" pitchFamily="34" charset="-122"/>
                 <a:cs typeface="Calibri" pitchFamily="34" charset="-120"/>
               </a:rPr>
-              <a:t>120 min</a:t>
-            </a:r>
-            <a:endParaRPr lang="en-US" sz="1900" dirty="0"/>
-          </a:p>
-        </p:txBody>
-      </p:sp>
-      <p:sp>
-        <p:nvSpPr>
-          <p:cNvPr id="14" name="Shape 12"/>
-          <p:cNvSpPr/>
-          <p:nvPr/>
-        </p:nvSpPr>
-        <p:spPr>
-          <a:xfrm>
-            <a:off x="5792724" y="3127248"/>
-            <a:ext cx="603504" cy="603504"/>
-          </a:xfrm>
-          <a:prstGeom prst="ellipse">
-            <a:avLst/>
-          </a:prstGeom>
-          <a:solidFill>
-            <a:srgbClr val="FF8C42"/>
-          </a:solidFill>
-          <a:ln/>
-        </p:spPr>
-      </p:sp>
-      <p:sp>
-        <p:nvSpPr>
-          <p:cNvPr id="15" name="Text 13"/>
-          <p:cNvSpPr txBox="1"/>
-          <p:nvPr/>
-        </p:nvSpPr>
-        <p:spPr>
-          <a:xfrm>
-            <a:off x="5792724" y="3127248"/>
-            <a:ext cx="603504" cy="603504"/>
-          </a:xfrm>
-          <a:prstGeom prst="rect">
-            <a:avLst/>
-          </a:prstGeom>
-          <a:noFill/>
-          <a:ln/>
-        </p:spPr>
-        <p:txBody>
-          <a:bodyPr wrap="square" lIns="0" tIns="0" rIns="0" bIns="0" rtlCol="0" anchor="ctr"/>
-          <a:lstStyle/>
-          <a:p>
-            <a:pPr algn="ctr" indent="0" marL="0">
-              <a:buNone/>
-            </a:pPr>
-            <a:r>
-              <a:rPr lang="en-US" sz="1452" b="1" dirty="0">
-                <a:solidFill>
-                  <a:srgbClr val="FFFFFF"/>
-                </a:solidFill>
-                <a:latin typeface="Calibri" pitchFamily="34" charset="0"/>
-                <a:ea typeface="Calibri" pitchFamily="34" charset="-122"/>
-                <a:cs typeface="Calibri" pitchFamily="34" charset="-120"/>
-              </a:rPr>
-              <a:t>3</a:t>
-            </a:r>
-            <a:endParaRPr lang="en-US" sz="1452" dirty="0"/>
-          </a:p>
-        </p:txBody>
-      </p:sp>
-      <p:sp>
-        <p:nvSpPr>
-          <p:cNvPr id="16" name="Text 14"/>
-          <p:cNvSpPr txBox="1"/>
-          <p:nvPr/>
-        </p:nvSpPr>
-        <p:spPr>
-          <a:xfrm>
-            <a:off x="4988966" y="3840480"/>
-            <a:ext cx="2211019" cy="822960"/>
-          </a:xfrm>
-          <a:prstGeom prst="rect">
-            <a:avLst/>
-          </a:prstGeom>
-          <a:noFill/>
-          <a:ln/>
-        </p:spPr>
-        <p:txBody>
-          <a:bodyPr wrap="square" lIns="0" tIns="0" rIns="0" bIns="0" rtlCol="0" anchor="t"/>
-          <a:lstStyle/>
-          <a:p>
-            <a:pPr algn="ctr" indent="0" marL="0">
-              <a:buNone/>
-            </a:pPr>
-            <a:r>
-              <a:rPr lang="en-US" sz="1400" dirty="0">
-                <a:solidFill>
-                  <a:srgbClr val="5B6472"/>
-                </a:solidFill>
-                <a:latin typeface="Calibri" pitchFamily="34" charset="0"/>
-                <a:ea typeface="Calibri" pitchFamily="34" charset="-122"/>
-                <a:cs typeface="Calibri" pitchFamily="34" charset="-120"/>
-              </a:rPr>
-              <a:t>You build</a:t>
-            </a:r>
-            <a:endParaRPr lang="en-US" sz="1400" dirty="0"/>
-          </a:p>
-        </p:txBody>
-      </p:sp>
-      <p:sp>
-        <p:nvSpPr>
-          <p:cNvPr id="17" name="Text 15"/>
-          <p:cNvSpPr txBox="1"/>
-          <p:nvPr/>
-        </p:nvSpPr>
-        <p:spPr>
-          <a:xfrm>
-            <a:off x="7199986" y="2331720"/>
-            <a:ext cx="2211019" cy="457200"/>
-          </a:xfrm>
-          <a:prstGeom prst="rect">
-            <a:avLst/>
-          </a:prstGeom>
-          <a:noFill/>
-          <a:ln/>
-        </p:spPr>
-        <p:txBody>
-          <a:bodyPr wrap="square" lIns="0" tIns="0" rIns="0" bIns="0" rtlCol="0" anchor="ctr"/>
-          <a:lstStyle/>
-          <a:p>
-            <a:pPr algn="ctr" indent="0" marL="0">
-              <a:buNone/>
-            </a:pPr>
-            <a:r>
-              <a:rPr lang="en-US" sz="1900" b="1" dirty="0">
-                <a:solidFill>
-                  <a:srgbClr val="1B1B2F"/>
-                </a:solidFill>
-                <a:latin typeface="Calibri" pitchFamily="34" charset="0"/>
-                <a:ea typeface="Calibri" pitchFamily="34" charset="-122"/>
-                <a:cs typeface="Calibri" pitchFamily="34" charset="-120"/>
-              </a:rPr>
-              <a:t>30 min</a:t>
+              <a:t>45 min</a:t>
             </a:r>
             <a:endParaRPr lang="en-US" sz="1900" dirty="0"/>
           </a:p>
@@ -3053,7 +3749,7 @@
         </p:nvSpPr>
         <p:spPr>
           <a:xfrm>
-            <a:off x="8003743" y="3127248"/>
+            <a:off x="6713982" y="3127248"/>
             <a:ext cx="603504" cy="603504"/>
           </a:xfrm>
           <a:prstGeom prst="ellipse">
@@ -3073,7 +3769,7 @@
         </p:nvSpPr>
         <p:spPr>
           <a:xfrm>
-            <a:off x="8003743" y="3127248"/>
+            <a:off x="6713982" y="3127248"/>
             <a:ext cx="603504" cy="603504"/>
           </a:xfrm>
           <a:prstGeom prst="rect">
@@ -3112,8 +3808,8 @@
         </p:nvSpPr>
         <p:spPr>
           <a:xfrm>
-            <a:off x="7199986" y="3840480"/>
-            <a:ext cx="2211019" cy="822960"/>
+            <a:off x="6094476" y="3840480"/>
+            <a:ext cx="1842516" cy="822960"/>
           </a:xfrm>
           <a:prstGeom prst="rect">
             <a:avLst/>
@@ -3137,7 +3833,7 @@
                 <a:ea typeface="Calibri" pitchFamily="34" charset="-122"/>
                 <a:cs typeface="Calibri" pitchFamily="34" charset="-120"/>
               </a:rPr>
-              <a:t>Show &amp; tell</a:t>
+              <a:t>Build C — 3 descriptive stats</a:t>
             </a:r>
             <a:endParaRPr lang="en-US" sz="1400" dirty="0"/>
           </a:p>
@@ -3151,8 +3847,8 @@
         </p:nvSpPr>
         <p:spPr>
           <a:xfrm>
-            <a:off x="9411005" y="2331720"/>
-            <a:ext cx="2211019" cy="457200"/>
+            <a:off x="7936992" y="2331720"/>
+            <a:ext cx="1842516" cy="457200"/>
           </a:xfrm>
           <a:prstGeom prst="rect">
             <a:avLst/>
@@ -3176,7 +3872,7 @@
                 <a:ea typeface="Calibri" pitchFamily="34" charset="-122"/>
                 <a:cs typeface="Calibri" pitchFamily="34" charset="-120"/>
               </a:rPr>
-              <a:t>15 min</a:t>
+              <a:t>45 min</a:t>
             </a:r>
             <a:endParaRPr lang="en-US" sz="1900" dirty="0"/>
           </a:p>
@@ -3190,7 +3886,7 @@
         </p:nvSpPr>
         <p:spPr>
           <a:xfrm>
-            <a:off x="10214762" y="3127248"/>
+            <a:off x="8556498" y="3127248"/>
             <a:ext cx="603504" cy="603504"/>
           </a:xfrm>
           <a:prstGeom prst="ellipse">
@@ -3210,7 +3906,7 @@
         </p:nvSpPr>
         <p:spPr>
           <a:xfrm>
-            <a:off x="10214762" y="3127248"/>
+            <a:off x="8556498" y="3127248"/>
             <a:ext cx="603504" cy="603504"/>
           </a:xfrm>
           <a:prstGeom prst="rect">
@@ -3249,8 +3945,8 @@
         </p:nvSpPr>
         <p:spPr>
           <a:xfrm>
-            <a:off x="9411005" y="3840480"/>
-            <a:ext cx="2211019" cy="822960"/>
+            <a:off x="7936992" y="3840480"/>
+            <a:ext cx="1842516" cy="822960"/>
           </a:xfrm>
           <a:prstGeom prst="rect">
             <a:avLst/>
@@ -3274,7 +3970,7 @@
                 <a:ea typeface="Calibri" pitchFamily="34" charset="-122"/>
                 <a:cs typeface="Calibri" pitchFamily="34" charset="-120"/>
               </a:rPr>
-              <a:t>Submit your PR</a:t>
+              <a:t>Ethics-desk role-play</a:t>
             </a:r>
             <a:endParaRPr lang="en-US" sz="1400" dirty="0"/>
           </a:p>
@@ -3283,6 +3979,143 @@
       <p:sp>
         <p:nvSpPr>
           <p:cNvPr id="25" name="Text 23"/>
+          <p:cNvSpPr txBox="1"/>
+          <p:nvPr/>
+        </p:nvSpPr>
+        <p:spPr>
+          <a:xfrm>
+            <a:off x="9779508" y="2331720"/>
+            <a:ext cx="1842516" cy="457200"/>
+          </a:xfrm>
+          <a:prstGeom prst="rect">
+            <a:avLst/>
+          </a:prstGeom>
+          <a:noFill/>
+          <a:ln/>
+        </p:spPr>
+        <p:txBody>
+          <a:bodyPr wrap="square" lIns="0" tIns="0" rIns="0" bIns="0" rtlCol="0" anchor="ctr"/>
+          <a:lstStyle/>
+          <a:p>
+            <a:pPr algn="ctr" indent="0" marL="0">
+              <a:buNone/>
+            </a:pPr>
+            <a:r>
+              <a:rPr lang="en-US" sz="1900" b="1" dirty="0">
+                <a:solidFill>
+                  <a:srgbClr val="1B1B2F"/>
+                </a:solidFill>
+                <a:latin typeface="Calibri" pitchFamily="34" charset="0"/>
+                <a:ea typeface="Calibri" pitchFamily="34" charset="-122"/>
+                <a:cs typeface="Calibri" pitchFamily="34" charset="-120"/>
+              </a:rPr>
+              <a:t>30 min</a:t>
+            </a:r>
+            <a:endParaRPr lang="en-US" sz="1900" dirty="0"/>
+          </a:p>
+        </p:txBody>
+      </p:sp>
+      <p:sp>
+        <p:nvSpPr>
+          <p:cNvPr id="26" name="Shape 24"/>
+          <p:cNvSpPr/>
+          <p:nvPr/>
+        </p:nvSpPr>
+        <p:spPr>
+          <a:xfrm>
+            <a:off x="10399014" y="3127248"/>
+            <a:ext cx="603504" cy="603504"/>
+          </a:xfrm>
+          <a:prstGeom prst="ellipse">
+            <a:avLst/>
+          </a:prstGeom>
+          <a:solidFill>
+            <a:srgbClr val="F0544F"/>
+          </a:solidFill>
+          <a:ln/>
+        </p:spPr>
+      </p:sp>
+      <p:sp>
+        <p:nvSpPr>
+          <p:cNvPr id="27" name="Text 25"/>
+          <p:cNvSpPr txBox="1"/>
+          <p:nvPr/>
+        </p:nvSpPr>
+        <p:spPr>
+          <a:xfrm>
+            <a:off x="10399014" y="3127248"/>
+            <a:ext cx="603504" cy="603504"/>
+          </a:xfrm>
+          <a:prstGeom prst="rect">
+            <a:avLst/>
+          </a:prstGeom>
+          <a:noFill/>
+          <a:ln/>
+        </p:spPr>
+        <p:txBody>
+          <a:bodyPr wrap="square" lIns="0" tIns="0" rIns="0" bIns="0" rtlCol="0" anchor="ctr"/>
+          <a:lstStyle/>
+          <a:p>
+            <a:pPr algn="ctr" indent="0" marL="0">
+              <a:buNone/>
+            </a:pPr>
+            <a:r>
+              <a:rPr lang="en-US" sz="1452" b="1" dirty="0">
+                <a:solidFill>
+                  <a:srgbClr val="FFFFFF"/>
+                </a:solidFill>
+                <a:latin typeface="Calibri" pitchFamily="34" charset="0"/>
+                <a:ea typeface="Calibri" pitchFamily="34" charset="-122"/>
+                <a:cs typeface="Calibri" pitchFamily="34" charset="-120"/>
+              </a:rPr>
+              <a:t>6</a:t>
+            </a:r>
+            <a:endParaRPr lang="en-US" sz="1452" dirty="0"/>
+          </a:p>
+        </p:txBody>
+      </p:sp>
+      <p:sp>
+        <p:nvSpPr>
+          <p:cNvPr id="28" name="Text 26"/>
+          <p:cNvSpPr txBox="1"/>
+          <p:nvPr/>
+        </p:nvSpPr>
+        <p:spPr>
+          <a:xfrm>
+            <a:off x="9779508" y="3840480"/>
+            <a:ext cx="1842516" cy="822960"/>
+          </a:xfrm>
+          <a:prstGeom prst="rect">
+            <a:avLst/>
+          </a:prstGeom>
+          <a:noFill/>
+          <a:ln/>
+        </p:spPr>
+        <p:txBody>
+          <a:bodyPr wrap="square" lIns="0" tIns="0" rIns="0" bIns="0" rtlCol="0" anchor="t"/>
+          <a:lstStyle/>
+          <a:p>
+            <a:pPr algn="ctr" indent="0" marL="0">
+              <a:buNone/>
+            </a:pPr>
+            <a:r>
+              <a:rPr lang="en-US" sz="1400" dirty="0">
+                <a:solidFill>
+                  <a:srgbClr val="5B6472"/>
+                </a:solidFill>
+                <a:latin typeface="Calibri" pitchFamily="34" charset="0"/>
+                <a:ea typeface="Calibri" pitchFamily="34" charset="-122"/>
+                <a:cs typeface="Calibri" pitchFamily="34" charset="-120"/>
+              </a:rPr>
+              <a:t>Show &amp; tell + open your PR</a:t>
+            </a:r>
+            <a:endParaRPr lang="en-US" sz="1400" dirty="0"/>
+          </a:p>
+        </p:txBody>
+      </p:sp>
+      <p:sp>
+        <p:nvSpPr>
+          <p:cNvPr id="29" name="Text 27"/>
           <p:cNvSpPr txBox="1"/>
           <p:nvPr/>
         </p:nvSpPr>
@@ -3305,6 +4138,20 @@
               <a:buNone/>
             </a:pPr>
             <a:r>
+              <a:rPr lang="en-US" sz="1400" dirty="0">
+                <a:solidFill>
+                  <a:srgbClr val="5B6472"/>
+                </a:solidFill>
+                <a:latin typeface="Calibri" pitchFamily="34" charset="0"/>
+                <a:ea typeface="Calibri" pitchFamily="34" charset="-122"/>
+                <a:cs typeface="Calibri" pitchFamily="34" charset="-120"/>
+              </a:rPr>
+              <a:t>Two 10-min breaks across the day. </a:t>
+            </a:r>
+            <a:pPr algn="ctr" indent="0" marL="0">
+              <a:buNone/>
+            </a:pPr>
+            <a:r>
               <a:rPr lang="en-US" sz="1400" b="1" dirty="0">
                 <a:solidFill>
                   <a:srgbClr val="1B1B2F"/>
@@ -3313,7 +4160,7 @@
                 <a:ea typeface="Calibri" pitchFamily="34" charset="-122"/>
                 <a:cs typeface="Calibri" pitchFamily="34" charset="-120"/>
               </a:rPr>
-              <a:t>The demo is short on purpose</a:t>
+              <a:t>The demos are short on purpose</a:t>
             </a:r>
             <a:pPr algn="ctr" indent="0" marL="0">
               <a:buNone/>
@@ -3327,7 +4174,7 @@
                 <a:ea typeface="Calibri" pitchFamily="34" charset="-122"/>
                 <a:cs typeface="Calibri" pitchFamily="34" charset="-120"/>
               </a:rPr>
-              <a:t>  —  today is about you doing it, not watching.</a:t>
+              <a:t> — today you build it, twice.</a:t>
             </a:r>
             <a:endParaRPr lang="en-US" sz="1400" dirty="0"/>
           </a:p>
@@ -3437,7 +4284,7 @@
                 <a:ea typeface="Calibri" pitchFamily="34" charset="-122"/>
                 <a:cs typeface="Calibri" pitchFamily="34" charset="-120"/>
               </a:rPr>
-              <a:t>Ten questions, one data-ethics problem</a:t>
+              <a:t>Fifteen questions, one data-ethics problem</a:t>
             </a:r>
             <a:endParaRPr lang="en-US" sz="3000" dirty="0"/>
           </a:p>
@@ -3506,7 +4353,7 @@
                 <a:ea typeface="Calibri" pitchFamily="34" charset="-122"/>
                 <a:cs typeface="Calibri" pitchFamily="34" charset="-120"/>
               </a:rPr>
-              <a:t>Leadership fires ten questions at the new team</a:t>
+              <a:t>Leadership fires fifteen questions at the new team</a:t>
             </a:r>
             <a:pPr algn="l" indent="0" marL="0">
               <a:lnSpc>
@@ -3557,7 +4404,7 @@
                 <a:ea typeface="Calibri" pitchFamily="34" charset="-122"/>
                 <a:cs typeface="Calibri" pitchFamily="34" charset="-120"/>
               </a:rPr>
-              <a:t>.</a:t>
+              <a:t> — and FoodCo answers to India’s DPDP Act.</a:t>
             </a:r>
             <a:endParaRPr lang="en-US" sz="1550" dirty="0"/>
           </a:p>
@@ -3733,6 +4580,60 @@
         </p:nvSpPr>
         <p:spPr>
           <a:xfrm>
+            <a:off x="9555480" y="2359152"/>
+            <a:ext cx="2103120" cy="566928"/>
+          </a:xfrm>
+          <a:prstGeom prst="roundRect">
+            <a:avLst>
+              <a:gd name="adj" fmla="val 12903"/>
+            </a:avLst>
+          </a:prstGeom>
+          <a:solidFill>
+            <a:srgbClr val="FDF3DA"/>
+          </a:solidFill>
+          <a:ln w="12700">
+            <a:solidFill>
+              <a:srgbClr val="F4B942"/>
+            </a:solidFill>
+          </a:ln>
+          <a:effectLst>
+            <a:outerShdw sx="100000" sy="100000" kx="0" ky="0" algn="bl" rotWithShape="0" blurRad="88900" dist="38100" dir="5400000">
+              <a:srgbClr val="1B1B2F">
+                <a:alpha val="16000"/>
+              </a:srgbClr>
+            </a:outerShdw>
+          </a:effectLst>
+        </p:spPr>
+        <p:txBody>
+          <a:bodyPr wrap="square" lIns="0" tIns="0" rIns="0" bIns="0" rtlCol="0" anchor="ctr"/>
+          <a:lstStyle/>
+          <a:p>
+            <a:pPr algn="ctr" indent="0" marL="0">
+              <a:buNone/>
+            </a:pPr>
+            <a:r>
+              <a:rPr lang="en-US" sz="1100" dirty="0">
+                <a:solidFill>
+                  <a:srgbClr val="1B1B2F"/>
+                </a:solidFill>
+                <a:latin typeface="Consolas" pitchFamily="34" charset="0"/>
+                <a:ea typeface="Consolas" pitchFamily="34" charset="-122"/>
+                <a:cs typeface="Consolas" pitchFamily="34" charset="-120"/>
+              </a:rPr>
+              <a:t>→ safe_customers.csv</a:t>
+            </a:r>
+            <a:endParaRPr lang="en-US" sz="1100" dirty="0"/>
+          </a:p>
+        </p:txBody>
+      </p:sp>
+      <p:sp>
+        <p:nvSpPr>
+          <p:cNvPr id="10" name="Text 8"/>
+          <p:cNvSpPr txBox="1"/>
+          <p:nvPr/>
+        </p:nvSpPr>
+        <p:spPr>
+          <a:xfrm>
             <a:off x="566928" y="4343400"/>
             <a:ext cx="11055096" cy="914400"/>
           </a:xfrm>
@@ -3776,7 +4677,7 @@
                 <a:ea typeface="Calibri" pitchFamily="34" charset="-122"/>
                 <a:cs typeface="Calibri" pitchFamily="34" charset="-120"/>
               </a:rPr>
-              <a:t>classify the questions, then audit the data.</a:t>
+              <a:t>classify the questions, then make the data safe to share.</a:t>
             </a:r>
             <a:endParaRPr lang="en-US" sz="2000" dirty="0"/>
           </a:p>
@@ -4822,7 +5723,7 @@
                 <a:ea typeface="Calibri" pitchFamily="34" charset="-122"/>
                 <a:cs typeface="Calibri" pitchFamily="34" charset="-120"/>
               </a:rPr>
-              <a:t>DATA ETHICS</a:t>
+              <a:t>DATA ETHICS · BUILD B</a:t>
             </a:r>
             <a:endParaRPr lang="en-US" sz="1150" dirty="0"/>
           </a:p>
@@ -4861,7 +5762,7 @@
                 <a:ea typeface="Calibri" pitchFamily="34" charset="-122"/>
                 <a:cs typeface="Calibri" pitchFamily="34" charset="-120"/>
               </a:rPr>
-              <a:t>Just because you can, should you?</a:t>
+              <a:t>Mask before you share — your safe-to-share table</a:t>
             </a:r>
             <a:endParaRPr lang="en-US" sz="3000" dirty="0"/>
           </a:p>
@@ -4869,41 +5770,153 @@
       </p:sp>
       <p:sp>
         <p:nvSpPr>
-          <p:cNvPr id="4" name="Shape 2"/>
+          <p:cNvPr id="4" name="Text 2"/>
+          <p:cNvSpPr txBox="1"/>
+          <p:nvPr/>
+        </p:nvSpPr>
+        <p:spPr>
+          <a:xfrm>
+            <a:off x="566928" y="1783080"/>
+            <a:ext cx="2286000" cy="365760"/>
+          </a:xfrm>
+          <a:prstGeom prst="rect">
+            <a:avLst/>
+          </a:prstGeom>
+          <a:noFill/>
+          <a:ln/>
+        </p:spPr>
+        <p:txBody>
+          <a:bodyPr wrap="square" lIns="0" tIns="0" rIns="0" bIns="0" rtlCol="0" anchor="ctr"/>
+          <a:lstStyle/>
+          <a:p>
+            <a:pPr algn="l" indent="0" marL="0">
+              <a:buNone/>
+            </a:pPr>
+            <a:r>
+              <a:rPr lang="en-US" sz="1200" b="1" dirty="0">
+                <a:solidFill>
+                  <a:srgbClr val="138A72"/>
+                </a:solidFill>
+                <a:latin typeface="Calibri" pitchFamily="34" charset="0"/>
+                <a:ea typeface="Calibri" pitchFamily="34" charset="-122"/>
+                <a:cs typeface="Calibri" pitchFamily="34" charset="-120"/>
+              </a:rPr>
+              <a:t>Column</a:t>
+            </a:r>
+            <a:endParaRPr lang="en-US" sz="1200" dirty="0"/>
+          </a:p>
+        </p:txBody>
+      </p:sp>
+      <p:sp>
+        <p:nvSpPr>
+          <p:cNvPr id="5" name="Text 3"/>
+          <p:cNvSpPr txBox="1"/>
+          <p:nvPr/>
+        </p:nvSpPr>
+        <p:spPr>
+          <a:xfrm>
+            <a:off x="2971800" y="1783080"/>
+            <a:ext cx="5760720" cy="365760"/>
+          </a:xfrm>
+          <a:prstGeom prst="rect">
+            <a:avLst/>
+          </a:prstGeom>
+          <a:noFill/>
+          <a:ln/>
+        </p:spPr>
+        <p:txBody>
+          <a:bodyPr wrap="square" lIns="0" tIns="0" rIns="0" bIns="0" rtlCol="0" anchor="ctr"/>
+          <a:lstStyle/>
+          <a:p>
+            <a:pPr algn="l" indent="0" marL="0">
+              <a:buNone/>
+            </a:pPr>
+            <a:r>
+              <a:rPr lang="en-US" sz="1200" b="1" dirty="0">
+                <a:solidFill>
+                  <a:srgbClr val="138A72"/>
+                </a:solidFill>
+                <a:latin typeface="Calibri" pitchFamily="34" charset="0"/>
+                <a:ea typeface="Calibri" pitchFamily="34" charset="-122"/>
+                <a:cs typeface="Calibri" pitchFamily="34" charset="-120"/>
+              </a:rPr>
+              <a:t>Masking rule  (yesterday’s text functions)</a:t>
+            </a:r>
+            <a:endParaRPr lang="en-US" sz="1200" dirty="0"/>
+          </a:p>
+        </p:txBody>
+      </p:sp>
+      <p:sp>
+        <p:nvSpPr>
+          <p:cNvPr id="6" name="Text 4"/>
+          <p:cNvSpPr txBox="1"/>
+          <p:nvPr/>
+        </p:nvSpPr>
+        <p:spPr>
+          <a:xfrm>
+            <a:off x="8915400" y="1783080"/>
+            <a:ext cx="2697480" cy="365760"/>
+          </a:xfrm>
+          <a:prstGeom prst="rect">
+            <a:avLst/>
+          </a:prstGeom>
+          <a:noFill/>
+          <a:ln/>
+        </p:spPr>
+        <p:txBody>
+          <a:bodyPr wrap="square" lIns="0" tIns="0" rIns="0" bIns="0" rtlCol="0" anchor="ctr"/>
+          <a:lstStyle/>
+          <a:p>
+            <a:pPr algn="l" indent="0" marL="0">
+              <a:buNone/>
+            </a:pPr>
+            <a:r>
+              <a:rPr lang="en-US" sz="1200" b="1" dirty="0">
+                <a:solidFill>
+                  <a:srgbClr val="138A72"/>
+                </a:solidFill>
+                <a:latin typeface="Calibri" pitchFamily="34" charset="0"/>
+                <a:ea typeface="Calibri" pitchFamily="34" charset="-122"/>
+                <a:cs typeface="Calibri" pitchFamily="34" charset="-120"/>
+              </a:rPr>
+              <a:t>Result</a:t>
+            </a:r>
+            <a:endParaRPr lang="en-US" sz="1200" dirty="0"/>
+          </a:p>
+        </p:txBody>
+      </p:sp>
+      <p:sp>
+        <p:nvSpPr>
+          <p:cNvPr id="7" name="Shape 5"/>
           <p:cNvSpPr/>
           <p:nvPr/>
         </p:nvSpPr>
         <p:spPr>
           <a:xfrm>
-            <a:off x="566928" y="1691640"/>
-            <a:ext cx="4572000" cy="2743200"/>
+            <a:off x="475488" y="2231136"/>
+            <a:ext cx="11237976" cy="603504"/>
           </a:xfrm>
           <a:prstGeom prst="roundRect">
             <a:avLst>
-              <a:gd name="adj" fmla="val 2667"/>
+              <a:gd name="adj" fmla="val 6061"/>
             </a:avLst>
           </a:prstGeom>
           <a:solidFill>
-            <a:srgbClr val="FDE8E7"/>
+            <a:srgbClr val="F4F6F9"/>
           </a:solidFill>
-          <a:ln w="12700">
-            <a:solidFill>
-              <a:srgbClr val="F0544F"/>
-            </a:solidFill>
-            <a:prstDash val="solid"/>
-          </a:ln>
-        </p:spPr>
-      </p:sp>
-      <p:sp>
-        <p:nvSpPr>
-          <p:cNvPr id="5" name="Text 3"/>
-          <p:cNvSpPr txBox="1"/>
-          <p:nvPr/>
-        </p:nvSpPr>
-        <p:spPr>
-          <a:xfrm>
-            <a:off x="841248" y="1874520"/>
-            <a:ext cx="4023360" cy="365760"/>
+          <a:ln/>
+        </p:spPr>
+      </p:sp>
+      <p:sp>
+        <p:nvSpPr>
+          <p:cNvPr id="8" name="Text 6"/>
+          <p:cNvSpPr txBox="1"/>
+          <p:nvPr/>
+        </p:nvSpPr>
+        <p:spPr>
+          <a:xfrm>
+            <a:off x="566928" y="2258568"/>
+            <a:ext cx="2286000" cy="548640"/>
           </a:xfrm>
           <a:prstGeom prst="rect">
             <a:avLst/>
@@ -4919,148 +5932,124 @@
               <a:buNone/>
             </a:pPr>
             <a:r>
-              <a:rPr lang="en-US" sz="1500" b="1" dirty="0">
-                <a:solidFill>
-                  <a:srgbClr val="F0544F"/>
-                </a:solidFill>
-                <a:latin typeface="Calibri" pitchFamily="34" charset="0"/>
-                <a:ea typeface="Calibri" pitchFamily="34" charset="-122"/>
-                <a:cs typeface="Calibri" pitchFamily="34" charset="-120"/>
-              </a:rPr>
-              <a:t>PII in customers_pii.csv</a:t>
-            </a:r>
-            <a:endParaRPr lang="en-US" sz="1500" dirty="0"/>
-          </a:p>
-        </p:txBody>
-      </p:sp>
-      <p:sp>
-        <p:nvSpPr>
-          <p:cNvPr id="6" name="Text 4"/>
-          <p:cNvSpPr txBox="1"/>
-          <p:nvPr/>
-        </p:nvSpPr>
-        <p:spPr>
-          <a:xfrm>
-            <a:off x="841248" y="2331720"/>
-            <a:ext cx="1280160" cy="502920"/>
-          </a:xfrm>
-          <a:prstGeom prst="roundRect">
-            <a:avLst>
-              <a:gd name="adj" fmla="val 14545"/>
-            </a:avLst>
-          </a:prstGeom>
-          <a:solidFill>
-            <a:srgbClr val="FFFFFF"/>
-          </a:solidFill>
-          <a:ln w="12700">
-            <a:solidFill>
-              <a:srgbClr val="F0544F"/>
-            </a:solidFill>
-          </a:ln>
-        </p:spPr>
-        <p:txBody>
-          <a:bodyPr wrap="square" lIns="0" tIns="0" rIns="0" bIns="0" rtlCol="0" anchor="ctr"/>
-          <a:lstStyle/>
-          <a:p>
-            <a:pPr algn="ctr" indent="0" marL="0">
-              <a:buNone/>
-            </a:pPr>
-            <a:r>
-              <a:rPr lang="en-US" sz="1100" dirty="0">
-                <a:solidFill>
-                  <a:srgbClr val="1B1B2F"/>
+              <a:rPr lang="en-US" sz="1200" b="1" dirty="0">
+                <a:solidFill>
+                  <a:srgbClr val="138A72"/>
                 </a:solidFill>
                 <a:latin typeface="Consolas" pitchFamily="34" charset="0"/>
                 <a:ea typeface="Consolas" pitchFamily="34" charset="-122"/>
                 <a:cs typeface="Consolas" pitchFamily="34" charset="-120"/>
               </a:rPr>
-              <a:t>name</a:t>
-            </a:r>
-            <a:endParaRPr lang="en-US" sz="1100" dirty="0"/>
-          </a:p>
-        </p:txBody>
-      </p:sp>
-      <p:sp>
-        <p:nvSpPr>
-          <p:cNvPr id="7" name="Text 5"/>
-          <p:cNvSpPr txBox="1"/>
-          <p:nvPr/>
-        </p:nvSpPr>
-        <p:spPr>
-          <a:xfrm>
-            <a:off x="2212848" y="2331720"/>
-            <a:ext cx="1280160" cy="502920"/>
-          </a:xfrm>
-          <a:prstGeom prst="roundRect">
-            <a:avLst>
-              <a:gd name="adj" fmla="val 14545"/>
-            </a:avLst>
-          </a:prstGeom>
-          <a:solidFill>
-            <a:srgbClr val="FFFFFF"/>
-          </a:solidFill>
-          <a:ln w="12700">
-            <a:solidFill>
-              <a:srgbClr val="F0544F"/>
-            </a:solidFill>
-          </a:ln>
-        </p:spPr>
-        <p:txBody>
-          <a:bodyPr wrap="square" lIns="0" tIns="0" rIns="0" bIns="0" rtlCol="0" anchor="ctr"/>
-          <a:lstStyle/>
-          <a:p>
-            <a:pPr algn="ctr" indent="0" marL="0">
-              <a:buNone/>
-            </a:pPr>
-            <a:r>
-              <a:rPr lang="en-US" sz="1100" dirty="0">
-                <a:solidFill>
-                  <a:srgbClr val="1B1B2F"/>
+              <a:t>customer_id</a:t>
+            </a:r>
+            <a:endParaRPr lang="en-US" sz="1200" dirty="0"/>
+          </a:p>
+        </p:txBody>
+      </p:sp>
+      <p:sp>
+        <p:nvSpPr>
+          <p:cNvPr id="9" name="Text 7"/>
+          <p:cNvSpPr txBox="1"/>
+          <p:nvPr/>
+        </p:nvSpPr>
+        <p:spPr>
+          <a:xfrm>
+            <a:off x="2971800" y="2258568"/>
+            <a:ext cx="5760720" cy="548640"/>
+          </a:xfrm>
+          <a:prstGeom prst="rect">
+            <a:avLst/>
+          </a:prstGeom>
+          <a:noFill/>
+          <a:ln/>
+        </p:spPr>
+        <p:txBody>
+          <a:bodyPr wrap="square" lIns="0" tIns="0" rIns="0" bIns="0" rtlCol="0" anchor="ctr"/>
+          <a:lstStyle/>
+          <a:p>
+            <a:pPr algn="l" indent="0" marL="0">
+              <a:buNone/>
+            </a:pPr>
+            <a:r>
+              <a:rPr lang="en-US" sz="1200" dirty="0">
+                <a:solidFill>
+                  <a:srgbClr val="5B6472"/>
+                </a:solidFill>
+                <a:latin typeface="Calibri" pitchFamily="34" charset="0"/>
+                <a:ea typeface="Calibri" pitchFamily="34" charset="-122"/>
+                <a:cs typeface="Calibri" pitchFamily="34" charset="-120"/>
+              </a:rPr>
+              <a:t>KEEP — it’s a pseudonym / your analysis key</a:t>
+            </a:r>
+            <a:endParaRPr lang="en-US" sz="1200" dirty="0"/>
+          </a:p>
+        </p:txBody>
+      </p:sp>
+      <p:sp>
+        <p:nvSpPr>
+          <p:cNvPr id="10" name="Text 8"/>
+          <p:cNvSpPr txBox="1"/>
+          <p:nvPr/>
+        </p:nvSpPr>
+        <p:spPr>
+          <a:xfrm>
+            <a:off x="8915400" y="2258568"/>
+            <a:ext cx="2697480" cy="548640"/>
+          </a:xfrm>
+          <a:prstGeom prst="rect">
+            <a:avLst/>
+          </a:prstGeom>
+          <a:noFill/>
+          <a:ln/>
+        </p:spPr>
+        <p:txBody>
+          <a:bodyPr wrap="square" lIns="0" tIns="0" rIns="0" bIns="0" rtlCol="0" anchor="ctr"/>
+          <a:lstStyle/>
+          <a:p>
+            <a:pPr algn="l" indent="0" marL="0">
+              <a:buNone/>
+            </a:pPr>
+            <a:r>
+              <a:rPr lang="en-US" sz="1200" b="1" dirty="0">
+                <a:solidFill>
+                  <a:srgbClr val="138A72"/>
                 </a:solidFill>
                 <a:latin typeface="Consolas" pitchFamily="34" charset="0"/>
                 <a:ea typeface="Consolas" pitchFamily="34" charset="-122"/>
                 <a:cs typeface="Consolas" pitchFamily="34" charset="-120"/>
               </a:rPr>
-              <a:t>phone</a:t>
-            </a:r>
-            <a:endParaRPr lang="en-US" sz="1100" dirty="0"/>
-          </a:p>
-        </p:txBody>
-      </p:sp>
-      <p:sp>
-        <p:nvSpPr>
-          <p:cNvPr id="8" name="Text 6"/>
-          <p:cNvSpPr txBox="1"/>
-          <p:nvPr/>
-        </p:nvSpPr>
-        <p:spPr>
-          <a:xfrm>
-            <a:off x="3584448" y="2331720"/>
-            <a:ext cx="1280160" cy="502920"/>
-          </a:xfrm>
-          <a:prstGeom prst="roundRect">
-            <a:avLst>
-              <a:gd name="adj" fmla="val 14545"/>
-            </a:avLst>
-          </a:prstGeom>
-          <a:solidFill>
-            <a:srgbClr val="FFFFFF"/>
-          </a:solidFill>
-          <a:ln w="12700">
-            <a:solidFill>
-              <a:srgbClr val="F0544F"/>
-            </a:solidFill>
-          </a:ln>
-        </p:spPr>
-        <p:txBody>
-          <a:bodyPr wrap="square" lIns="0" tIns="0" rIns="0" bIns="0" rtlCol="0" anchor="ctr"/>
-          <a:lstStyle/>
-          <a:p>
-            <a:pPr algn="ctr" indent="0" marL="0">
-              <a:buNone/>
-            </a:pPr>
-            <a:r>
-              <a:rPr lang="en-US" sz="1100" dirty="0">
+              <a:t>C0001</a:t>
+            </a:r>
+            <a:endParaRPr lang="en-US" sz="1200" dirty="0"/>
+          </a:p>
+        </p:txBody>
+      </p:sp>
+      <p:sp>
+        <p:nvSpPr>
+          <p:cNvPr id="11" name="Text 9"/>
+          <p:cNvSpPr txBox="1"/>
+          <p:nvPr/>
+        </p:nvSpPr>
+        <p:spPr>
+          <a:xfrm>
+            <a:off x="566928" y="2862072"/>
+            <a:ext cx="2286000" cy="548640"/>
+          </a:xfrm>
+          <a:prstGeom prst="rect">
+            <a:avLst/>
+          </a:prstGeom>
+          <a:noFill/>
+          <a:ln/>
+        </p:spPr>
+        <p:txBody>
+          <a:bodyPr wrap="square" lIns="0" tIns="0" rIns="0" bIns="0" rtlCol="0" anchor="ctr"/>
+          <a:lstStyle/>
+          <a:p>
+            <a:pPr algn="l" indent="0" marL="0">
+              <a:buNone/>
+            </a:pPr>
+            <a:r>
+              <a:rPr lang="en-US" sz="1200" b="1" dirty="0">
                 <a:solidFill>
                   <a:srgbClr val="1B1B2F"/>
                 </a:solidFill>
@@ -5068,42 +6057,34 @@
                 <a:ea typeface="Consolas" pitchFamily="34" charset="-122"/>
                 <a:cs typeface="Consolas" pitchFamily="34" charset="-120"/>
               </a:rPr>
-              <a:t>email</a:t>
-            </a:r>
-            <a:endParaRPr lang="en-US" sz="1100" dirty="0"/>
-          </a:p>
-        </p:txBody>
-      </p:sp>
-      <p:sp>
-        <p:nvSpPr>
-          <p:cNvPr id="9" name="Text 7"/>
-          <p:cNvSpPr txBox="1"/>
-          <p:nvPr/>
-        </p:nvSpPr>
-        <p:spPr>
-          <a:xfrm>
-            <a:off x="841248" y="2990088"/>
-            <a:ext cx="1280160" cy="502920"/>
-          </a:xfrm>
-          <a:prstGeom prst="roundRect">
-            <a:avLst>
-              <a:gd name="adj" fmla="val 14545"/>
-            </a:avLst>
-          </a:prstGeom>
-          <a:solidFill>
-            <a:srgbClr val="FFFFFF"/>
-          </a:solidFill>
-          <a:ln w="12700">
-            <a:solidFill>
-              <a:srgbClr val="F0544F"/>
-            </a:solidFill>
-          </a:ln>
-        </p:spPr>
-        <p:txBody>
-          <a:bodyPr wrap="square" lIns="0" tIns="0" rIns="0" bIns="0" rtlCol="0" anchor="ctr"/>
-          <a:lstStyle/>
-          <a:p>
-            <a:pPr algn="ctr" indent="0" marL="0">
+              <a:t>customer_name</a:t>
+            </a:r>
+            <a:endParaRPr lang="en-US" sz="1200" dirty="0"/>
+          </a:p>
+        </p:txBody>
+      </p:sp>
+      <p:sp>
+        <p:nvSpPr>
+          <p:cNvPr id="12" name="Text 10"/>
+          <p:cNvSpPr txBox="1"/>
+          <p:nvPr/>
+        </p:nvSpPr>
+        <p:spPr>
+          <a:xfrm>
+            <a:off x="2971800" y="2862072"/>
+            <a:ext cx="5760720" cy="548640"/>
+          </a:xfrm>
+          <a:prstGeom prst="rect">
+            <a:avLst/>
+          </a:prstGeom>
+          <a:noFill/>
+          <a:ln/>
+        </p:spPr>
+        <p:txBody>
+          <a:bodyPr wrap="square" lIns="0" tIns="0" rIns="0" bIns="0" rtlCol="0" anchor="ctr"/>
+          <a:lstStyle/>
+          <a:p>
+            <a:pPr algn="l" indent="0" marL="0">
               <a:buNone/>
             </a:pPr>
             <a:r>
@@ -5115,7 +6096,7 @@
                 <a:ea typeface="Consolas" pitchFamily="34" charset="-122"/>
                 <a:cs typeface="Consolas" pitchFamily="34" charset="-120"/>
               </a:rPr>
-              <a:t>address</a:t>
+              <a:t>=LEFT(B2,1)&amp;". "&amp;MID(B2,FIND(" ",B2)+1,1)&amp;"."</a:t>
             </a:r>
             <a:endParaRPr lang="en-US" sz="1100" dirty="0"/>
           </a:p>
@@ -5123,112 +6104,75 @@
       </p:sp>
       <p:sp>
         <p:nvSpPr>
-          <p:cNvPr id="10" name="Text 8"/>
-          <p:cNvSpPr txBox="1"/>
-          <p:nvPr/>
-        </p:nvSpPr>
-        <p:spPr>
-          <a:xfrm>
-            <a:off x="2212848" y="2990088"/>
-            <a:ext cx="1280160" cy="502920"/>
-          </a:xfrm>
-          <a:prstGeom prst="roundRect">
-            <a:avLst>
-              <a:gd name="adj" fmla="val 14545"/>
-            </a:avLst>
-          </a:prstGeom>
-          <a:solidFill>
-            <a:srgbClr val="FFFFFF"/>
-          </a:solidFill>
-          <a:ln w="12700">
-            <a:solidFill>
-              <a:srgbClr val="F0544F"/>
-            </a:solidFill>
-          </a:ln>
-        </p:spPr>
-        <p:txBody>
-          <a:bodyPr wrap="square" lIns="0" tIns="0" rIns="0" bIns="0" rtlCol="0" anchor="ctr"/>
-          <a:lstStyle/>
-          <a:p>
-            <a:pPr algn="ctr" indent="0" marL="0">
-              <a:buNone/>
-            </a:pPr>
-            <a:r>
-              <a:rPr lang="en-US" sz="1100" dirty="0">
-                <a:solidFill>
-                  <a:srgbClr val="1B1B2F"/>
+          <p:cNvPr id="13" name="Text 11"/>
+          <p:cNvSpPr txBox="1"/>
+          <p:nvPr/>
+        </p:nvSpPr>
+        <p:spPr>
+          <a:xfrm>
+            <a:off x="8915400" y="2862072"/>
+            <a:ext cx="2697480" cy="548640"/>
+          </a:xfrm>
+          <a:prstGeom prst="rect">
+            <a:avLst/>
+          </a:prstGeom>
+          <a:noFill/>
+          <a:ln/>
+        </p:spPr>
+        <p:txBody>
+          <a:bodyPr wrap="square" lIns="0" tIns="0" rIns="0" bIns="0" rtlCol="0" anchor="ctr"/>
+          <a:lstStyle/>
+          <a:p>
+            <a:pPr algn="l" indent="0" marL="0">
+              <a:buNone/>
+            </a:pPr>
+            <a:r>
+              <a:rPr lang="en-US" sz="1200" b="1" dirty="0">
+                <a:solidFill>
+                  <a:srgbClr val="138A72"/>
                 </a:solidFill>
                 <a:latin typeface="Consolas" pitchFamily="34" charset="0"/>
                 <a:ea typeface="Consolas" pitchFamily="34" charset="-122"/>
                 <a:cs typeface="Consolas" pitchFamily="34" charset="-120"/>
               </a:rPr>
-              <a:t>date_of_birth</a:t>
-            </a:r>
-            <a:endParaRPr lang="en-US" sz="1100" dirty="0"/>
-          </a:p>
-        </p:txBody>
-      </p:sp>
-      <p:sp>
-        <p:nvSpPr>
-          <p:cNvPr id="11" name="Shape 9"/>
+              <a:t>K. S.</a:t>
+            </a:r>
+            <a:endParaRPr lang="en-US" sz="1200" dirty="0"/>
+          </a:p>
+        </p:txBody>
+      </p:sp>
+      <p:sp>
+        <p:nvSpPr>
+          <p:cNvPr id="14" name="Shape 12"/>
           <p:cNvSpPr/>
           <p:nvPr/>
         </p:nvSpPr>
         <p:spPr>
           <a:xfrm>
-            <a:off x="5257800" y="3063240"/>
-            <a:ext cx="914400" cy="0"/>
-          </a:xfrm>
-          <a:prstGeom prst="line">
-            <a:avLst/>
-          </a:prstGeom>
-          <a:noFill/>
-          <a:ln w="28575">
-            <a:solidFill>
-              <a:srgbClr val="5B6472"/>
-            </a:solidFill>
-            <a:prstDash val="solid"/>
-            <a:tailEnd type="triangle"/>
-          </a:ln>
-        </p:spPr>
-      </p:sp>
-      <p:sp>
-        <p:nvSpPr>
-          <p:cNvPr id="12" name="Shape 10"/>
-          <p:cNvSpPr/>
-          <p:nvPr/>
-        </p:nvSpPr>
-        <p:spPr>
-          <a:xfrm>
-            <a:off x="6309360" y="1691640"/>
-            <a:ext cx="5303520" cy="2743200"/>
+            <a:off x="475488" y="3438144"/>
+            <a:ext cx="11237976" cy="603504"/>
           </a:xfrm>
           <a:prstGeom prst="roundRect">
             <a:avLst>
-              <a:gd name="adj" fmla="val 2667"/>
+              <a:gd name="adj" fmla="val 6061"/>
             </a:avLst>
           </a:prstGeom>
           <a:solidFill>
-            <a:srgbClr val="E2F3EF"/>
+            <a:srgbClr val="F4F6F9"/>
           </a:solidFill>
-          <a:ln w="12700">
-            <a:solidFill>
-              <a:srgbClr val="138A72"/>
-            </a:solidFill>
-            <a:prstDash val="solid"/>
-          </a:ln>
-        </p:spPr>
-      </p:sp>
-      <p:sp>
-        <p:nvSpPr>
-          <p:cNvPr id="13" name="Text 11"/>
-          <p:cNvSpPr txBox="1"/>
-          <p:nvPr/>
-        </p:nvSpPr>
-        <p:spPr>
-          <a:xfrm>
-            <a:off x="6583680" y="1874520"/>
-            <a:ext cx="4754880" cy="365760"/>
+          <a:ln/>
+        </p:spPr>
+      </p:sp>
+      <p:sp>
+        <p:nvSpPr>
+          <p:cNvPr id="15" name="Text 13"/>
+          <p:cNvSpPr txBox="1"/>
+          <p:nvPr/>
+        </p:nvSpPr>
+        <p:spPr>
+          <a:xfrm>
+            <a:off x="566928" y="3465576"/>
+            <a:ext cx="2286000" cy="548640"/>
           </a:xfrm>
           <a:prstGeom prst="rect">
             <a:avLst/>
@@ -5244,88 +6188,17 @@
               <a:buNone/>
             </a:pPr>
             <a:r>
-              <a:rPr lang="en-US" sz="1500" b="1" dirty="0">
-                <a:solidFill>
-                  <a:srgbClr val="138A72"/>
-                </a:solidFill>
-                <a:latin typeface="Calibri" pitchFamily="34" charset="0"/>
-                <a:ea typeface="Calibri" pitchFamily="34" charset="-122"/>
-                <a:cs typeface="Calibri" pitchFamily="34" charset="-120"/>
-              </a:rPr>
-              <a:t>Mask before you share</a:t>
-            </a:r>
-            <a:endParaRPr lang="en-US" sz="1500" dirty="0"/>
-          </a:p>
-        </p:txBody>
-      </p:sp>
-      <p:sp>
-        <p:nvSpPr>
-          <p:cNvPr id="14" name="Shape 12"/>
-          <p:cNvSpPr/>
-          <p:nvPr/>
-        </p:nvSpPr>
-        <p:spPr>
-          <a:xfrm>
-            <a:off x="6583680" y="2331720"/>
-            <a:ext cx="4754880" cy="685800"/>
-          </a:xfrm>
-          <a:prstGeom prst="roundRect">
-            <a:avLst>
-              <a:gd name="adj" fmla="val 8000"/>
-            </a:avLst>
-          </a:prstGeom>
-          <a:solidFill>
-            <a:srgbClr val="151E42"/>
-          </a:solidFill>
-          <a:ln/>
-          <a:effectLst>
-            <a:outerShdw sx="100000" sy="100000" kx="0" ky="0" algn="bl" rotWithShape="0" blurRad="88900" dist="38100" dir="5400000">
-              <a:srgbClr val="1B1B2F">
-                <a:alpha val="16000"/>
-              </a:srgbClr>
-            </a:outerShdw>
-          </a:effectLst>
-        </p:spPr>
-      </p:sp>
-      <p:sp>
-        <p:nvSpPr>
-          <p:cNvPr id="15" name="Text 13"/>
-          <p:cNvSpPr txBox="1"/>
-          <p:nvPr/>
-        </p:nvSpPr>
-        <p:spPr>
-          <a:xfrm>
-            <a:off x="6784848" y="2459736"/>
-            <a:ext cx="4352544" cy="429768"/>
-          </a:xfrm>
-          <a:prstGeom prst="rect">
-            <a:avLst/>
-          </a:prstGeom>
-          <a:noFill/>
-          <a:ln/>
-        </p:spPr>
-        <p:txBody>
-          <a:bodyPr wrap="square" lIns="0" tIns="0" rIns="0" bIns="0" rtlCol="0" anchor="t"/>
-          <a:lstStyle/>
-          <a:p>
-            <a:pPr algn="l" indent="0" marL="0">
-              <a:lnSpc>
-                <a:spcPct val="115000"/>
-              </a:lnSpc>
-              <a:buNone/>
-            </a:pPr>
-            <a:r>
-              <a:rPr lang="en-US" sz="1300" dirty="0">
-                <a:solidFill>
-                  <a:srgbClr val="7FE3CF"/>
+              <a:rPr lang="en-US" sz="1200" b="1" dirty="0">
+                <a:solidFill>
+                  <a:srgbClr val="1B1B2F"/>
                 </a:solidFill>
                 <a:latin typeface="Consolas" pitchFamily="34" charset="0"/>
                 <a:ea typeface="Consolas" pitchFamily="34" charset="-122"/>
                 <a:cs typeface="Consolas" pitchFamily="34" charset="-120"/>
               </a:rPr>
-              <a:t>="xxxxx" &amp; RIGHT(phone,4)</a:t>
-            </a:r>
-            <a:endParaRPr lang="en-US" sz="1300" dirty="0"/>
+              <a:t>email</a:t>
+            </a:r>
+            <a:endParaRPr lang="en-US" sz="1200" dirty="0"/>
           </a:p>
         </p:txBody>
       </p:sp>
@@ -5337,78 +6210,349 @@
         </p:nvSpPr>
         <p:spPr>
           <a:xfrm>
-            <a:off x="6583680" y="3200400"/>
-            <a:ext cx="4754880" cy="1005840"/>
-          </a:xfrm>
-          <a:prstGeom prst="rect">
-            <a:avLst/>
-          </a:prstGeom>
-          <a:noFill/>
-          <a:ln/>
-        </p:spPr>
-        <p:txBody>
-          <a:bodyPr wrap="square" lIns="0" tIns="0" rIns="0" bIns="0" rtlCol="0" anchor="t"/>
+            <a:off x="2971800" y="3465576"/>
+            <a:ext cx="5760720" cy="548640"/>
+          </a:xfrm>
+          <a:prstGeom prst="rect">
+            <a:avLst/>
+          </a:prstGeom>
+          <a:noFill/>
+          <a:ln/>
+        </p:spPr>
+        <p:txBody>
+          <a:bodyPr wrap="square" lIns="0" tIns="0" rIns="0" bIns="0" rtlCol="0" anchor="ctr"/>
           <a:lstStyle/>
           <a:p>
             <a:pPr algn="l" indent="0" marL="0">
-              <a:lnSpc>
-                <a:spcPct val="110000"/>
-              </a:lnSpc>
-              <a:buNone/>
-            </a:pPr>
-            <a:r>
-              <a:rPr lang="en-US" sz="1350" b="1" dirty="0">
+              <a:buNone/>
+            </a:pPr>
+            <a:r>
+              <a:rPr lang="en-US" sz="1100" dirty="0">
                 <a:solidFill>
                   <a:srgbClr val="1B1B2F"/>
                 </a:solidFill>
-                <a:latin typeface="Calibri" pitchFamily="34" charset="0"/>
-                <a:ea typeface="Calibri" pitchFamily="34" charset="-122"/>
-                <a:cs typeface="Calibri" pitchFamily="34" charset="-120"/>
-              </a:rPr>
-              <a:t>→  +91-xxxxx-4821.  </a:t>
-            </a:r>
+                <a:latin typeface="Consolas" pitchFamily="34" charset="0"/>
+                <a:ea typeface="Consolas" pitchFamily="34" charset="-122"/>
+                <a:cs typeface="Consolas" pitchFamily="34" charset="-120"/>
+              </a:rPr>
+              <a:t>=LEFT(C2,2)&amp;"***@"&amp;MID(C2,FIND("@",C2)+1,50)</a:t>
+            </a:r>
+            <a:endParaRPr lang="en-US" sz="1100" dirty="0"/>
+          </a:p>
+        </p:txBody>
+      </p:sp>
+      <p:sp>
+        <p:nvSpPr>
+          <p:cNvPr id="17" name="Text 15"/>
+          <p:cNvSpPr txBox="1"/>
+          <p:nvPr/>
+        </p:nvSpPr>
+        <p:spPr>
+          <a:xfrm>
+            <a:off x="8915400" y="3465576"/>
+            <a:ext cx="2697480" cy="548640"/>
+          </a:xfrm>
+          <a:prstGeom prst="rect">
+            <a:avLst/>
+          </a:prstGeom>
+          <a:noFill/>
+          <a:ln/>
+        </p:spPr>
+        <p:txBody>
+          <a:bodyPr wrap="square" lIns="0" tIns="0" rIns="0" bIns="0" rtlCol="0" anchor="ctr"/>
+          <a:lstStyle/>
+          <a:p>
             <a:pPr algn="l" indent="0" marL="0">
-              <a:lnSpc>
-                <a:spcPct val="110000"/>
-              </a:lnSpc>
-              <a:buNone/>
-            </a:pPr>
-            <a:r>
-              <a:rPr lang="en-US" sz="1350" dirty="0">
-                <a:solidFill>
-                  <a:srgbClr val="5B6472"/>
-                </a:solidFill>
-                <a:latin typeface="Calibri" pitchFamily="34" charset="0"/>
-                <a:ea typeface="Calibri" pitchFamily="34" charset="-122"/>
-                <a:cs typeface="Calibri" pitchFamily="34" charset="-120"/>
-              </a:rPr>
-              <a:t>Show only what the question actually needs.</a:t>
-            </a:r>
-            <a:endParaRPr lang="en-US" sz="1350" dirty="0"/>
-          </a:p>
-        </p:txBody>
-      </p:sp>
-      <p:sp>
-        <p:nvSpPr>
-          <p:cNvPr id="17" name="Text 15"/>
-          <p:cNvSpPr txBox="1"/>
-          <p:nvPr/>
-        </p:nvSpPr>
-        <p:spPr>
-          <a:xfrm>
-            <a:off x="566928" y="4709160"/>
-            <a:ext cx="11055096" cy="777240"/>
+              <a:buNone/>
+            </a:pPr>
+            <a:r>
+              <a:rPr lang="en-US" sz="1200" b="1" dirty="0">
+                <a:solidFill>
+                  <a:srgbClr val="138A72"/>
+                </a:solidFill>
+                <a:latin typeface="Consolas" pitchFamily="34" charset="0"/>
+                <a:ea typeface="Consolas" pitchFamily="34" charset="-122"/>
+                <a:cs typeface="Consolas" pitchFamily="34" charset="-120"/>
+              </a:rPr>
+              <a:t>kr***@example.com</a:t>
+            </a:r>
+            <a:endParaRPr lang="en-US" sz="1200" dirty="0"/>
+          </a:p>
+        </p:txBody>
+      </p:sp>
+      <p:sp>
+        <p:nvSpPr>
+          <p:cNvPr id="18" name="Text 16"/>
+          <p:cNvSpPr txBox="1"/>
+          <p:nvPr/>
+        </p:nvSpPr>
+        <p:spPr>
+          <a:xfrm>
+            <a:off x="566928" y="4069080"/>
+            <a:ext cx="2286000" cy="548640"/>
+          </a:xfrm>
+          <a:prstGeom prst="rect">
+            <a:avLst/>
+          </a:prstGeom>
+          <a:noFill/>
+          <a:ln/>
+        </p:spPr>
+        <p:txBody>
+          <a:bodyPr wrap="square" lIns="0" tIns="0" rIns="0" bIns="0" rtlCol="0" anchor="ctr"/>
+          <a:lstStyle/>
+          <a:p>
+            <a:pPr algn="l" indent="0" marL="0">
+              <a:buNone/>
+            </a:pPr>
+            <a:r>
+              <a:rPr lang="en-US" sz="1200" b="1" dirty="0">
+                <a:solidFill>
+                  <a:srgbClr val="1B1B2F"/>
+                </a:solidFill>
+                <a:latin typeface="Consolas" pitchFamily="34" charset="0"/>
+                <a:ea typeface="Consolas" pitchFamily="34" charset="-122"/>
+                <a:cs typeface="Consolas" pitchFamily="34" charset="-120"/>
+              </a:rPr>
+              <a:t>phone</a:t>
+            </a:r>
+            <a:endParaRPr lang="en-US" sz="1200" dirty="0"/>
+          </a:p>
+        </p:txBody>
+      </p:sp>
+      <p:sp>
+        <p:nvSpPr>
+          <p:cNvPr id="19" name="Text 17"/>
+          <p:cNvSpPr txBox="1"/>
+          <p:nvPr/>
+        </p:nvSpPr>
+        <p:spPr>
+          <a:xfrm>
+            <a:off x="2971800" y="4069080"/>
+            <a:ext cx="5760720" cy="548640"/>
+          </a:xfrm>
+          <a:prstGeom prst="rect">
+            <a:avLst/>
+          </a:prstGeom>
+          <a:noFill/>
+          <a:ln/>
+        </p:spPr>
+        <p:txBody>
+          <a:bodyPr wrap="square" lIns="0" tIns="0" rIns="0" bIns="0" rtlCol="0" anchor="ctr"/>
+          <a:lstStyle/>
+          <a:p>
+            <a:pPr algn="l" indent="0" marL="0">
+              <a:buNone/>
+            </a:pPr>
+            <a:r>
+              <a:rPr lang="en-US" sz="1100" dirty="0">
+                <a:solidFill>
+                  <a:srgbClr val="1B1B2F"/>
+                </a:solidFill>
+                <a:latin typeface="Consolas" pitchFamily="34" charset="0"/>
+                <a:ea typeface="Consolas" pitchFamily="34" charset="-122"/>
+                <a:cs typeface="Consolas" pitchFamily="34" charset="-120"/>
+              </a:rPr>
+              <a:t>="xxxxxx"&amp;RIGHT(D2,4)</a:t>
+            </a:r>
+            <a:endParaRPr lang="en-US" sz="1100" dirty="0"/>
+          </a:p>
+        </p:txBody>
+      </p:sp>
+      <p:sp>
+        <p:nvSpPr>
+          <p:cNvPr id="20" name="Text 18"/>
+          <p:cNvSpPr txBox="1"/>
+          <p:nvPr/>
+        </p:nvSpPr>
+        <p:spPr>
+          <a:xfrm>
+            <a:off x="8915400" y="4069080"/>
+            <a:ext cx="2697480" cy="548640"/>
+          </a:xfrm>
+          <a:prstGeom prst="rect">
+            <a:avLst/>
+          </a:prstGeom>
+          <a:noFill/>
+          <a:ln/>
+        </p:spPr>
+        <p:txBody>
+          <a:bodyPr wrap="square" lIns="0" tIns="0" rIns="0" bIns="0" rtlCol="0" anchor="ctr"/>
+          <a:lstStyle/>
+          <a:p>
+            <a:pPr algn="l" indent="0" marL="0">
+              <a:buNone/>
+            </a:pPr>
+            <a:r>
+              <a:rPr lang="en-US" sz="1200" b="1" dirty="0">
+                <a:solidFill>
+                  <a:srgbClr val="138A72"/>
+                </a:solidFill>
+                <a:latin typeface="Consolas" pitchFamily="34" charset="0"/>
+                <a:ea typeface="Consolas" pitchFamily="34" charset="-122"/>
+                <a:cs typeface="Consolas" pitchFamily="34" charset="-120"/>
+              </a:rPr>
+              <a:t>xxxxxx2098</a:t>
+            </a:r>
+            <a:endParaRPr lang="en-US" sz="1200" dirty="0"/>
+          </a:p>
+        </p:txBody>
+      </p:sp>
+      <p:sp>
+        <p:nvSpPr>
+          <p:cNvPr id="21" name="Shape 19"/>
+          <p:cNvSpPr/>
+          <p:nvPr/>
+        </p:nvSpPr>
+        <p:spPr>
+          <a:xfrm>
+            <a:off x="475488" y="4645152"/>
+            <a:ext cx="11237976" cy="603504"/>
           </a:xfrm>
           <a:prstGeom prst="roundRect">
             <a:avLst>
-              <a:gd name="adj" fmla="val 7059"/>
+              <a:gd name="adj" fmla="val 6061"/>
             </a:avLst>
           </a:prstGeom>
           <a:solidFill>
-            <a:srgbClr val="1F2A5A"/>
+            <a:srgbClr val="F4F6F9"/>
           </a:solidFill>
           <a:ln/>
         </p:spPr>
+      </p:sp>
+      <p:sp>
+        <p:nvSpPr>
+          <p:cNvPr id="22" name="Text 20"/>
+          <p:cNvSpPr txBox="1"/>
+          <p:nvPr/>
+        </p:nvSpPr>
+        <p:spPr>
+          <a:xfrm>
+            <a:off x="566928" y="4672584"/>
+            <a:ext cx="2286000" cy="548640"/>
+          </a:xfrm>
+          <a:prstGeom prst="rect">
+            <a:avLst/>
+          </a:prstGeom>
+          <a:noFill/>
+          <a:ln/>
+        </p:spPr>
+        <p:txBody>
+          <a:bodyPr wrap="square" lIns="0" tIns="0" rIns="0" bIns="0" rtlCol="0" anchor="ctr"/>
+          <a:lstStyle/>
+          <a:p>
+            <a:pPr algn="l" indent="0" marL="0">
+              <a:buNone/>
+            </a:pPr>
+            <a:r>
+              <a:rPr lang="en-US" sz="1200" b="1" dirty="0">
+                <a:solidFill>
+                  <a:srgbClr val="1B1B2F"/>
+                </a:solidFill>
+                <a:latin typeface="Consolas" pitchFamily="34" charset="0"/>
+                <a:ea typeface="Consolas" pitchFamily="34" charset="-122"/>
+                <a:cs typeface="Consolas" pitchFamily="34" charset="-120"/>
+              </a:rPr>
+              <a:t>date_of_birth</a:t>
+            </a:r>
+            <a:endParaRPr lang="en-US" sz="1200" dirty="0"/>
+          </a:p>
+        </p:txBody>
+      </p:sp>
+      <p:sp>
+        <p:nvSpPr>
+          <p:cNvPr id="23" name="Text 21"/>
+          <p:cNvSpPr txBox="1"/>
+          <p:nvPr/>
+        </p:nvSpPr>
+        <p:spPr>
+          <a:xfrm>
+            <a:off x="2971800" y="4672584"/>
+            <a:ext cx="5760720" cy="548640"/>
+          </a:xfrm>
+          <a:prstGeom prst="rect">
+            <a:avLst/>
+          </a:prstGeom>
+          <a:noFill/>
+          <a:ln/>
+        </p:spPr>
+        <p:txBody>
+          <a:bodyPr wrap="square" lIns="0" tIns="0" rIns="0" bIns="0" rtlCol="0" anchor="ctr"/>
+          <a:lstStyle/>
+          <a:p>
+            <a:pPr algn="l" indent="0" marL="0">
+              <a:buNone/>
+            </a:pPr>
+            <a:r>
+              <a:rPr lang="en-US" sz="1100" dirty="0">
+                <a:solidFill>
+                  <a:srgbClr val="1B1B2F"/>
+                </a:solidFill>
+                <a:latin typeface="Consolas" pitchFamily="34" charset="0"/>
+                <a:ea typeface="Consolas" pitchFamily="34" charset="-122"/>
+                <a:cs typeface="Consolas" pitchFamily="34" charset="-120"/>
+              </a:rPr>
+              <a:t>=TEXT(E2,"yyyy")   — year only / age band</a:t>
+            </a:r>
+            <a:endParaRPr lang="en-US" sz="1100" dirty="0"/>
+          </a:p>
+        </p:txBody>
+      </p:sp>
+      <p:sp>
+        <p:nvSpPr>
+          <p:cNvPr id="24" name="Text 22"/>
+          <p:cNvSpPr txBox="1"/>
+          <p:nvPr/>
+        </p:nvSpPr>
+        <p:spPr>
+          <a:xfrm>
+            <a:off x="8915400" y="4672584"/>
+            <a:ext cx="2697480" cy="548640"/>
+          </a:xfrm>
+          <a:prstGeom prst="rect">
+            <a:avLst/>
+          </a:prstGeom>
+          <a:noFill/>
+          <a:ln/>
+        </p:spPr>
+        <p:txBody>
+          <a:bodyPr wrap="square" lIns="0" tIns="0" rIns="0" bIns="0" rtlCol="0" anchor="ctr"/>
+          <a:lstStyle/>
+          <a:p>
+            <a:pPr algn="l" indent="0" marL="0">
+              <a:buNone/>
+            </a:pPr>
+            <a:r>
+              <a:rPr lang="en-US" sz="1200" b="1" dirty="0">
+                <a:solidFill>
+                  <a:srgbClr val="138A72"/>
+                </a:solidFill>
+                <a:latin typeface="Consolas" pitchFamily="34" charset="0"/>
+                <a:ea typeface="Consolas" pitchFamily="34" charset="-122"/>
+                <a:cs typeface="Consolas" pitchFamily="34" charset="-120"/>
+              </a:rPr>
+              <a:t>1996</a:t>
+            </a:r>
+            <a:endParaRPr lang="en-US" sz="1200" dirty="0"/>
+          </a:p>
+        </p:txBody>
+      </p:sp>
+      <p:sp>
+        <p:nvSpPr>
+          <p:cNvPr id="25" name="Text 23"/>
+          <p:cNvSpPr txBox="1"/>
+          <p:nvPr/>
+        </p:nvSpPr>
+        <p:spPr>
+          <a:xfrm>
+            <a:off x="566928" y="5440680"/>
+            <a:ext cx="11055096" cy="457200"/>
+          </a:xfrm>
+          <a:prstGeom prst="rect">
+            <a:avLst/>
+          </a:prstGeom>
+          <a:noFill/>
+          <a:ln/>
+        </p:spPr>
         <p:txBody>
           <a:bodyPr wrap="square" lIns="0" tIns="0" rIns="0" bIns="0" rtlCol="0" anchor="ctr"/>
           <a:lstStyle/>
@@ -5417,31 +6561,59 @@
               <a:buNone/>
             </a:pPr>
             <a:r>
-              <a:rPr lang="en-US" sz="1700" dirty="0">
-                <a:solidFill>
-                  <a:srgbClr val="FFFFFF"/>
-                </a:solidFill>
-                <a:latin typeface="Calibri" pitchFamily="34" charset="0"/>
-                <a:ea typeface="Calibri" pitchFamily="34" charset="-122"/>
-                <a:cs typeface="Calibri" pitchFamily="34" charset="-120"/>
-              </a:rPr>
-              <a:t>One of today's 10 questions is unethical to answer with this data as-is.  </a:t>
+              <a:rPr lang="en-US" sz="1300" b="1" dirty="0">
+                <a:solidFill>
+                  <a:srgbClr val="1B1B2F"/>
+                </a:solidFill>
+                <a:latin typeface="Consolas" pitchFamily="34" charset="0"/>
+                <a:ea typeface="Consolas" pitchFamily="34" charset="-122"/>
+                <a:cs typeface="Consolas" pitchFamily="34" charset="-120"/>
+              </a:rPr>
+              <a:t>city</a:t>
             </a:r>
             <a:pPr algn="ctr" indent="0" marL="0">
               <a:buNone/>
             </a:pPr>
             <a:r>
-              <a:rPr lang="en-US" sz="1700" b="1" dirty="0">
-                <a:solidFill>
-                  <a:srgbClr val="F4B942"/>
-                </a:solidFill>
-                <a:latin typeface="Calibri" pitchFamily="34" charset="0"/>
-                <a:ea typeface="Calibri" pitchFamily="34" charset="-122"/>
-                <a:cs typeface="Calibri" pitchFamily="34" charset="-120"/>
-              </a:rPr>
-              <a:t>Find it.</a:t>
-            </a:r>
-            <a:endParaRPr lang="en-US" sz="1700" dirty="0"/>
+              <a:rPr lang="en-US" sz="1300" dirty="0">
+                <a:solidFill>
+                  <a:srgbClr val="5B6472"/>
+                </a:solidFill>
+                <a:latin typeface="Calibri" pitchFamily="34" charset="0"/>
+                <a:ea typeface="Calibri" pitchFamily="34" charset="-122"/>
+                <a:cs typeface="Calibri" pitchFamily="34" charset="-120"/>
+              </a:rPr>
+              <a:t> stays readable but is a </a:t>
+            </a:r>
+            <a:pPr algn="ctr" indent="0" marL="0">
+              <a:buNone/>
+            </a:pPr>
+            <a:r>
+              <a:rPr lang="en-US" sz="1300" b="1" dirty="0">
+                <a:solidFill>
+                  <a:srgbClr val="F0544F"/>
+                </a:solidFill>
+                <a:latin typeface="Calibri" pitchFamily="34" charset="0"/>
+                <a:ea typeface="Calibri" pitchFamily="34" charset="-122"/>
+                <a:cs typeface="Calibri" pitchFamily="34" charset="-120"/>
+              </a:rPr>
+              <a:t>quasi-identifier</a:t>
+            </a:r>
+            <a:pPr algn="ctr" indent="0" marL="0">
+              <a:buNone/>
+            </a:pPr>
+            <a:r>
+              <a:rPr lang="en-US" sz="1300" dirty="0">
+                <a:solidFill>
+                  <a:srgbClr val="5B6472"/>
+                </a:solidFill>
+                <a:latin typeface="Calibri" pitchFamily="34" charset="0"/>
+                <a:ea typeface="Calibri" pitchFamily="34" charset="-122"/>
+                <a:cs typeface="Calibri" pitchFamily="34" charset="-120"/>
+              </a:rPr>
+              <a:t> — city + date of birth can re-identify someone with no name attached.</a:t>
+            </a:r>
+            <a:endParaRPr lang="en-US" sz="1300" dirty="0"/>
           </a:p>
         </p:txBody>
       </p:sp>
@@ -5456,6 +6628,869 @@
 <file path=ppt/slides/slide6.xml><?xml version="1.0" encoding="utf-8"?>
 <p:sld xmlns:a="http://schemas.openxmlformats.org/drawingml/2006/main" xmlns:r="http://schemas.openxmlformats.org/officeDocument/2006/relationships" xmlns:p="http://schemas.openxmlformats.org/presentationml/2006/main">
   <p:cSld name="Slide 6">
+    <p:bg>
+      <p:bgPr>
+        <a:solidFill>
+          <a:srgbClr val="FFFFFF"/>
+        </a:solidFill>
+      </p:bgPr>
+    </p:bg>
+    <p:spTree>
+      <p:nvGrpSpPr>
+        <p:cNvPr id="1" name=""/>
+        <p:cNvGrpSpPr/>
+        <p:nvPr/>
+      </p:nvGrpSpPr>
+      <p:grpSpPr>
+        <a:xfrm>
+          <a:off x="0" y="0"/>
+          <a:ext cx="0" cy="0"/>
+          <a:chOff x="0" y="0"/>
+          <a:chExt cx="0" cy="0"/>
+        </a:xfrm>
+      </p:grpSpPr>
+      <p:sp>
+        <p:nvSpPr>
+          <p:cNvPr id="2" name="Text 0"/>
+          <p:cNvSpPr txBox="1"/>
+          <p:nvPr/>
+        </p:nvSpPr>
+        <p:spPr>
+          <a:xfrm>
+            <a:off x="566928" y="420624"/>
+            <a:ext cx="10972800" cy="292608"/>
+          </a:xfrm>
+          <a:prstGeom prst="rect">
+            <a:avLst/>
+          </a:prstGeom>
+          <a:noFill/>
+          <a:ln/>
+        </p:spPr>
+        <p:txBody>
+          <a:bodyPr wrap="square" lIns="0" tIns="0" rIns="0" bIns="0" rtlCol="0" anchor="ctr"/>
+          <a:lstStyle/>
+          <a:p>
+            <a:pPr indent="0" marL="0">
+              <a:buNone/>
+            </a:pPr>
+            <a:r>
+              <a:rPr lang="en-US" sz="1150" b="1" spc="250" kern="0" dirty="0">
+                <a:solidFill>
+                  <a:srgbClr val="F0544F"/>
+                </a:solidFill>
+                <a:latin typeface="Calibri" pitchFamily="34" charset="0"/>
+                <a:ea typeface="Calibri" pitchFamily="34" charset="-122"/>
+                <a:cs typeface="Calibri" pitchFamily="34" charset="-120"/>
+              </a:rPr>
+              <a:t>GOVERNANCE</a:t>
+            </a:r>
+            <a:endParaRPr lang="en-US" sz="1150" dirty="0"/>
+          </a:p>
+        </p:txBody>
+      </p:sp>
+      <p:sp>
+        <p:nvSpPr>
+          <p:cNvPr id="3" name="Text 1"/>
+          <p:cNvSpPr txBox="1"/>
+          <p:nvPr/>
+        </p:nvSpPr>
+        <p:spPr>
+          <a:xfrm>
+            <a:off x="566928" y="713232"/>
+            <a:ext cx="11064240" cy="822960"/>
+          </a:xfrm>
+          <a:prstGeom prst="rect">
+            <a:avLst/>
+          </a:prstGeom>
+          <a:noFill/>
+          <a:ln/>
+        </p:spPr>
+        <p:txBody>
+          <a:bodyPr wrap="square" lIns="0" tIns="0" rIns="0" bIns="0" rtlCol="0" anchor="ctr"/>
+          <a:lstStyle/>
+          <a:p>
+            <a:pPr algn="l" indent="0" marL="0">
+              <a:buNone/>
+            </a:pPr>
+            <a:r>
+              <a:rPr lang="en-US" sz="3000" b="1" dirty="0">
+                <a:solidFill>
+                  <a:srgbClr val="1B1B2F"/>
+                </a:solidFill>
+                <a:latin typeface="Calibri" pitchFamily="34" charset="0"/>
+                <a:ea typeface="Calibri" pitchFamily="34" charset="-122"/>
+                <a:cs typeface="Calibri" pitchFamily="34" charset="-120"/>
+              </a:rPr>
+              <a:t>You can — but should you?  India’s DPDP Act 2023</a:t>
+            </a:r>
+            <a:endParaRPr lang="en-US" sz="3000" dirty="0"/>
+          </a:p>
+        </p:txBody>
+      </p:sp>
+      <p:sp>
+        <p:nvSpPr>
+          <p:cNvPr id="4" name="Shape 2"/>
+          <p:cNvSpPr/>
+          <p:nvPr/>
+        </p:nvSpPr>
+        <p:spPr>
+          <a:xfrm>
+            <a:off x="566928" y="1783080"/>
+            <a:ext cx="2475738" cy="3017520"/>
+          </a:xfrm>
+          <a:prstGeom prst="roundRect">
+            <a:avLst>
+              <a:gd name="adj" fmla="val 2955"/>
+            </a:avLst>
+          </a:prstGeom>
+          <a:solidFill>
+            <a:srgbClr val="F4F6F9"/>
+          </a:solidFill>
+          <a:ln w="12700">
+            <a:solidFill>
+              <a:srgbClr val="DCE2EA"/>
+            </a:solidFill>
+            <a:prstDash val="solid"/>
+          </a:ln>
+          <a:effectLst>
+            <a:outerShdw sx="100000" sy="100000" kx="0" ky="0" algn="bl" rotWithShape="0" blurRad="88900" dist="38100" dir="5400000">
+              <a:srgbClr val="1B1B2F">
+                <a:alpha val="16000"/>
+              </a:srgbClr>
+            </a:outerShdw>
+          </a:effectLst>
+        </p:spPr>
+      </p:sp>
+      <p:sp>
+        <p:nvSpPr>
+          <p:cNvPr id="5" name="Shape 3"/>
+          <p:cNvSpPr/>
+          <p:nvPr/>
+        </p:nvSpPr>
+        <p:spPr>
+          <a:xfrm>
+            <a:off x="1530477" y="2057400"/>
+            <a:ext cx="548640" cy="548640"/>
+          </a:xfrm>
+          <a:prstGeom prst="ellipse">
+            <a:avLst/>
+          </a:prstGeom>
+          <a:solidFill>
+            <a:srgbClr val="138A72"/>
+          </a:solidFill>
+          <a:ln/>
+        </p:spPr>
+      </p:sp>
+      <p:sp>
+        <p:nvSpPr>
+          <p:cNvPr id="6" name="Text 4"/>
+          <p:cNvSpPr txBox="1"/>
+          <p:nvPr/>
+        </p:nvSpPr>
+        <p:spPr>
+          <a:xfrm>
+            <a:off x="1530477" y="2057400"/>
+            <a:ext cx="548640" cy="548640"/>
+          </a:xfrm>
+          <a:prstGeom prst="rect">
+            <a:avLst/>
+          </a:prstGeom>
+          <a:noFill/>
+          <a:ln/>
+        </p:spPr>
+        <p:txBody>
+          <a:bodyPr wrap="square" lIns="0" tIns="0" rIns="0" bIns="0" rtlCol="0" anchor="ctr"/>
+          <a:lstStyle/>
+          <a:p>
+            <a:pPr algn="ctr" indent="0" marL="0">
+              <a:buNone/>
+            </a:pPr>
+            <a:r>
+              <a:rPr lang="en-US" sz="1800" b="1" dirty="0">
+                <a:solidFill>
+                  <a:srgbClr val="FFFFFF"/>
+                </a:solidFill>
+                <a:latin typeface="Calibri" pitchFamily="34" charset="0"/>
+                <a:ea typeface="Calibri" pitchFamily="34" charset="-122"/>
+                <a:cs typeface="Calibri" pitchFamily="34" charset="-120"/>
+              </a:rPr>
+              <a:t>1</a:t>
+            </a:r>
+            <a:endParaRPr lang="en-US" sz="1800" dirty="0"/>
+          </a:p>
+        </p:txBody>
+      </p:sp>
+      <p:sp>
+        <p:nvSpPr>
+          <p:cNvPr id="7" name="Text 5"/>
+          <p:cNvSpPr txBox="1"/>
+          <p:nvPr/>
+        </p:nvSpPr>
+        <p:spPr>
+          <a:xfrm>
+            <a:off x="704088" y="2788920"/>
+            <a:ext cx="2201418" cy="457200"/>
+          </a:xfrm>
+          <a:prstGeom prst="rect">
+            <a:avLst/>
+          </a:prstGeom>
+          <a:noFill/>
+          <a:ln/>
+        </p:spPr>
+        <p:txBody>
+          <a:bodyPr wrap="square" lIns="0" tIns="0" rIns="0" bIns="0" rtlCol="0" anchor="ctr"/>
+          <a:lstStyle/>
+          <a:p>
+            <a:pPr algn="ctr" indent="0" marL="0">
+              <a:buNone/>
+            </a:pPr>
+            <a:r>
+              <a:rPr lang="en-US" sz="1600" b="1" dirty="0">
+                <a:solidFill>
+                  <a:srgbClr val="138A72"/>
+                </a:solidFill>
+                <a:latin typeface="Calibri" pitchFamily="34" charset="0"/>
+                <a:ea typeface="Calibri" pitchFamily="34" charset="-122"/>
+                <a:cs typeface="Calibri" pitchFamily="34" charset="-120"/>
+              </a:rPr>
+              <a:t>Consent</a:t>
+            </a:r>
+            <a:endParaRPr lang="en-US" sz="1600" dirty="0"/>
+          </a:p>
+        </p:txBody>
+      </p:sp>
+      <p:sp>
+        <p:nvSpPr>
+          <p:cNvPr id="8" name="Text 6"/>
+          <p:cNvSpPr txBox="1"/>
+          <p:nvPr/>
+        </p:nvSpPr>
+        <p:spPr>
+          <a:xfrm>
+            <a:off x="795528" y="3291840"/>
+            <a:ext cx="2018538" cy="1325880"/>
+          </a:xfrm>
+          <a:prstGeom prst="rect">
+            <a:avLst/>
+          </a:prstGeom>
+          <a:noFill/>
+          <a:ln/>
+        </p:spPr>
+        <p:txBody>
+          <a:bodyPr wrap="square" lIns="0" tIns="0" rIns="0" bIns="0" rtlCol="0" anchor="t"/>
+          <a:lstStyle/>
+          <a:p>
+            <a:pPr algn="ctr" indent="0" marL="0">
+              <a:lnSpc>
+                <a:spcPct val="110000"/>
+              </a:lnSpc>
+              <a:buNone/>
+            </a:pPr>
+            <a:r>
+              <a:rPr lang="en-US" sz="1300" dirty="0">
+                <a:solidFill>
+                  <a:srgbClr val="1B1B2F"/>
+                </a:solidFill>
+                <a:latin typeface="Calibri" pitchFamily="34" charset="0"/>
+                <a:ea typeface="Calibri" pitchFamily="34" charset="-122"/>
+                <a:cs typeface="Calibri" pitchFamily="34" charset="-120"/>
+              </a:rPr>
+              <a:t>Collect personal data only with clear, informed consent for a stated purpose.</a:t>
+            </a:r>
+            <a:endParaRPr lang="en-US" sz="1300" dirty="0"/>
+          </a:p>
+        </p:txBody>
+      </p:sp>
+      <p:sp>
+        <p:nvSpPr>
+          <p:cNvPr id="9" name="Shape 7"/>
+          <p:cNvSpPr/>
+          <p:nvPr/>
+        </p:nvSpPr>
+        <p:spPr>
+          <a:xfrm>
+            <a:off x="3426714" y="1783080"/>
+            <a:ext cx="2475738" cy="3017520"/>
+          </a:xfrm>
+          <a:prstGeom prst="roundRect">
+            <a:avLst>
+              <a:gd name="adj" fmla="val 2955"/>
+            </a:avLst>
+          </a:prstGeom>
+          <a:solidFill>
+            <a:srgbClr val="F4F6F9"/>
+          </a:solidFill>
+          <a:ln w="12700">
+            <a:solidFill>
+              <a:srgbClr val="DCE2EA"/>
+            </a:solidFill>
+            <a:prstDash val="solid"/>
+          </a:ln>
+          <a:effectLst>
+            <a:outerShdw sx="100000" sy="100000" kx="0" ky="0" algn="bl" rotWithShape="0" blurRad="88900" dist="38100" dir="5400000">
+              <a:srgbClr val="1B1B2F">
+                <a:alpha val="16000"/>
+              </a:srgbClr>
+            </a:outerShdw>
+          </a:effectLst>
+        </p:spPr>
+      </p:sp>
+      <p:sp>
+        <p:nvSpPr>
+          <p:cNvPr id="10" name="Shape 8"/>
+          <p:cNvSpPr/>
+          <p:nvPr/>
+        </p:nvSpPr>
+        <p:spPr>
+          <a:xfrm>
+            <a:off x="4390263" y="2057400"/>
+            <a:ext cx="548640" cy="548640"/>
+          </a:xfrm>
+          <a:prstGeom prst="ellipse">
+            <a:avLst/>
+          </a:prstGeom>
+          <a:solidFill>
+            <a:srgbClr val="FF8C42"/>
+          </a:solidFill>
+          <a:ln/>
+        </p:spPr>
+      </p:sp>
+      <p:sp>
+        <p:nvSpPr>
+          <p:cNvPr id="11" name="Text 9"/>
+          <p:cNvSpPr txBox="1"/>
+          <p:nvPr/>
+        </p:nvSpPr>
+        <p:spPr>
+          <a:xfrm>
+            <a:off x="4390263" y="2057400"/>
+            <a:ext cx="548640" cy="548640"/>
+          </a:xfrm>
+          <a:prstGeom prst="rect">
+            <a:avLst/>
+          </a:prstGeom>
+          <a:noFill/>
+          <a:ln/>
+        </p:spPr>
+        <p:txBody>
+          <a:bodyPr wrap="square" lIns="0" tIns="0" rIns="0" bIns="0" rtlCol="0" anchor="ctr"/>
+          <a:lstStyle/>
+          <a:p>
+            <a:pPr algn="ctr" indent="0" marL="0">
+              <a:buNone/>
+            </a:pPr>
+            <a:r>
+              <a:rPr lang="en-US" sz="1800" b="1" dirty="0">
+                <a:solidFill>
+                  <a:srgbClr val="FFFFFF"/>
+                </a:solidFill>
+                <a:latin typeface="Calibri" pitchFamily="34" charset="0"/>
+                <a:ea typeface="Calibri" pitchFamily="34" charset="-122"/>
+                <a:cs typeface="Calibri" pitchFamily="34" charset="-120"/>
+              </a:rPr>
+              <a:t>2</a:t>
+            </a:r>
+            <a:endParaRPr lang="en-US" sz="1800" dirty="0"/>
+          </a:p>
+        </p:txBody>
+      </p:sp>
+      <p:sp>
+        <p:nvSpPr>
+          <p:cNvPr id="12" name="Text 10"/>
+          <p:cNvSpPr txBox="1"/>
+          <p:nvPr/>
+        </p:nvSpPr>
+        <p:spPr>
+          <a:xfrm>
+            <a:off x="3563874" y="2788920"/>
+            <a:ext cx="2201418" cy="457200"/>
+          </a:xfrm>
+          <a:prstGeom prst="rect">
+            <a:avLst/>
+          </a:prstGeom>
+          <a:noFill/>
+          <a:ln/>
+        </p:spPr>
+        <p:txBody>
+          <a:bodyPr wrap="square" lIns="0" tIns="0" rIns="0" bIns="0" rtlCol="0" anchor="ctr"/>
+          <a:lstStyle/>
+          <a:p>
+            <a:pPr algn="ctr" indent="0" marL="0">
+              <a:buNone/>
+            </a:pPr>
+            <a:r>
+              <a:rPr lang="en-US" sz="1600" b="1" dirty="0">
+                <a:solidFill>
+                  <a:srgbClr val="FF8C42"/>
+                </a:solidFill>
+                <a:latin typeface="Calibri" pitchFamily="34" charset="0"/>
+                <a:ea typeface="Calibri" pitchFamily="34" charset="-122"/>
+                <a:cs typeface="Calibri" pitchFamily="34" charset="-120"/>
+              </a:rPr>
+              <a:t>Purpose limit</a:t>
+            </a:r>
+            <a:endParaRPr lang="en-US" sz="1600" dirty="0"/>
+          </a:p>
+        </p:txBody>
+      </p:sp>
+      <p:sp>
+        <p:nvSpPr>
+          <p:cNvPr id="13" name="Text 11"/>
+          <p:cNvSpPr txBox="1"/>
+          <p:nvPr/>
+        </p:nvSpPr>
+        <p:spPr>
+          <a:xfrm>
+            <a:off x="3655314" y="3291840"/>
+            <a:ext cx="2018538" cy="1325880"/>
+          </a:xfrm>
+          <a:prstGeom prst="rect">
+            <a:avLst/>
+          </a:prstGeom>
+          <a:noFill/>
+          <a:ln/>
+        </p:spPr>
+        <p:txBody>
+          <a:bodyPr wrap="square" lIns="0" tIns="0" rIns="0" bIns="0" rtlCol="0" anchor="t"/>
+          <a:lstStyle/>
+          <a:p>
+            <a:pPr algn="ctr" indent="0" marL="0">
+              <a:lnSpc>
+                <a:spcPct val="110000"/>
+              </a:lnSpc>
+              <a:buNone/>
+            </a:pPr>
+            <a:r>
+              <a:rPr lang="en-US" sz="1300" dirty="0">
+                <a:solidFill>
+                  <a:srgbClr val="1B1B2F"/>
+                </a:solidFill>
+                <a:latin typeface="Calibri" pitchFamily="34" charset="0"/>
+                <a:ea typeface="Calibri" pitchFamily="34" charset="-122"/>
+                <a:cs typeface="Calibri" pitchFamily="34" charset="-120"/>
+              </a:rPr>
+              <a:t>Data taken to deliver food can’t be silently reused — e.g. sold to a partner.</a:t>
+            </a:r>
+            <a:endParaRPr lang="en-US" sz="1300" dirty="0"/>
+          </a:p>
+        </p:txBody>
+      </p:sp>
+      <p:sp>
+        <p:nvSpPr>
+          <p:cNvPr id="14" name="Shape 12"/>
+          <p:cNvSpPr/>
+          <p:nvPr/>
+        </p:nvSpPr>
+        <p:spPr>
+          <a:xfrm>
+            <a:off x="6286500" y="1783080"/>
+            <a:ext cx="2475738" cy="3017520"/>
+          </a:xfrm>
+          <a:prstGeom prst="roundRect">
+            <a:avLst>
+              <a:gd name="adj" fmla="val 2955"/>
+            </a:avLst>
+          </a:prstGeom>
+          <a:solidFill>
+            <a:srgbClr val="F4F6F9"/>
+          </a:solidFill>
+          <a:ln w="12700">
+            <a:solidFill>
+              <a:srgbClr val="DCE2EA"/>
+            </a:solidFill>
+            <a:prstDash val="solid"/>
+          </a:ln>
+          <a:effectLst>
+            <a:outerShdw sx="100000" sy="100000" kx="0" ky="0" algn="bl" rotWithShape="0" blurRad="88900" dist="38100" dir="5400000">
+              <a:srgbClr val="1B1B2F">
+                <a:alpha val="16000"/>
+              </a:srgbClr>
+            </a:outerShdw>
+          </a:effectLst>
+        </p:spPr>
+      </p:sp>
+      <p:sp>
+        <p:nvSpPr>
+          <p:cNvPr id="15" name="Shape 13"/>
+          <p:cNvSpPr/>
+          <p:nvPr/>
+        </p:nvSpPr>
+        <p:spPr>
+          <a:xfrm>
+            <a:off x="7250049" y="2057400"/>
+            <a:ext cx="548640" cy="548640"/>
+          </a:xfrm>
+          <a:prstGeom prst="ellipse">
+            <a:avLst/>
+          </a:prstGeom>
+          <a:solidFill>
+            <a:srgbClr val="F0544F"/>
+          </a:solidFill>
+          <a:ln/>
+        </p:spPr>
+      </p:sp>
+      <p:sp>
+        <p:nvSpPr>
+          <p:cNvPr id="16" name="Text 14"/>
+          <p:cNvSpPr txBox="1"/>
+          <p:nvPr/>
+        </p:nvSpPr>
+        <p:spPr>
+          <a:xfrm>
+            <a:off x="7250049" y="2057400"/>
+            <a:ext cx="548640" cy="548640"/>
+          </a:xfrm>
+          <a:prstGeom prst="rect">
+            <a:avLst/>
+          </a:prstGeom>
+          <a:noFill/>
+          <a:ln/>
+        </p:spPr>
+        <p:txBody>
+          <a:bodyPr wrap="square" lIns="0" tIns="0" rIns="0" bIns="0" rtlCol="0" anchor="ctr"/>
+          <a:lstStyle/>
+          <a:p>
+            <a:pPr algn="ctr" indent="0" marL="0">
+              <a:buNone/>
+            </a:pPr>
+            <a:r>
+              <a:rPr lang="en-US" sz="1800" b="1" dirty="0">
+                <a:solidFill>
+                  <a:srgbClr val="FFFFFF"/>
+                </a:solidFill>
+                <a:latin typeface="Calibri" pitchFamily="34" charset="0"/>
+                <a:ea typeface="Calibri" pitchFamily="34" charset="-122"/>
+                <a:cs typeface="Calibri" pitchFamily="34" charset="-120"/>
+              </a:rPr>
+              <a:t>3</a:t>
+            </a:r>
+            <a:endParaRPr lang="en-US" sz="1800" dirty="0"/>
+          </a:p>
+        </p:txBody>
+      </p:sp>
+      <p:sp>
+        <p:nvSpPr>
+          <p:cNvPr id="17" name="Text 15"/>
+          <p:cNvSpPr txBox="1"/>
+          <p:nvPr/>
+        </p:nvSpPr>
+        <p:spPr>
+          <a:xfrm>
+            <a:off x="6423660" y="2788920"/>
+            <a:ext cx="2201418" cy="457200"/>
+          </a:xfrm>
+          <a:prstGeom prst="rect">
+            <a:avLst/>
+          </a:prstGeom>
+          <a:noFill/>
+          <a:ln/>
+        </p:spPr>
+        <p:txBody>
+          <a:bodyPr wrap="square" lIns="0" tIns="0" rIns="0" bIns="0" rtlCol="0" anchor="ctr"/>
+          <a:lstStyle/>
+          <a:p>
+            <a:pPr algn="ctr" indent="0" marL="0">
+              <a:buNone/>
+            </a:pPr>
+            <a:r>
+              <a:rPr lang="en-US" sz="1600" b="1" dirty="0">
+                <a:solidFill>
+                  <a:srgbClr val="F0544F"/>
+                </a:solidFill>
+                <a:latin typeface="Calibri" pitchFamily="34" charset="0"/>
+                <a:ea typeface="Calibri" pitchFamily="34" charset="-122"/>
+                <a:cs typeface="Calibri" pitchFamily="34" charset="-120"/>
+              </a:rPr>
+              <a:t>Minimisation</a:t>
+            </a:r>
+            <a:endParaRPr lang="en-US" sz="1600" dirty="0"/>
+          </a:p>
+        </p:txBody>
+      </p:sp>
+      <p:sp>
+        <p:nvSpPr>
+          <p:cNvPr id="18" name="Text 16"/>
+          <p:cNvSpPr txBox="1"/>
+          <p:nvPr/>
+        </p:nvSpPr>
+        <p:spPr>
+          <a:xfrm>
+            <a:off x="6515100" y="3291840"/>
+            <a:ext cx="2018538" cy="1325880"/>
+          </a:xfrm>
+          <a:prstGeom prst="rect">
+            <a:avLst/>
+          </a:prstGeom>
+          <a:noFill/>
+          <a:ln/>
+        </p:spPr>
+        <p:txBody>
+          <a:bodyPr wrap="square" lIns="0" tIns="0" rIns="0" bIns="0" rtlCol="0" anchor="t"/>
+          <a:lstStyle/>
+          <a:p>
+            <a:pPr algn="ctr" indent="0" marL="0">
+              <a:lnSpc>
+                <a:spcPct val="110000"/>
+              </a:lnSpc>
+              <a:buNone/>
+            </a:pPr>
+            <a:r>
+              <a:rPr lang="en-US" sz="1300" dirty="0">
+                <a:solidFill>
+                  <a:srgbClr val="1B1B2F"/>
+                </a:solidFill>
+                <a:latin typeface="Calibri" pitchFamily="34" charset="0"/>
+                <a:ea typeface="Calibri" pitchFamily="34" charset="-122"/>
+                <a:cs typeface="Calibri" pitchFamily="34" charset="-120"/>
+              </a:rPr>
+              <a:t>Don’t keep what you don’t need. Why store a full DOB when an age band works?</a:t>
+            </a:r>
+            <a:endParaRPr lang="en-US" sz="1300" dirty="0"/>
+          </a:p>
+        </p:txBody>
+      </p:sp>
+      <p:sp>
+        <p:nvSpPr>
+          <p:cNvPr id="19" name="Shape 17"/>
+          <p:cNvSpPr/>
+          <p:nvPr/>
+        </p:nvSpPr>
+        <p:spPr>
+          <a:xfrm>
+            <a:off x="9146286" y="1783080"/>
+            <a:ext cx="2475738" cy="3017520"/>
+          </a:xfrm>
+          <a:prstGeom prst="roundRect">
+            <a:avLst>
+              <a:gd name="adj" fmla="val 2955"/>
+            </a:avLst>
+          </a:prstGeom>
+          <a:solidFill>
+            <a:srgbClr val="F4F6F9"/>
+          </a:solidFill>
+          <a:ln w="12700">
+            <a:solidFill>
+              <a:srgbClr val="DCE2EA"/>
+            </a:solidFill>
+            <a:prstDash val="solid"/>
+          </a:ln>
+          <a:effectLst>
+            <a:outerShdw sx="100000" sy="100000" kx="0" ky="0" algn="bl" rotWithShape="0" blurRad="88900" dist="38100" dir="5400000">
+              <a:srgbClr val="1B1B2F">
+                <a:alpha val="16000"/>
+              </a:srgbClr>
+            </a:outerShdw>
+          </a:effectLst>
+        </p:spPr>
+      </p:sp>
+      <p:sp>
+        <p:nvSpPr>
+          <p:cNvPr id="20" name="Shape 18"/>
+          <p:cNvSpPr/>
+          <p:nvPr/>
+        </p:nvSpPr>
+        <p:spPr>
+          <a:xfrm>
+            <a:off x="10109835" y="2057400"/>
+            <a:ext cx="548640" cy="548640"/>
+          </a:xfrm>
+          <a:prstGeom prst="ellipse">
+            <a:avLst/>
+          </a:prstGeom>
+          <a:solidFill>
+            <a:srgbClr val="1F2A5A"/>
+          </a:solidFill>
+          <a:ln/>
+        </p:spPr>
+      </p:sp>
+      <p:sp>
+        <p:nvSpPr>
+          <p:cNvPr id="21" name="Text 19"/>
+          <p:cNvSpPr txBox="1"/>
+          <p:nvPr/>
+        </p:nvSpPr>
+        <p:spPr>
+          <a:xfrm>
+            <a:off x="10109835" y="2057400"/>
+            <a:ext cx="548640" cy="548640"/>
+          </a:xfrm>
+          <a:prstGeom prst="rect">
+            <a:avLst/>
+          </a:prstGeom>
+          <a:noFill/>
+          <a:ln/>
+        </p:spPr>
+        <p:txBody>
+          <a:bodyPr wrap="square" lIns="0" tIns="0" rIns="0" bIns="0" rtlCol="0" anchor="ctr"/>
+          <a:lstStyle/>
+          <a:p>
+            <a:pPr algn="ctr" indent="0" marL="0">
+              <a:buNone/>
+            </a:pPr>
+            <a:r>
+              <a:rPr lang="en-US" sz="1800" b="1" dirty="0">
+                <a:solidFill>
+                  <a:srgbClr val="FFFFFF"/>
+                </a:solidFill>
+                <a:latin typeface="Calibri" pitchFamily="34" charset="0"/>
+                <a:ea typeface="Calibri" pitchFamily="34" charset="-122"/>
+                <a:cs typeface="Calibri" pitchFamily="34" charset="-120"/>
+              </a:rPr>
+              <a:t>4</a:t>
+            </a:r>
+            <a:endParaRPr lang="en-US" sz="1800" dirty="0"/>
+          </a:p>
+        </p:txBody>
+      </p:sp>
+      <p:sp>
+        <p:nvSpPr>
+          <p:cNvPr id="22" name="Text 20"/>
+          <p:cNvSpPr txBox="1"/>
+          <p:nvPr/>
+        </p:nvSpPr>
+        <p:spPr>
+          <a:xfrm>
+            <a:off x="9283446" y="2788920"/>
+            <a:ext cx="2201418" cy="457200"/>
+          </a:xfrm>
+          <a:prstGeom prst="rect">
+            <a:avLst/>
+          </a:prstGeom>
+          <a:noFill/>
+          <a:ln/>
+        </p:spPr>
+        <p:txBody>
+          <a:bodyPr wrap="square" lIns="0" tIns="0" rIns="0" bIns="0" rtlCol="0" anchor="ctr"/>
+          <a:lstStyle/>
+          <a:p>
+            <a:pPr algn="ctr" indent="0" marL="0">
+              <a:buNone/>
+            </a:pPr>
+            <a:r>
+              <a:rPr lang="en-US" sz="1600" b="1" dirty="0">
+                <a:solidFill>
+                  <a:srgbClr val="1F2A5A"/>
+                </a:solidFill>
+                <a:latin typeface="Calibri" pitchFamily="34" charset="0"/>
+                <a:ea typeface="Calibri" pitchFamily="34" charset="-122"/>
+                <a:cs typeface="Calibri" pitchFamily="34" charset="-120"/>
+              </a:rPr>
+              <a:t>Data fiduciary</a:t>
+            </a:r>
+            <a:endParaRPr lang="en-US" sz="1600" dirty="0"/>
+          </a:p>
+        </p:txBody>
+      </p:sp>
+      <p:sp>
+        <p:nvSpPr>
+          <p:cNvPr id="23" name="Text 21"/>
+          <p:cNvSpPr txBox="1"/>
+          <p:nvPr/>
+        </p:nvSpPr>
+        <p:spPr>
+          <a:xfrm>
+            <a:off x="9374886" y="3291840"/>
+            <a:ext cx="2018538" cy="1325880"/>
+          </a:xfrm>
+          <a:prstGeom prst="rect">
+            <a:avLst/>
+          </a:prstGeom>
+          <a:noFill/>
+          <a:ln/>
+        </p:spPr>
+        <p:txBody>
+          <a:bodyPr wrap="square" lIns="0" tIns="0" rIns="0" bIns="0" rtlCol="0" anchor="t"/>
+          <a:lstStyle/>
+          <a:p>
+            <a:pPr algn="ctr" indent="0" marL="0">
+              <a:lnSpc>
+                <a:spcPct val="110000"/>
+              </a:lnSpc>
+              <a:buNone/>
+            </a:pPr>
+            <a:r>
+              <a:rPr lang="en-US" sz="1300" dirty="0">
+                <a:solidFill>
+                  <a:srgbClr val="1B1B2F"/>
+                </a:solidFill>
+                <a:latin typeface="Calibri" pitchFamily="34" charset="0"/>
+                <a:ea typeface="Calibri" pitchFamily="34" charset="-122"/>
+                <a:cs typeface="Calibri" pitchFamily="34" charset="-120"/>
+              </a:rPr>
+              <a:t>The company is accountable for protecting it — a breach carries real penalties.</a:t>
+            </a:r>
+            <a:endParaRPr lang="en-US" sz="1300" dirty="0"/>
+          </a:p>
+        </p:txBody>
+      </p:sp>
+      <p:sp>
+        <p:nvSpPr>
+          <p:cNvPr id="24" name="Text 22"/>
+          <p:cNvSpPr txBox="1"/>
+          <p:nvPr/>
+        </p:nvSpPr>
+        <p:spPr>
+          <a:xfrm>
+            <a:off x="566928" y="5029200"/>
+            <a:ext cx="11055096" cy="777240"/>
+          </a:xfrm>
+          <a:prstGeom prst="roundRect">
+            <a:avLst>
+              <a:gd name="adj" fmla="val 7059"/>
+            </a:avLst>
+          </a:prstGeom>
+          <a:solidFill>
+            <a:srgbClr val="1F2A5A"/>
+          </a:solidFill>
+          <a:ln/>
+        </p:spPr>
+        <p:txBody>
+          <a:bodyPr wrap="square" lIns="0" tIns="0" rIns="0" bIns="0" rtlCol="0" anchor="ctr"/>
+          <a:lstStyle/>
+          <a:p>
+            <a:pPr algn="ctr" indent="0" marL="0">
+              <a:buNone/>
+            </a:pPr>
+            <a:r>
+              <a:rPr lang="en-US" sz="1600" b="1" dirty="0">
+                <a:solidFill>
+                  <a:srgbClr val="F4B942"/>
+                </a:solidFill>
+                <a:latin typeface="Calibri" pitchFamily="34" charset="0"/>
+                <a:ea typeface="Calibri" pitchFamily="34" charset="-122"/>
+                <a:cs typeface="Calibri" pitchFamily="34" charset="-120"/>
+              </a:rPr>
+              <a:t>Capability ≠ permission.  </a:t>
+            </a:r>
+            <a:pPr algn="ctr" indent="0" marL="0">
+              <a:buNone/>
+            </a:pPr>
+            <a:r>
+              <a:rPr lang="en-US" sz="1600" dirty="0">
+                <a:solidFill>
+                  <a:srgbClr val="FFFFFF"/>
+                </a:solidFill>
+                <a:latin typeface="Calibri" pitchFamily="34" charset="0"/>
+                <a:ea typeface="Calibri" pitchFamily="34" charset="-122"/>
+                <a:cs typeface="Calibri" pitchFamily="34" charset="-120"/>
+              </a:rPr>
+              <a:t>You can compute “average order value by age” — governance decides whether you should.</a:t>
+            </a:r>
+            <a:endParaRPr lang="en-US" sz="1600" dirty="0"/>
+          </a:p>
+        </p:txBody>
+      </p:sp>
+    </p:spTree>
+  </p:cSld>
+  <p:clrMapOvr>
+    <a:masterClrMapping/>
+  </p:clrMapOvr>
+</p:sld>
+</file>
+
+<file path=ppt/slides/slide7.xml><?xml version="1.0" encoding="utf-8"?>
+<p:sld xmlns:a="http://schemas.openxmlformats.org/drawingml/2006/main" xmlns:r="http://schemas.openxmlformats.org/officeDocument/2006/relationships" xmlns:p="http://schemas.openxmlformats.org/presentationml/2006/main">
+  <p:cSld name="Slide 7">
     <p:bg>
       <p:bgPr>
         <a:solidFill>
@@ -5554,7 +7589,7 @@
                 <a:ea typeface="Calibri" pitchFamily="34" charset="-122"/>
                 <a:cs typeface="Calibri" pitchFamily="34" charset="-120"/>
               </a:rPr>
-              <a:t>LIVE DEMO · 10 MIN</a:t>
+              <a:t>TWO LIVE DEMOS</a:t>
             </a:r>
             <a:endParaRPr lang="en-US" sz="1200" dirty="0"/>
           </a:p>
@@ -5593,7 +7628,7 @@
                 <a:ea typeface="Calibri" pitchFamily="34" charset="-122"/>
                 <a:cs typeface="Calibri" pitchFamily="34" charset="-120"/>
               </a:rPr>
-              <a:t>A formula vs a project</a:t>
+              <a:t>A formula vs a project — then mask live</a:t>
             </a:r>
             <a:endParaRPr lang="en-US" sz="3200" dirty="0"/>
           </a:p>
@@ -5608,11 +7643,11 @@
         <p:spPr>
           <a:xfrm>
             <a:off x="1463040" y="2148840"/>
-            <a:ext cx="9262872" cy="1773936"/>
+            <a:ext cx="9262872" cy="2103120"/>
           </a:xfrm>
           <a:prstGeom prst="roundRect">
             <a:avLst>
-              <a:gd name="adj" fmla="val 3093"/>
+              <a:gd name="adj" fmla="val 2609"/>
             </a:avLst>
           </a:prstGeom>
           <a:solidFill>
@@ -5637,7 +7672,7 @@
         <p:spPr>
           <a:xfrm>
             <a:off x="1737360" y="2313432"/>
-            <a:ext cx="8686800" cy="1444752"/>
+            <a:ext cx="8686800" cy="1773936"/>
           </a:xfrm>
           <a:prstGeom prst="rect">
             <a:avLst/>
@@ -5656,7 +7691,7 @@
               <a:buNone/>
             </a:pPr>
             <a:r>
-              <a:rPr lang="en-US" sz="1400" dirty="0">
+              <a:rPr lang="en-US" sz="1250" dirty="0">
                 <a:solidFill>
                   <a:srgbClr val="7FE3CF"/>
                 </a:solidFill>
@@ -5664,10 +7699,10 @@
                 <a:ea typeface="Consolas" pitchFamily="34" charset="-122"/>
                 <a:cs typeface="Consolas" pitchFamily="34" charset="-120"/>
               </a:rPr>
-              <a:t>=COUNT(orders!A:A)          -- “how many orders?”  answerable NOW
+              <a:t>=COUNTIFS(order_date, "yesterday")   -- "how many orders?"  → answerable NOW  (Descriptive)
 </a:t>
             </a:r>
-            <a:endParaRPr lang="en-US" sz="1400" dirty="0"/>
+            <a:endParaRPr lang="en-US" sz="1250" dirty="0"/>
           </a:p>
           <a:p>
             <a:pPr algn="l" indent="0" marL="0">
@@ -5677,7 +7712,7 @@
               <a:buNone/>
             </a:pPr>
             <a:r>
-              <a:rPr lang="en-US" sz="1400" dirty="0">
+              <a:rPr lang="en-US" sz="1250" dirty="0">
                 <a:solidFill>
                   <a:srgbClr val="7F8AB5"/>
                 </a:solidFill>
@@ -5685,10 +7720,10 @@
                 <a:ea typeface="Consolas" pitchFamily="34" charset="-122"/>
                 <a:cs typeface="Consolas" pitchFamily="34" charset="-120"/>
               </a:rPr>
-              <a:t>-- “who will churn?”  needs history + a model, not a formula
+              <a:t>-- "who will churn next month?"       → needs history + a model, not a formula  (Predictive)
 </a:t>
             </a:r>
-            <a:endParaRPr lang="en-US" sz="1400" dirty="0"/>
+            <a:endParaRPr lang="en-US" sz="1250" dirty="0"/>
           </a:p>
           <a:p>
             <a:pPr algn="l" indent="0" marL="0">
@@ -5698,7 +7733,7 @@
               <a:buNone/>
             </a:pPr>
             <a:r>
-              <a:rPr lang="en-US" sz="1400" dirty="0">
+              <a:rPr lang="en-US" sz="1250" dirty="0">
                 <a:solidFill>
                   <a:srgbClr val="7FE3CF"/>
                 </a:solidFill>
@@ -5709,7 +7744,7 @@
               <a:t>
 </a:t>
             </a:r>
-            <a:endParaRPr lang="en-US" sz="1400" dirty="0"/>
+            <a:endParaRPr lang="en-US" sz="1250" dirty="0"/>
           </a:p>
           <a:p>
             <a:pPr algn="l" indent="0" marL="0">
@@ -5719,7 +7754,7 @@
               <a:buNone/>
             </a:pPr>
             <a:r>
-              <a:rPr lang="en-US" sz="1400" dirty="0">
+              <a:rPr lang="en-US" sz="1250" dirty="0">
                 <a:solidFill>
                   <a:srgbClr val="7FE3CF"/>
                 </a:solidFill>
@@ -5727,9 +7762,30 @@
                 <a:ea typeface="Consolas" pitchFamily="34" charset="-122"/>
                 <a:cs typeface="Consolas" pitchFamily="34" charset="-120"/>
               </a:rPr>
-              <a:t>="xxxxx" &amp; RIGHT(C2, 4)     -- mask a phone  →  +91-xxxxx-4821</a:t>
-            </a:r>
-            <a:endParaRPr lang="en-US" sz="1400" dirty="0"/>
+              <a:t>="xxxxxx"&amp;RIGHT(D2,4)                         -- mask a phone  → xxxxxx2098
+</a:t>
+            </a:r>
+            <a:endParaRPr lang="en-US" sz="1250" dirty="0"/>
+          </a:p>
+          <a:p>
+            <a:pPr algn="l" indent="0" marL="0">
+              <a:lnSpc>
+                <a:spcPct val="125000"/>
+              </a:lnSpc>
+              <a:buNone/>
+            </a:pPr>
+            <a:r>
+              <a:rPr lang="en-US" sz="1250" dirty="0">
+                <a:solidFill>
+                  <a:srgbClr val="7FE3CF"/>
+                </a:solidFill>
+                <a:latin typeface="Consolas" pitchFamily="34" charset="0"/>
+                <a:ea typeface="Consolas" pitchFamily="34" charset="-122"/>
+                <a:cs typeface="Consolas" pitchFamily="34" charset="-120"/>
+              </a:rPr>
+              <a:t>=LEFT(C2,2)&amp;"***@"&amp;MID(C2,FIND("@",C2)+1,50)  -- mask an email → kr***@example.com</a:t>
+            </a:r>
+            <a:endParaRPr lang="en-US" sz="1250" dirty="0"/>
           </a:p>
         </p:txBody>
       </p:sp>
@@ -5766,697 +7822,9 @@
                 <a:ea typeface="Calibri" pitchFamily="34" charset="-122"/>
                 <a:cs typeface="Calibri" pitchFamily="34" charset="-120"/>
               </a:rPr>
-              <a:t>One question is a formula. The other is a project. Know which is which.</a:t>
+              <a:t>One question is a formula; the other is a project. One formula turns raw PII into safe data.</a:t>
             </a:r>
             <a:endParaRPr lang="en-US" sz="1600" dirty="0"/>
-          </a:p>
-        </p:txBody>
-      </p:sp>
-    </p:spTree>
-  </p:cSld>
-  <p:clrMapOvr>
-    <a:masterClrMapping/>
-  </p:clrMapOvr>
-</p:sld>
-</file>
-
-<file path=ppt/slides/slide7.xml><?xml version="1.0" encoding="utf-8"?>
-<p:sld xmlns:a="http://schemas.openxmlformats.org/drawingml/2006/main" xmlns:r="http://schemas.openxmlformats.org/officeDocument/2006/relationships" xmlns:p="http://schemas.openxmlformats.org/presentationml/2006/main">
-  <p:cSld name="Slide 7">
-    <p:bg>
-      <p:bgPr>
-        <a:solidFill>
-          <a:srgbClr val="FFFFFF"/>
-        </a:solidFill>
-      </p:bgPr>
-    </p:bg>
-    <p:spTree>
-      <p:nvGrpSpPr>
-        <p:cNvPr id="1" name=""/>
-        <p:cNvGrpSpPr/>
-        <p:nvPr/>
-      </p:nvGrpSpPr>
-      <p:grpSpPr>
-        <a:xfrm>
-          <a:off x="0" y="0"/>
-          <a:ext cx="0" cy="0"/>
-          <a:chOff x="0" y="0"/>
-          <a:chExt cx="0" cy="0"/>
-        </a:xfrm>
-      </p:grpSpPr>
-      <p:sp>
-        <p:nvSpPr>
-          <p:cNvPr id="2" name="Text 0"/>
-          <p:cNvSpPr txBox="1"/>
-          <p:nvPr/>
-        </p:nvSpPr>
-        <p:spPr>
-          <a:xfrm>
-            <a:off x="566928" y="420624"/>
-            <a:ext cx="10972800" cy="292608"/>
-          </a:xfrm>
-          <a:prstGeom prst="rect">
-            <a:avLst/>
-          </a:prstGeom>
-          <a:noFill/>
-          <a:ln/>
-        </p:spPr>
-        <p:txBody>
-          <a:bodyPr wrap="square" lIns="0" tIns="0" rIns="0" bIns="0" rtlCol="0" anchor="ctr"/>
-          <a:lstStyle/>
-          <a:p>
-            <a:pPr indent="0" marL="0">
-              <a:buNone/>
-            </a:pPr>
-            <a:r>
-              <a:rPr lang="en-US" sz="1150" b="1" spc="250" kern="0" dirty="0">
-                <a:solidFill>
-                  <a:srgbClr val="F0544F"/>
-                </a:solidFill>
-                <a:latin typeface="Calibri" pitchFamily="34" charset="0"/>
-                <a:ea typeface="Calibri" pitchFamily="34" charset="-122"/>
-                <a:cs typeface="Calibri" pitchFamily="34" charset="-120"/>
-              </a:rPr>
-              <a:t>HANDS-ON · 2 HOURS</a:t>
-            </a:r>
-            <a:endParaRPr lang="en-US" sz="1150" dirty="0"/>
-          </a:p>
-        </p:txBody>
-      </p:sp>
-      <p:sp>
-        <p:nvSpPr>
-          <p:cNvPr id="3" name="Text 1"/>
-          <p:cNvSpPr txBox="1"/>
-          <p:nvPr/>
-        </p:nvSpPr>
-        <p:spPr>
-          <a:xfrm>
-            <a:off x="566928" y="713232"/>
-            <a:ext cx="11064240" cy="822960"/>
-          </a:xfrm>
-          <a:prstGeom prst="rect">
-            <a:avLst/>
-          </a:prstGeom>
-          <a:noFill/>
-          <a:ln/>
-        </p:spPr>
-        <p:txBody>
-          <a:bodyPr wrap="square" lIns="0" tIns="0" rIns="0" bIns="0" rtlCol="0" anchor="ctr"/>
-          <a:lstStyle/>
-          <a:p>
-            <a:pPr algn="l" indent="0" marL="0">
-              <a:buNone/>
-            </a:pPr>
-            <a:r>
-              <a:rPr lang="en-US" sz="3000" b="1" dirty="0">
-                <a:solidFill>
-                  <a:srgbClr val="1B1B2F"/>
-                </a:solidFill>
-                <a:latin typeface="Calibri" pitchFamily="34" charset="0"/>
-                <a:ea typeface="Calibri" pitchFamily="34" charset="-122"/>
-                <a:cs typeface="Calibri" pitchFamily="34" charset="-120"/>
-              </a:rPr>
-              <a:t>Classify, then audit</a:t>
-            </a:r>
-            <a:endParaRPr lang="en-US" sz="3000" dirty="0"/>
-          </a:p>
-        </p:txBody>
-      </p:sp>
-      <p:sp>
-        <p:nvSpPr>
-          <p:cNvPr id="4" name="Shape 2"/>
-          <p:cNvSpPr/>
-          <p:nvPr/>
-        </p:nvSpPr>
-        <p:spPr>
-          <a:xfrm>
-            <a:off x="566928" y="1783080"/>
-            <a:ext cx="548640" cy="548640"/>
-          </a:xfrm>
-          <a:prstGeom prst="ellipse">
-            <a:avLst/>
-          </a:prstGeom>
-          <a:solidFill>
-            <a:srgbClr val="F0544F"/>
-          </a:solidFill>
-          <a:ln/>
-        </p:spPr>
-      </p:sp>
-      <p:sp>
-        <p:nvSpPr>
-          <p:cNvPr id="5" name="Text 3"/>
-          <p:cNvSpPr txBox="1"/>
-          <p:nvPr/>
-        </p:nvSpPr>
-        <p:spPr>
-          <a:xfrm>
-            <a:off x="566928" y="1783080"/>
-            <a:ext cx="548640" cy="548640"/>
-          </a:xfrm>
-          <a:prstGeom prst="rect">
-            <a:avLst/>
-          </a:prstGeom>
-          <a:noFill/>
-          <a:ln/>
-        </p:spPr>
-        <p:txBody>
-          <a:bodyPr wrap="square" lIns="0" tIns="0" rIns="0" bIns="0" rtlCol="0" anchor="ctr"/>
-          <a:lstStyle/>
-          <a:p>
-            <a:pPr algn="ctr" indent="0" marL="0">
-              <a:buNone/>
-            </a:pPr>
-            <a:r>
-              <a:rPr lang="en-US" sz="1320" b="1" dirty="0">
-                <a:solidFill>
-                  <a:srgbClr val="FFFFFF"/>
-                </a:solidFill>
-                <a:latin typeface="Calibri" pitchFamily="34" charset="0"/>
-                <a:ea typeface="Calibri" pitchFamily="34" charset="-122"/>
-                <a:cs typeface="Calibri" pitchFamily="34" charset="-120"/>
-              </a:rPr>
-              <a:t>1</a:t>
-            </a:r>
-            <a:endParaRPr lang="en-US" sz="1320" dirty="0"/>
-          </a:p>
-        </p:txBody>
-      </p:sp>
-      <p:sp>
-        <p:nvSpPr>
-          <p:cNvPr id="6" name="Text 4"/>
-          <p:cNvSpPr txBox="1"/>
-          <p:nvPr/>
-        </p:nvSpPr>
-        <p:spPr>
-          <a:xfrm>
-            <a:off x="1344168" y="1737360"/>
-            <a:ext cx="6949440" cy="932688"/>
-          </a:xfrm>
-          <a:prstGeom prst="rect">
-            <a:avLst/>
-          </a:prstGeom>
-          <a:noFill/>
-          <a:ln/>
-        </p:spPr>
-        <p:txBody>
-          <a:bodyPr wrap="square" lIns="0" tIns="0" rIns="0" bIns="0" rtlCol="0" anchor="ctr"/>
-          <a:lstStyle/>
-          <a:p>
-            <a:pPr algn="l" indent="0" marL="0">
-              <a:lnSpc>
-                <a:spcPct val="100000"/>
-              </a:lnSpc>
-              <a:buNone/>
-            </a:pPr>
-            <a:r>
-              <a:rPr lang="en-US" sz="1650" b="1" dirty="0">
-                <a:solidFill>
-                  <a:srgbClr val="1B1B2F"/>
-                </a:solidFill>
-                <a:latin typeface="Calibri" pitchFamily="34" charset="0"/>
-                <a:ea typeface="Calibri" pitchFamily="34" charset="-122"/>
-                <a:cs typeface="Calibri" pitchFamily="34" charset="-120"/>
-              </a:rPr>
-              <a:t>Tag all 10 questions
-</a:t>
-            </a:r>
-            <a:endParaRPr lang="en-US" sz="1650" dirty="0"/>
-          </a:p>
-          <a:p>
-            <a:pPr algn="l" indent="0" marL="0">
-              <a:lnSpc>
-                <a:spcPct val="100000"/>
-              </a:lnSpc>
-              <a:buNone/>
-            </a:pPr>
-            <a:r>
-              <a:rPr lang="en-US" sz="1300" dirty="0">
-                <a:solidFill>
-                  <a:srgbClr val="5B6472"/>
-                </a:solidFill>
-                <a:latin typeface="Calibri" pitchFamily="34" charset="0"/>
-                <a:ea typeface="Calibri" pitchFamily="34" charset="-122"/>
-                <a:cs typeface="Calibri" pitchFamily="34" charset="-120"/>
-              </a:rPr>
-              <a:t>Descriptive / Diagnostic / Predictive / Prescriptive in business_questions.csv.</a:t>
-            </a:r>
-            <a:endParaRPr lang="en-US" sz="1650" dirty="0"/>
-          </a:p>
-        </p:txBody>
-      </p:sp>
-      <p:sp>
-        <p:nvSpPr>
-          <p:cNvPr id="7" name="Shape 5"/>
-          <p:cNvSpPr/>
-          <p:nvPr/>
-        </p:nvSpPr>
-        <p:spPr>
-          <a:xfrm>
-            <a:off x="566928" y="2715768"/>
-            <a:ext cx="548640" cy="548640"/>
-          </a:xfrm>
-          <a:prstGeom prst="ellipse">
-            <a:avLst/>
-          </a:prstGeom>
-          <a:solidFill>
-            <a:srgbClr val="F0544F"/>
-          </a:solidFill>
-          <a:ln/>
-        </p:spPr>
-      </p:sp>
-      <p:sp>
-        <p:nvSpPr>
-          <p:cNvPr id="8" name="Text 6"/>
-          <p:cNvSpPr txBox="1"/>
-          <p:nvPr/>
-        </p:nvSpPr>
-        <p:spPr>
-          <a:xfrm>
-            <a:off x="566928" y="2715768"/>
-            <a:ext cx="548640" cy="548640"/>
-          </a:xfrm>
-          <a:prstGeom prst="rect">
-            <a:avLst/>
-          </a:prstGeom>
-          <a:noFill/>
-          <a:ln/>
-        </p:spPr>
-        <p:txBody>
-          <a:bodyPr wrap="square" lIns="0" tIns="0" rIns="0" bIns="0" rtlCol="0" anchor="ctr"/>
-          <a:lstStyle/>
-          <a:p>
-            <a:pPr algn="ctr" indent="0" marL="0">
-              <a:buNone/>
-            </a:pPr>
-            <a:r>
-              <a:rPr lang="en-US" sz="1320" b="1" dirty="0">
-                <a:solidFill>
-                  <a:srgbClr val="FFFFFF"/>
-                </a:solidFill>
-                <a:latin typeface="Calibri" pitchFamily="34" charset="0"/>
-                <a:ea typeface="Calibri" pitchFamily="34" charset="-122"/>
-                <a:cs typeface="Calibri" pitchFamily="34" charset="-120"/>
-              </a:rPr>
-              <a:t>2</a:t>
-            </a:r>
-            <a:endParaRPr lang="en-US" sz="1320" dirty="0"/>
-          </a:p>
-        </p:txBody>
-      </p:sp>
-      <p:sp>
-        <p:nvSpPr>
-          <p:cNvPr id="9" name="Text 7"/>
-          <p:cNvSpPr txBox="1"/>
-          <p:nvPr/>
-        </p:nvSpPr>
-        <p:spPr>
-          <a:xfrm>
-            <a:off x="1344168" y="2670048"/>
-            <a:ext cx="6949440" cy="932688"/>
-          </a:xfrm>
-          <a:prstGeom prst="rect">
-            <a:avLst/>
-          </a:prstGeom>
-          <a:noFill/>
-          <a:ln/>
-        </p:spPr>
-        <p:txBody>
-          <a:bodyPr wrap="square" lIns="0" tIns="0" rIns="0" bIns="0" rtlCol="0" anchor="ctr"/>
-          <a:lstStyle/>
-          <a:p>
-            <a:pPr algn="l" indent="0" marL="0">
-              <a:lnSpc>
-                <a:spcPct val="100000"/>
-              </a:lnSpc>
-              <a:buNone/>
-            </a:pPr>
-            <a:r>
-              <a:rPr lang="en-US" sz="1650" b="1" dirty="0">
-                <a:solidFill>
-                  <a:srgbClr val="1B1B2F"/>
-                </a:solidFill>
-                <a:latin typeface="Calibri" pitchFamily="34" charset="0"/>
-                <a:ea typeface="Calibri" pitchFamily="34" charset="-122"/>
-                <a:cs typeface="Calibri" pitchFamily="34" charset="-120"/>
-              </a:rPr>
-              <a:t>Run a PII audit
-</a:t>
-            </a:r>
-            <a:endParaRPr lang="en-US" sz="1650" dirty="0"/>
-          </a:p>
-          <a:p>
-            <a:pPr algn="l" indent="0" marL="0">
-              <a:lnSpc>
-                <a:spcPct val="100000"/>
-              </a:lnSpc>
-              <a:buNone/>
-            </a:pPr>
-            <a:r>
-              <a:rPr lang="en-US" sz="1300" dirty="0">
-                <a:solidFill>
-                  <a:srgbClr val="5B6472"/>
-                </a:solidFill>
-                <a:latin typeface="Calibri" pitchFamily="34" charset="0"/>
-                <a:ea typeface="Calibri" pitchFamily="34" charset="-122"/>
-                <a:cs typeface="Calibri" pitchFamily="34" charset="-120"/>
-              </a:rPr>
-              <a:t>Flag every personal-data column in customers_pii.csv + a masking rule for each.</a:t>
-            </a:r>
-            <a:endParaRPr lang="en-US" sz="1650" dirty="0"/>
-          </a:p>
-        </p:txBody>
-      </p:sp>
-      <p:sp>
-        <p:nvSpPr>
-          <p:cNvPr id="10" name="Shape 8"/>
-          <p:cNvSpPr/>
-          <p:nvPr/>
-        </p:nvSpPr>
-        <p:spPr>
-          <a:xfrm>
-            <a:off x="566928" y="3648456"/>
-            <a:ext cx="548640" cy="548640"/>
-          </a:xfrm>
-          <a:prstGeom prst="ellipse">
-            <a:avLst/>
-          </a:prstGeom>
-          <a:solidFill>
-            <a:srgbClr val="F0544F"/>
-          </a:solidFill>
-          <a:ln/>
-        </p:spPr>
-      </p:sp>
-      <p:sp>
-        <p:nvSpPr>
-          <p:cNvPr id="11" name="Text 9"/>
-          <p:cNvSpPr txBox="1"/>
-          <p:nvPr/>
-        </p:nvSpPr>
-        <p:spPr>
-          <a:xfrm>
-            <a:off x="566928" y="3648456"/>
-            <a:ext cx="548640" cy="548640"/>
-          </a:xfrm>
-          <a:prstGeom prst="rect">
-            <a:avLst/>
-          </a:prstGeom>
-          <a:noFill/>
-          <a:ln/>
-        </p:spPr>
-        <p:txBody>
-          <a:bodyPr wrap="square" lIns="0" tIns="0" rIns="0" bIns="0" rtlCol="0" anchor="ctr"/>
-          <a:lstStyle/>
-          <a:p>
-            <a:pPr algn="ctr" indent="0" marL="0">
-              <a:buNone/>
-            </a:pPr>
-            <a:r>
-              <a:rPr lang="en-US" sz="1320" b="1" dirty="0">
-                <a:solidFill>
-                  <a:srgbClr val="FFFFFF"/>
-                </a:solidFill>
-                <a:latin typeface="Calibri" pitchFamily="34" charset="0"/>
-                <a:ea typeface="Calibri" pitchFamily="34" charset="-122"/>
-                <a:cs typeface="Calibri" pitchFamily="34" charset="-120"/>
-              </a:rPr>
-              <a:t>3</a:t>
-            </a:r>
-            <a:endParaRPr lang="en-US" sz="1320" dirty="0"/>
-          </a:p>
-        </p:txBody>
-      </p:sp>
-      <p:sp>
-        <p:nvSpPr>
-          <p:cNvPr id="12" name="Text 10"/>
-          <p:cNvSpPr txBox="1"/>
-          <p:nvPr/>
-        </p:nvSpPr>
-        <p:spPr>
-          <a:xfrm>
-            <a:off x="1344168" y="3602736"/>
-            <a:ext cx="6949440" cy="932688"/>
-          </a:xfrm>
-          <a:prstGeom prst="rect">
-            <a:avLst/>
-          </a:prstGeom>
-          <a:noFill/>
-          <a:ln/>
-        </p:spPr>
-        <p:txBody>
-          <a:bodyPr wrap="square" lIns="0" tIns="0" rIns="0" bIns="0" rtlCol="0" anchor="ctr"/>
-          <a:lstStyle/>
-          <a:p>
-            <a:pPr algn="l" indent="0" marL="0">
-              <a:lnSpc>
-                <a:spcPct val="100000"/>
-              </a:lnSpc>
-              <a:buNone/>
-            </a:pPr>
-            <a:r>
-              <a:rPr lang="en-US" sz="1650" b="1" dirty="0">
-                <a:solidFill>
-                  <a:srgbClr val="1B1B2F"/>
-                </a:solidFill>
-                <a:latin typeface="Calibri" pitchFamily="34" charset="0"/>
-                <a:ea typeface="Calibri" pitchFamily="34" charset="-122"/>
-                <a:cs typeface="Calibri" pitchFamily="34" charset="-120"/>
-              </a:rPr>
-              <a:t>Flag the unethical one
-</a:t>
-            </a:r>
-            <a:endParaRPr lang="en-US" sz="1650" dirty="0"/>
-          </a:p>
-          <a:p>
-            <a:pPr algn="l" indent="0" marL="0">
-              <a:lnSpc>
-                <a:spcPct val="100000"/>
-              </a:lnSpc>
-              <a:buNone/>
-            </a:pPr>
-            <a:r>
-              <a:rPr lang="en-US" sz="1300" dirty="0">
-                <a:solidFill>
-                  <a:srgbClr val="5B6472"/>
-                </a:solidFill>
-                <a:latin typeface="Calibri" pitchFamily="34" charset="0"/>
-                <a:ea typeface="Calibri" pitchFamily="34" charset="-122"/>
-                <a:cs typeface="Calibri" pitchFamily="34" charset="-120"/>
-              </a:rPr>
-              <a:t>Which question shouldn't be answered with this data as-is?</a:t>
-            </a:r>
-            <a:endParaRPr lang="en-US" sz="1650" dirty="0"/>
-          </a:p>
-        </p:txBody>
-      </p:sp>
-      <p:sp>
-        <p:nvSpPr>
-          <p:cNvPr id="13" name="Shape 11"/>
-          <p:cNvSpPr/>
-          <p:nvPr/>
-        </p:nvSpPr>
-        <p:spPr>
-          <a:xfrm>
-            <a:off x="566928" y="4581144"/>
-            <a:ext cx="548640" cy="548640"/>
-          </a:xfrm>
-          <a:prstGeom prst="ellipse">
-            <a:avLst/>
-          </a:prstGeom>
-          <a:solidFill>
-            <a:srgbClr val="F0544F"/>
-          </a:solidFill>
-          <a:ln/>
-        </p:spPr>
-      </p:sp>
-      <p:sp>
-        <p:nvSpPr>
-          <p:cNvPr id="14" name="Text 12"/>
-          <p:cNvSpPr txBox="1"/>
-          <p:nvPr/>
-        </p:nvSpPr>
-        <p:spPr>
-          <a:xfrm>
-            <a:off x="566928" y="4581144"/>
-            <a:ext cx="548640" cy="548640"/>
-          </a:xfrm>
-          <a:prstGeom prst="rect">
-            <a:avLst/>
-          </a:prstGeom>
-          <a:noFill/>
-          <a:ln/>
-        </p:spPr>
-        <p:txBody>
-          <a:bodyPr wrap="square" lIns="0" tIns="0" rIns="0" bIns="0" rtlCol="0" anchor="ctr"/>
-          <a:lstStyle/>
-          <a:p>
-            <a:pPr algn="ctr" indent="0" marL="0">
-              <a:buNone/>
-            </a:pPr>
-            <a:r>
-              <a:rPr lang="en-US" sz="1320" b="1" dirty="0">
-                <a:solidFill>
-                  <a:srgbClr val="FFFFFF"/>
-                </a:solidFill>
-                <a:latin typeface="Calibri" pitchFamily="34" charset="0"/>
-                <a:ea typeface="Calibri" pitchFamily="34" charset="-122"/>
-                <a:cs typeface="Calibri" pitchFamily="34" charset="-120"/>
-              </a:rPr>
-              <a:t>4</a:t>
-            </a:r>
-            <a:endParaRPr lang="en-US" sz="1320" dirty="0"/>
-          </a:p>
-        </p:txBody>
-      </p:sp>
-      <p:sp>
-        <p:nvSpPr>
-          <p:cNvPr id="15" name="Text 13"/>
-          <p:cNvSpPr txBox="1"/>
-          <p:nvPr/>
-        </p:nvSpPr>
-        <p:spPr>
-          <a:xfrm>
-            <a:off x="1344168" y="4535424"/>
-            <a:ext cx="6949440" cy="932688"/>
-          </a:xfrm>
-          <a:prstGeom prst="rect">
-            <a:avLst/>
-          </a:prstGeom>
-          <a:noFill/>
-          <a:ln/>
-        </p:spPr>
-        <p:txBody>
-          <a:bodyPr wrap="square" lIns="0" tIns="0" rIns="0" bIns="0" rtlCol="0" anchor="ctr"/>
-          <a:lstStyle/>
-          <a:p>
-            <a:pPr algn="l" indent="0" marL="0">
-              <a:lnSpc>
-                <a:spcPct val="100000"/>
-              </a:lnSpc>
-              <a:buNone/>
-            </a:pPr>
-            <a:r>
-              <a:rPr lang="en-US" sz="1650" b="1" dirty="0">
-                <a:solidFill>
-                  <a:srgbClr val="1B1B2F"/>
-                </a:solidFill>
-                <a:latin typeface="Calibri" pitchFamily="34" charset="0"/>
-                <a:ea typeface="Calibri" pitchFamily="34" charset="-122"/>
-                <a:cs typeface="Calibri" pitchFamily="34" charset="-120"/>
-              </a:rPr>
-              <a:t>Three descriptive stats
-</a:t>
-            </a:r>
-            <a:endParaRPr lang="en-US" sz="1650" dirty="0"/>
-          </a:p>
-          <a:p>
-            <a:pPr algn="l" indent="0" marL="0">
-              <a:lnSpc>
-                <a:spcPct val="100000"/>
-              </a:lnSpc>
-              <a:buNone/>
-            </a:pPr>
-            <a:r>
-              <a:rPr lang="en-US" sz="1300" dirty="0">
-                <a:solidFill>
-                  <a:srgbClr val="5B6472"/>
-                </a:solidFill>
-                <a:latin typeface="Calibri" pitchFamily="34" charset="0"/>
-                <a:ea typeface="Calibri" pitchFamily="34" charset="-122"/>
-                <a:cs typeface="Calibri" pitchFamily="34" charset="-120"/>
-              </a:rPr>
-              <a:t>Total revenue, avg order value, order count on orders_sample.csv.</a:t>
-            </a:r>
-            <a:endParaRPr lang="en-US" sz="1650" dirty="0"/>
-          </a:p>
-        </p:txBody>
-      </p:sp>
-      <p:sp>
-        <p:nvSpPr>
-          <p:cNvPr id="16" name="Shape 14"/>
-          <p:cNvSpPr/>
-          <p:nvPr/>
-        </p:nvSpPr>
-        <p:spPr>
-          <a:xfrm>
-            <a:off x="8001000" y="1783080"/>
-            <a:ext cx="3611880" cy="3730752"/>
-          </a:xfrm>
-          <a:prstGeom prst="roundRect">
-            <a:avLst>
-              <a:gd name="adj" fmla="val 2025"/>
-            </a:avLst>
-          </a:prstGeom>
-          <a:solidFill>
-            <a:srgbClr val="E2F3EF"/>
-          </a:solidFill>
-          <a:ln w="12700">
-            <a:solidFill>
-              <a:srgbClr val="138A72"/>
-            </a:solidFill>
-            <a:prstDash val="solid"/>
-          </a:ln>
-        </p:spPr>
-      </p:sp>
-      <p:sp>
-        <p:nvSpPr>
-          <p:cNvPr id="17" name="Text 15"/>
-          <p:cNvSpPr txBox="1"/>
-          <p:nvPr/>
-        </p:nvSpPr>
-        <p:spPr>
-          <a:xfrm>
-            <a:off x="8275320" y="2011680"/>
-            <a:ext cx="3108960" cy="3273552"/>
-          </a:xfrm>
-          <a:prstGeom prst="rect">
-            <a:avLst/>
-          </a:prstGeom>
-          <a:noFill/>
-          <a:ln/>
-        </p:spPr>
-        <p:txBody>
-          <a:bodyPr wrap="square" lIns="0" tIns="0" rIns="0" bIns="0" rtlCol="0" anchor="t"/>
-          <a:lstStyle/>
-          <a:p>
-            <a:pPr algn="l" indent="0" marL="0">
-              <a:lnSpc>
-                <a:spcPct val="115000"/>
-              </a:lnSpc>
-              <a:buNone/>
-            </a:pPr>
-            <a:r>
-              <a:rPr lang="en-US" sz="1100" b="1" spc="200" kern="0" dirty="0">
-                <a:solidFill>
-                  <a:srgbClr val="138A72"/>
-                </a:solidFill>
-                <a:latin typeface="Calibri" pitchFamily="34" charset="0"/>
-                <a:ea typeface="Calibri" pitchFamily="34" charset="-122"/>
-                <a:cs typeface="Calibri" pitchFamily="34" charset="-120"/>
-              </a:rPr>
-              <a:t>DONE WHEN
-</a:t>
-            </a:r>
-            <a:endParaRPr lang="en-US" sz="1100" dirty="0"/>
-          </a:p>
-          <a:p>
-            <a:pPr algn="l" indent="0" marL="0">
-              <a:lnSpc>
-                <a:spcPct val="115000"/>
-              </a:lnSpc>
-              <a:buNone/>
-            </a:pPr>
-            <a:r>
-              <a:rPr lang="en-US" sz="1400" dirty="0">
-                <a:solidFill>
-                  <a:srgbClr val="1B1B2F"/>
-                </a:solidFill>
-                <a:latin typeface="Calibri" pitchFamily="34" charset="0"/>
-                <a:ea typeface="Calibri" pitchFamily="34" charset="-122"/>
-                <a:cs typeface="Calibri" pitchFamily="34" charset="-120"/>
-              </a:rPr>
-              <a:t>All 10 questions tagged, every PII column has a masking rule, and your 3 stats are computed.</a:t>
-            </a:r>
-            <a:endParaRPr lang="en-US" sz="1100" dirty="0"/>
           </a:p>
         </p:txBody>
       </p:sp>
@@ -6525,7 +7893,7 @@
                 <a:ea typeface="Calibri" pitchFamily="34" charset="-122"/>
                 <a:cs typeface="Calibri" pitchFamily="34" charset="-120"/>
               </a:rPr>
-              <a:t>PULL IT FIRST</a:t>
+              <a:t>HANDS-ON · MOST OF THE DAY</a:t>
             </a:r>
             <a:endParaRPr lang="en-US" sz="1150" dirty="0"/>
           </a:p>
@@ -6564,7 +7932,7 @@
                 <a:ea typeface="Calibri" pitchFamily="34" charset="-122"/>
                 <a:cs typeface="Calibri" pitchFamily="34" charset="-120"/>
               </a:rPr>
-              <a:t>What's in Day_02_Analytics_Types_and_Ethics/</a:t>
+              <a:t>Classify, make safe, then decide</a:t>
             </a:r>
             <a:endParaRPr lang="en-US" sz="3000" dirty="0"/>
           </a:p>
@@ -6578,37 +7946,523 @@
         </p:nvSpPr>
         <p:spPr>
           <a:xfrm>
-            <a:off x="566928" y="1737360"/>
-            <a:ext cx="6766560" cy="3749040"/>
+            <a:off x="566928" y="1783080"/>
+            <a:ext cx="548640" cy="548640"/>
+          </a:xfrm>
+          <a:prstGeom prst="ellipse">
+            <a:avLst/>
+          </a:prstGeom>
+          <a:solidFill>
+            <a:srgbClr val="F0544F"/>
+          </a:solidFill>
+          <a:ln/>
+        </p:spPr>
+      </p:sp>
+      <p:sp>
+        <p:nvSpPr>
+          <p:cNvPr id="5" name="Text 3"/>
+          <p:cNvSpPr txBox="1"/>
+          <p:nvPr/>
+        </p:nvSpPr>
+        <p:spPr>
+          <a:xfrm>
+            <a:off x="566928" y="1783080"/>
+            <a:ext cx="548640" cy="548640"/>
+          </a:xfrm>
+          <a:prstGeom prst="rect">
+            <a:avLst/>
+          </a:prstGeom>
+          <a:noFill/>
+          <a:ln/>
+        </p:spPr>
+        <p:txBody>
+          <a:bodyPr wrap="square" lIns="0" tIns="0" rIns="0" bIns="0" rtlCol="0" anchor="ctr"/>
+          <a:lstStyle/>
+          <a:p>
+            <a:pPr algn="ctr" indent="0" marL="0">
+              <a:buNone/>
+            </a:pPr>
+            <a:r>
+              <a:rPr lang="en-US" sz="1320" b="1" dirty="0">
+                <a:solidFill>
+                  <a:srgbClr val="FFFFFF"/>
+                </a:solidFill>
+                <a:latin typeface="Calibri" pitchFamily="34" charset="0"/>
+                <a:ea typeface="Calibri" pitchFamily="34" charset="-122"/>
+                <a:cs typeface="Calibri" pitchFamily="34" charset="-120"/>
+              </a:rPr>
+              <a:t>1</a:t>
+            </a:r>
+            <a:endParaRPr lang="en-US" sz="1320" dirty="0"/>
+          </a:p>
+        </p:txBody>
+      </p:sp>
+      <p:sp>
+        <p:nvSpPr>
+          <p:cNvPr id="6" name="Text 4"/>
+          <p:cNvSpPr txBox="1"/>
+          <p:nvPr/>
+        </p:nvSpPr>
+        <p:spPr>
+          <a:xfrm>
+            <a:off x="1344168" y="1737360"/>
+            <a:ext cx="6949440" cy="932688"/>
+          </a:xfrm>
+          <a:prstGeom prst="rect">
+            <a:avLst/>
+          </a:prstGeom>
+          <a:noFill/>
+          <a:ln/>
+        </p:spPr>
+        <p:txBody>
+          <a:bodyPr wrap="square" lIns="0" tIns="0" rIns="0" bIns="0" rtlCol="0" anchor="ctr"/>
+          <a:lstStyle/>
+          <a:p>
+            <a:pPr algn="l" indent="0" marL="0">
+              <a:lnSpc>
+                <a:spcPct val="100000"/>
+              </a:lnSpc>
+              <a:buNone/>
+            </a:pPr>
+            <a:r>
+              <a:rPr lang="en-US" sz="1650" b="1" dirty="0">
+                <a:solidFill>
+                  <a:srgbClr val="1B1B2F"/>
+                </a:solidFill>
+                <a:latin typeface="Calibri" pitchFamily="34" charset="0"/>
+                <a:ea typeface="Calibri" pitchFamily="34" charset="-122"/>
+                <a:cs typeface="Calibri" pitchFamily="34" charset="-120"/>
+              </a:rPr>
+              <a:t>Tag all 15 questions
+</a:t>
+            </a:r>
+            <a:endParaRPr lang="en-US" sz="1650" dirty="0"/>
+          </a:p>
+          <a:p>
+            <a:pPr algn="l" indent="0" marL="0">
+              <a:lnSpc>
+                <a:spcPct val="100000"/>
+              </a:lnSpc>
+              <a:buNone/>
+            </a:pPr>
+            <a:r>
+              <a:rPr lang="en-US" sz="1300" dirty="0">
+                <a:solidFill>
+                  <a:srgbClr val="5B6472"/>
+                </a:solidFill>
+                <a:latin typeface="Calibri" pitchFamily="34" charset="0"/>
+                <a:ea typeface="Calibri" pitchFamily="34" charset="-122"/>
+                <a:cs typeface="Calibri" pitchFamily="34" charset="-120"/>
+              </a:rPr>
+              <a:t>Descriptive / Diagnostic / Predictive / Prescriptive in business_questions.csv (10 core + 5 bonus).</a:t>
+            </a:r>
+            <a:endParaRPr lang="en-US" sz="1650" dirty="0"/>
+          </a:p>
+        </p:txBody>
+      </p:sp>
+      <p:sp>
+        <p:nvSpPr>
+          <p:cNvPr id="7" name="Shape 5"/>
+          <p:cNvSpPr/>
+          <p:nvPr/>
+        </p:nvSpPr>
+        <p:spPr>
+          <a:xfrm>
+            <a:off x="566928" y="2715768"/>
+            <a:ext cx="548640" cy="548640"/>
+          </a:xfrm>
+          <a:prstGeom prst="ellipse">
+            <a:avLst/>
+          </a:prstGeom>
+          <a:solidFill>
+            <a:srgbClr val="F0544F"/>
+          </a:solidFill>
+          <a:ln/>
+        </p:spPr>
+      </p:sp>
+      <p:sp>
+        <p:nvSpPr>
+          <p:cNvPr id="8" name="Text 6"/>
+          <p:cNvSpPr txBox="1"/>
+          <p:nvPr/>
+        </p:nvSpPr>
+        <p:spPr>
+          <a:xfrm>
+            <a:off x="566928" y="2715768"/>
+            <a:ext cx="548640" cy="548640"/>
+          </a:xfrm>
+          <a:prstGeom prst="rect">
+            <a:avLst/>
+          </a:prstGeom>
+          <a:noFill/>
+          <a:ln/>
+        </p:spPr>
+        <p:txBody>
+          <a:bodyPr wrap="square" lIns="0" tIns="0" rIns="0" bIns="0" rtlCol="0" anchor="ctr"/>
+          <a:lstStyle/>
+          <a:p>
+            <a:pPr algn="ctr" indent="0" marL="0">
+              <a:buNone/>
+            </a:pPr>
+            <a:r>
+              <a:rPr lang="en-US" sz="1320" b="1" dirty="0">
+                <a:solidFill>
+                  <a:srgbClr val="FFFFFF"/>
+                </a:solidFill>
+                <a:latin typeface="Calibri" pitchFamily="34" charset="0"/>
+                <a:ea typeface="Calibri" pitchFamily="34" charset="-122"/>
+                <a:cs typeface="Calibri" pitchFamily="34" charset="-120"/>
+              </a:rPr>
+              <a:t>2</a:t>
+            </a:r>
+            <a:endParaRPr lang="en-US" sz="1320" dirty="0"/>
+          </a:p>
+        </p:txBody>
+      </p:sp>
+      <p:sp>
+        <p:nvSpPr>
+          <p:cNvPr id="9" name="Text 7"/>
+          <p:cNvSpPr txBox="1"/>
+          <p:nvPr/>
+        </p:nvSpPr>
+        <p:spPr>
+          <a:xfrm>
+            <a:off x="1344168" y="2670048"/>
+            <a:ext cx="6949440" cy="932688"/>
+          </a:xfrm>
+          <a:prstGeom prst="rect">
+            <a:avLst/>
+          </a:prstGeom>
+          <a:noFill/>
+          <a:ln/>
+        </p:spPr>
+        <p:txBody>
+          <a:bodyPr wrap="square" lIns="0" tIns="0" rIns="0" bIns="0" rtlCol="0" anchor="ctr"/>
+          <a:lstStyle/>
+          <a:p>
+            <a:pPr algn="l" indent="0" marL="0">
+              <a:lnSpc>
+                <a:spcPct val="100000"/>
+              </a:lnSpc>
+              <a:buNone/>
+            </a:pPr>
+            <a:r>
+              <a:rPr lang="en-US" sz="1650" b="1" dirty="0">
+                <a:solidFill>
+                  <a:srgbClr val="1B1B2F"/>
+                </a:solidFill>
+                <a:latin typeface="Calibri" pitchFamily="34" charset="0"/>
+                <a:ea typeface="Calibri" pitchFamily="34" charset="-122"/>
+                <a:cs typeface="Calibri" pitchFamily="34" charset="-120"/>
+              </a:rPr>
+              <a:t>Build a safe-to-share table
+</a:t>
+            </a:r>
+            <a:endParaRPr lang="en-US" sz="1650" dirty="0"/>
+          </a:p>
+          <a:p>
+            <a:pPr algn="l" indent="0" marL="0">
+              <a:lnSpc>
+                <a:spcPct val="100000"/>
+              </a:lnSpc>
+              <a:buNone/>
+            </a:pPr>
+            <a:r>
+              <a:rPr lang="en-US" sz="1300" dirty="0">
+                <a:solidFill>
+                  <a:srgbClr val="5B6472"/>
+                </a:solidFill>
+                <a:latin typeface="Calibri" pitchFamily="34" charset="0"/>
+                <a:ea typeface="Calibri" pitchFamily="34" charset="-122"/>
+                <a:cs typeface="Calibri" pitchFamily="34" charset="-120"/>
+              </a:rPr>
+              <a:t>A masking formula for every PII column in customers_pii.csv (LEFT/RIGHT/MID/FIND/TEXT) → safe_customers.csv. Keep customer_id.</a:t>
+            </a:r>
+            <a:endParaRPr lang="en-US" sz="1650" dirty="0"/>
+          </a:p>
+        </p:txBody>
+      </p:sp>
+      <p:sp>
+        <p:nvSpPr>
+          <p:cNvPr id="10" name="Shape 8"/>
+          <p:cNvSpPr/>
+          <p:nvPr/>
+        </p:nvSpPr>
+        <p:spPr>
+          <a:xfrm>
+            <a:off x="566928" y="3648456"/>
+            <a:ext cx="548640" cy="548640"/>
+          </a:xfrm>
+          <a:prstGeom prst="ellipse">
+            <a:avLst/>
+          </a:prstGeom>
+          <a:solidFill>
+            <a:srgbClr val="F0544F"/>
+          </a:solidFill>
+          <a:ln/>
+        </p:spPr>
+      </p:sp>
+      <p:sp>
+        <p:nvSpPr>
+          <p:cNvPr id="11" name="Text 9"/>
+          <p:cNvSpPr txBox="1"/>
+          <p:nvPr/>
+        </p:nvSpPr>
+        <p:spPr>
+          <a:xfrm>
+            <a:off x="566928" y="3648456"/>
+            <a:ext cx="548640" cy="548640"/>
+          </a:xfrm>
+          <a:prstGeom prst="rect">
+            <a:avLst/>
+          </a:prstGeom>
+          <a:noFill/>
+          <a:ln/>
+        </p:spPr>
+        <p:txBody>
+          <a:bodyPr wrap="square" lIns="0" tIns="0" rIns="0" bIns="0" rtlCol="0" anchor="ctr"/>
+          <a:lstStyle/>
+          <a:p>
+            <a:pPr algn="ctr" indent="0" marL="0">
+              <a:buNone/>
+            </a:pPr>
+            <a:r>
+              <a:rPr lang="en-US" sz="1320" b="1" dirty="0">
+                <a:solidFill>
+                  <a:srgbClr val="FFFFFF"/>
+                </a:solidFill>
+                <a:latin typeface="Calibri" pitchFamily="34" charset="0"/>
+                <a:ea typeface="Calibri" pitchFamily="34" charset="-122"/>
+                <a:cs typeface="Calibri" pitchFamily="34" charset="-120"/>
+              </a:rPr>
+              <a:t>3</a:t>
+            </a:r>
+            <a:endParaRPr lang="en-US" sz="1320" dirty="0"/>
+          </a:p>
+        </p:txBody>
+      </p:sp>
+      <p:sp>
+        <p:nvSpPr>
+          <p:cNvPr id="12" name="Text 10"/>
+          <p:cNvSpPr txBox="1"/>
+          <p:nvPr/>
+        </p:nvSpPr>
+        <p:spPr>
+          <a:xfrm>
+            <a:off x="1344168" y="3602736"/>
+            <a:ext cx="6949440" cy="932688"/>
+          </a:xfrm>
+          <a:prstGeom prst="rect">
+            <a:avLst/>
+          </a:prstGeom>
+          <a:noFill/>
+          <a:ln/>
+        </p:spPr>
+        <p:txBody>
+          <a:bodyPr wrap="square" lIns="0" tIns="0" rIns="0" bIns="0" rtlCol="0" anchor="ctr"/>
+          <a:lstStyle/>
+          <a:p>
+            <a:pPr algn="l" indent="0" marL="0">
+              <a:lnSpc>
+                <a:spcPct val="100000"/>
+              </a:lnSpc>
+              <a:buNone/>
+            </a:pPr>
+            <a:r>
+              <a:rPr lang="en-US" sz="1650" b="1" dirty="0">
+                <a:solidFill>
+                  <a:srgbClr val="1B1B2F"/>
+                </a:solidFill>
+                <a:latin typeface="Calibri" pitchFamily="34" charset="0"/>
+                <a:ea typeface="Calibri" pitchFamily="34" charset="-122"/>
+                <a:cs typeface="Calibri" pitchFamily="34" charset="-120"/>
+              </a:rPr>
+              <a:t>Three descriptive stats
+</a:t>
+            </a:r>
+            <a:endParaRPr lang="en-US" sz="1650" dirty="0"/>
+          </a:p>
+          <a:p>
+            <a:pPr algn="l" indent="0" marL="0">
+              <a:lnSpc>
+                <a:spcPct val="100000"/>
+              </a:lnSpc>
+              <a:buNone/>
+            </a:pPr>
+            <a:r>
+              <a:rPr lang="en-US" sz="1300" dirty="0">
+                <a:solidFill>
+                  <a:srgbClr val="5B6472"/>
+                </a:solidFill>
+                <a:latin typeface="Calibri" pitchFamily="34" charset="0"/>
+                <a:ea typeface="Calibri" pitchFamily="34" charset="-122"/>
+                <a:cs typeface="Calibri" pitchFamily="34" charset="-120"/>
+              </a:rPr>
+              <a:t>Total revenue, AOV, order count on orders_sample.csv — then: why can't these predict the future?</a:t>
+            </a:r>
+            <a:endParaRPr lang="en-US" sz="1650" dirty="0"/>
+          </a:p>
+        </p:txBody>
+      </p:sp>
+      <p:sp>
+        <p:nvSpPr>
+          <p:cNvPr id="13" name="Shape 11"/>
+          <p:cNvSpPr/>
+          <p:nvPr/>
+        </p:nvSpPr>
+        <p:spPr>
+          <a:xfrm>
+            <a:off x="566928" y="4581144"/>
+            <a:ext cx="548640" cy="548640"/>
+          </a:xfrm>
+          <a:prstGeom prst="ellipse">
+            <a:avLst/>
+          </a:prstGeom>
+          <a:solidFill>
+            <a:srgbClr val="F0544F"/>
+          </a:solidFill>
+          <a:ln/>
+        </p:spPr>
+      </p:sp>
+      <p:sp>
+        <p:nvSpPr>
+          <p:cNvPr id="14" name="Text 12"/>
+          <p:cNvSpPr txBox="1"/>
+          <p:nvPr/>
+        </p:nvSpPr>
+        <p:spPr>
+          <a:xfrm>
+            <a:off x="566928" y="4581144"/>
+            <a:ext cx="548640" cy="548640"/>
+          </a:xfrm>
+          <a:prstGeom prst="rect">
+            <a:avLst/>
+          </a:prstGeom>
+          <a:noFill/>
+          <a:ln/>
+        </p:spPr>
+        <p:txBody>
+          <a:bodyPr wrap="square" lIns="0" tIns="0" rIns="0" bIns="0" rtlCol="0" anchor="ctr"/>
+          <a:lstStyle/>
+          <a:p>
+            <a:pPr algn="ctr" indent="0" marL="0">
+              <a:buNone/>
+            </a:pPr>
+            <a:r>
+              <a:rPr lang="en-US" sz="1320" b="1" dirty="0">
+                <a:solidFill>
+                  <a:srgbClr val="FFFFFF"/>
+                </a:solidFill>
+                <a:latin typeface="Calibri" pitchFamily="34" charset="0"/>
+                <a:ea typeface="Calibri" pitchFamily="34" charset="-122"/>
+                <a:cs typeface="Calibri" pitchFamily="34" charset="-120"/>
+              </a:rPr>
+              <a:t>4</a:t>
+            </a:r>
+            <a:endParaRPr lang="en-US" sz="1320" dirty="0"/>
+          </a:p>
+        </p:txBody>
+      </p:sp>
+      <p:sp>
+        <p:nvSpPr>
+          <p:cNvPr id="15" name="Text 13"/>
+          <p:cNvSpPr txBox="1"/>
+          <p:nvPr/>
+        </p:nvSpPr>
+        <p:spPr>
+          <a:xfrm>
+            <a:off x="1344168" y="4535424"/>
+            <a:ext cx="6949440" cy="932688"/>
+          </a:xfrm>
+          <a:prstGeom prst="rect">
+            <a:avLst/>
+          </a:prstGeom>
+          <a:noFill/>
+          <a:ln/>
+        </p:spPr>
+        <p:txBody>
+          <a:bodyPr wrap="square" lIns="0" tIns="0" rIns="0" bIns="0" rtlCol="0" anchor="ctr"/>
+          <a:lstStyle/>
+          <a:p>
+            <a:pPr algn="l" indent="0" marL="0">
+              <a:lnSpc>
+                <a:spcPct val="100000"/>
+              </a:lnSpc>
+              <a:buNone/>
+            </a:pPr>
+            <a:r>
+              <a:rPr lang="en-US" sz="1650" b="1" dirty="0">
+                <a:solidFill>
+                  <a:srgbClr val="1B1B2F"/>
+                </a:solidFill>
+                <a:latin typeface="Calibri" pitchFamily="34" charset="0"/>
+                <a:ea typeface="Calibri" pitchFamily="34" charset="-122"/>
+                <a:cs typeface="Calibri" pitchFamily="34" charset="-120"/>
+              </a:rPr>
+              <a:t>The ethics desk
+</a:t>
+            </a:r>
+            <a:endParaRPr lang="en-US" sz="1650" dirty="0"/>
+          </a:p>
+          <a:p>
+            <a:pPr algn="l" indent="0" marL="0">
+              <a:lnSpc>
+                <a:spcPct val="100000"/>
+              </a:lnSpc>
+              <a:buNone/>
+            </a:pPr>
+            <a:r>
+              <a:rPr lang="en-US" sz="1300" dirty="0">
+                <a:solidFill>
+                  <a:srgbClr val="5B6472"/>
+                </a:solidFill>
+                <a:latin typeface="Calibri" pitchFamily="34" charset="0"/>
+                <a:ea typeface="Calibri" pitchFamily="34" charset="-122"/>
+                <a:cs typeface="Calibri" pitchFamily="34" charset="-120"/>
+              </a:rPr>
+              <a:t>For 4 stakeholder requests decide answer / refuse / answer only masked-&amp;-aggregated — and justify each.</a:t>
+            </a:r>
+            <a:endParaRPr lang="en-US" sz="1650" dirty="0"/>
+          </a:p>
+        </p:txBody>
+      </p:sp>
+      <p:sp>
+        <p:nvSpPr>
+          <p:cNvPr id="16" name="Shape 14"/>
+          <p:cNvSpPr/>
+          <p:nvPr/>
+        </p:nvSpPr>
+        <p:spPr>
+          <a:xfrm>
+            <a:off x="8001000" y="1783080"/>
+            <a:ext cx="3611880" cy="3730752"/>
           </a:xfrm>
           <a:prstGeom prst="roundRect">
             <a:avLst>
-              <a:gd name="adj" fmla="val 1463"/>
+              <a:gd name="adj" fmla="val 2025"/>
             </a:avLst>
           </a:prstGeom>
           <a:solidFill>
-            <a:srgbClr val="151E42"/>
+            <a:srgbClr val="E2F3EF"/>
           </a:solidFill>
-          <a:ln/>
-          <a:effectLst>
-            <a:outerShdw sx="100000" sy="100000" kx="0" ky="0" algn="bl" rotWithShape="0" blurRad="88900" dist="38100" dir="5400000">
-              <a:srgbClr val="1B1B2F">
-                <a:alpha val="16000"/>
-              </a:srgbClr>
-            </a:outerShdw>
-          </a:effectLst>
-        </p:spPr>
-      </p:sp>
-      <p:sp>
-        <p:nvSpPr>
-          <p:cNvPr id="5" name="Text 3"/>
-          <p:cNvSpPr txBox="1"/>
-          <p:nvPr/>
-        </p:nvSpPr>
-        <p:spPr>
-          <a:xfrm>
-            <a:off x="768096" y="1865376"/>
-            <a:ext cx="6364224" cy="3493008"/>
+          <a:ln w="12700">
+            <a:solidFill>
+              <a:srgbClr val="138A72"/>
+            </a:solidFill>
+            <a:prstDash val="solid"/>
+          </a:ln>
+        </p:spPr>
+      </p:sp>
+      <p:sp>
+        <p:nvSpPr>
+          <p:cNvPr id="17" name="Text 15"/>
+          <p:cNvSpPr txBox="1"/>
+          <p:nvPr/>
+        </p:nvSpPr>
+        <p:spPr>
+          <a:xfrm>
+            <a:off x="8275320" y="2011680"/>
+            <a:ext cx="3108960" cy="3273552"/>
           </a:xfrm>
           <a:prstGeom prst="rect">
             <a:avLst/>
@@ -6627,18 +8481,18 @@
               <a:buNone/>
             </a:pPr>
             <a:r>
-              <a:rPr lang="en-US" sz="1350" dirty="0">
-                <a:solidFill>
-                  <a:srgbClr val="CAD2E6"/>
-                </a:solidFill>
-                <a:latin typeface="Consolas" pitchFamily="34" charset="0"/>
-                <a:ea typeface="Consolas" pitchFamily="34" charset="-122"/>
-                <a:cs typeface="Consolas" pitchFamily="34" charset="-120"/>
-              </a:rPr>
-              <a:t>Day_02_Analytics_Types_and_Ethics/
+              <a:rPr lang="en-US" sz="1100" b="1" spc="200" kern="0" dirty="0">
+                <a:solidFill>
+                  <a:srgbClr val="138A72"/>
+                </a:solidFill>
+                <a:latin typeface="Calibri" pitchFamily="34" charset="0"/>
+                <a:ea typeface="Calibri" pitchFamily="34" charset="-122"/>
+                <a:cs typeface="Calibri" pitchFamily="34" charset="-120"/>
+              </a:rPr>
+              <a:t>DONE WHEN
 </a:t>
             </a:r>
-            <a:endParaRPr lang="en-US" sz="1350" dirty="0"/>
+            <a:endParaRPr lang="en-US" sz="1100" dirty="0"/>
           </a:p>
           <a:p>
             <a:pPr algn="l" indent="0" marL="0">
@@ -6648,157 +8502,7 @@
               <a:buNone/>
             </a:pPr>
             <a:r>
-              <a:rPr lang="en-US" sz="1350" dirty="0">
-                <a:solidFill>
-                  <a:srgbClr val="CAD2E6"/>
-                </a:solidFill>
-                <a:latin typeface="Consolas" pitchFamily="34" charset="0"/>
-                <a:ea typeface="Consolas" pitchFamily="34" charset="-122"/>
-                <a:cs typeface="Consolas" pitchFamily="34" charset="-120"/>
-              </a:rPr>
-              <a:t>├── instructions.md                 # read this
-</a:t>
-            </a:r>
-            <a:endParaRPr lang="en-US" sz="1350" dirty="0"/>
-          </a:p>
-          <a:p>
-            <a:pPr algn="l" indent="0" marL="0">
-              <a:lnSpc>
-                <a:spcPct val="115000"/>
-              </a:lnSpc>
-              <a:buNone/>
-            </a:pPr>
-            <a:r>
-              <a:rPr lang="en-US" sz="1350" dirty="0">
-                <a:solidFill>
-                  <a:srgbClr val="CAD2E6"/>
-                </a:solidFill>
-                <a:latin typeface="Consolas" pitchFamily="34" charset="0"/>
-                <a:ea typeface="Consolas" pitchFamily="34" charset="-122"/>
-                <a:cs typeface="Consolas" pitchFamily="34" charset="-120"/>
-              </a:rPr>
-              <a:t>├── data/
-</a:t>
-            </a:r>
-            <a:endParaRPr lang="en-US" sz="1350" dirty="0"/>
-          </a:p>
-          <a:p>
-            <a:pPr algn="l" indent="0" marL="0">
-              <a:lnSpc>
-                <a:spcPct val="115000"/>
-              </a:lnSpc>
-              <a:buNone/>
-            </a:pPr>
-            <a:r>
-              <a:rPr lang="en-US" sz="1350" dirty="0">
-                <a:solidFill>
-                  <a:srgbClr val="CAD2E6"/>
-                </a:solidFill>
-                <a:latin typeface="Consolas" pitchFamily="34" charset="0"/>
-                <a:ea typeface="Consolas" pitchFamily="34" charset="-122"/>
-                <a:cs typeface="Consolas" pitchFamily="34" charset="-120"/>
-              </a:rPr>
-              <a:t>│   ├── business_questions.csv      # tag these
-</a:t>
-            </a:r>
-            <a:endParaRPr lang="en-US" sz="1350" dirty="0"/>
-          </a:p>
-          <a:p>
-            <a:pPr algn="l" indent="0" marL="0">
-              <a:lnSpc>
-                <a:spcPct val="115000"/>
-              </a:lnSpc>
-              <a:buNone/>
-            </a:pPr>
-            <a:r>
-              <a:rPr lang="en-US" sz="1350" dirty="0">
-                <a:solidFill>
-                  <a:srgbClr val="CAD2E6"/>
-                </a:solidFill>
-                <a:latin typeface="Consolas" pitchFamily="34" charset="0"/>
-                <a:ea typeface="Consolas" pitchFamily="34" charset="-122"/>
-                <a:cs typeface="Consolas" pitchFamily="34" charset="-120"/>
-              </a:rPr>
-              <a:t>│   ├── customers_pii.csv           # audit this
-</a:t>
-            </a:r>
-            <a:endParaRPr lang="en-US" sz="1350" dirty="0"/>
-          </a:p>
-          <a:p>
-            <a:pPr algn="l" indent="0" marL="0">
-              <a:lnSpc>
-                <a:spcPct val="115000"/>
-              </a:lnSpc>
-              <a:buNone/>
-            </a:pPr>
-            <a:r>
-              <a:rPr lang="en-US" sz="1350" dirty="0">
-                <a:solidFill>
-                  <a:srgbClr val="CAD2E6"/>
-                </a:solidFill>
-                <a:latin typeface="Consolas" pitchFamily="34" charset="0"/>
-                <a:ea typeface="Consolas" pitchFamily="34" charset="-122"/>
-                <a:cs typeface="Consolas" pitchFamily="34" charset="-120"/>
-              </a:rPr>
-              <a:t>│   └── orders_sample.csv           # 3 quick stats</a:t>
-            </a:r>
-            <a:endParaRPr lang="en-US" sz="1350" dirty="0"/>
-          </a:p>
-        </p:txBody>
-      </p:sp>
-      <p:sp>
-        <p:nvSpPr>
-          <p:cNvPr id="6" name="Shape 4"/>
-          <p:cNvSpPr/>
-          <p:nvPr/>
-        </p:nvSpPr>
-        <p:spPr>
-          <a:xfrm>
-            <a:off x="7635240" y="1737360"/>
-            <a:ext cx="3977640" cy="3749040"/>
-          </a:xfrm>
-          <a:prstGeom prst="roundRect">
-            <a:avLst>
-              <a:gd name="adj" fmla="val 1951"/>
-            </a:avLst>
-          </a:prstGeom>
-          <a:solidFill>
-            <a:srgbClr val="F4F6F9"/>
-          </a:solidFill>
-          <a:ln w="12700">
-            <a:solidFill>
-              <a:srgbClr val="DCE2EA"/>
-            </a:solidFill>
-            <a:prstDash val="solid"/>
-          </a:ln>
-        </p:spPr>
-      </p:sp>
-      <p:sp>
-        <p:nvSpPr>
-          <p:cNvPr id="7" name="Text 5"/>
-          <p:cNvSpPr txBox="1"/>
-          <p:nvPr/>
-        </p:nvSpPr>
-        <p:spPr>
-          <a:xfrm>
-            <a:off x="7909560" y="1965960"/>
-            <a:ext cx="3474720" cy="457200"/>
-          </a:xfrm>
-          <a:prstGeom prst="rect">
-            <a:avLst/>
-          </a:prstGeom>
-          <a:noFill/>
-          <a:ln/>
-        </p:spPr>
-        <p:txBody>
-          <a:bodyPr wrap="square" lIns="0" tIns="0" rIns="0" bIns="0" rtlCol="0" anchor="ctr"/>
-          <a:lstStyle/>
-          <a:p>
-            <a:pPr algn="l" indent="0" marL="0">
-              <a:buNone/>
-            </a:pPr>
-            <a:r>
-              <a:rPr lang="en-US" sz="1500" b="1" dirty="0">
+              <a:rPr lang="en-US" sz="1300" dirty="0">
                 <a:solidFill>
                   <a:srgbClr val="1B1B2F"/>
                 </a:solidFill>
@@ -6806,139 +8510,9 @@
                 <a:ea typeface="Calibri" pitchFamily="34" charset="-122"/>
                 <a:cs typeface="Calibri" pitchFamily="34" charset="-120"/>
               </a:rPr>
-              <a:t>Get today's folder</a:t>
-            </a:r>
-            <a:endParaRPr lang="en-US" sz="1500" dirty="0"/>
-          </a:p>
-        </p:txBody>
-      </p:sp>
-      <p:sp>
-        <p:nvSpPr>
-          <p:cNvPr id="8" name="Shape 6"/>
-          <p:cNvSpPr/>
-          <p:nvPr/>
-        </p:nvSpPr>
-        <p:spPr>
-          <a:xfrm>
-            <a:off x="7909560" y="2468880"/>
-            <a:ext cx="3429000" cy="685800"/>
-          </a:xfrm>
-          <a:prstGeom prst="roundRect">
-            <a:avLst>
-              <a:gd name="adj" fmla="val 8000"/>
-            </a:avLst>
-          </a:prstGeom>
-          <a:solidFill>
-            <a:srgbClr val="151E42"/>
-          </a:solidFill>
-          <a:ln/>
-          <a:effectLst>
-            <a:outerShdw sx="100000" sy="100000" kx="0" ky="0" algn="bl" rotWithShape="0" blurRad="88900" dist="38100" dir="5400000">
-              <a:srgbClr val="1B1B2F">
-                <a:alpha val="16000"/>
-              </a:srgbClr>
-            </a:outerShdw>
-          </a:effectLst>
-        </p:spPr>
-      </p:sp>
-      <p:sp>
-        <p:nvSpPr>
-          <p:cNvPr id="9" name="Text 7"/>
-          <p:cNvSpPr txBox="1"/>
-          <p:nvPr/>
-        </p:nvSpPr>
-        <p:spPr>
-          <a:xfrm>
-            <a:off x="8110728" y="2596896"/>
-            <a:ext cx="3026664" cy="429768"/>
-          </a:xfrm>
-          <a:prstGeom prst="rect">
-            <a:avLst/>
-          </a:prstGeom>
-          <a:noFill/>
-          <a:ln/>
-        </p:spPr>
-        <p:txBody>
-          <a:bodyPr wrap="square" lIns="0" tIns="0" rIns="0" bIns="0" rtlCol="0" anchor="t"/>
-          <a:lstStyle/>
-          <a:p>
-            <a:pPr algn="l" indent="0" marL="0">
-              <a:lnSpc>
-                <a:spcPct val="115000"/>
-              </a:lnSpc>
-              <a:buNone/>
-            </a:pPr>
-            <a:r>
-              <a:rPr lang="en-US" sz="1250" dirty="0">
-                <a:solidFill>
-                  <a:srgbClr val="7FE3CF"/>
-                </a:solidFill>
-                <a:latin typeface="Consolas" pitchFamily="34" charset="0"/>
-                <a:ea typeface="Consolas" pitchFamily="34" charset="-122"/>
-                <a:cs typeface="Consolas" pitchFamily="34" charset="-120"/>
-              </a:rPr>
-              <a:t>git pull upstream main</a:t>
-            </a:r>
-            <a:endParaRPr lang="en-US" sz="1250" dirty="0"/>
-          </a:p>
-        </p:txBody>
-      </p:sp>
-      <p:sp>
-        <p:nvSpPr>
-          <p:cNvPr id="10" name="Text 8"/>
-          <p:cNvSpPr txBox="1"/>
-          <p:nvPr/>
-        </p:nvSpPr>
-        <p:spPr>
-          <a:xfrm>
-            <a:off x="7909560" y="3383280"/>
-            <a:ext cx="3474720" cy="1737360"/>
-          </a:xfrm>
-          <a:prstGeom prst="rect">
-            <a:avLst/>
-          </a:prstGeom>
-          <a:noFill/>
-          <a:ln/>
-        </p:spPr>
-        <p:txBody>
-          <a:bodyPr wrap="square" lIns="0" tIns="0" rIns="0" bIns="0" rtlCol="0" anchor="t"/>
-          <a:lstStyle/>
-          <a:p>
-            <a:pPr algn="l" indent="0" marL="0">
-              <a:lnSpc>
-                <a:spcPct val="115000"/>
-              </a:lnSpc>
-              <a:buNone/>
-            </a:pPr>
-            <a:r>
-              <a:rPr lang="en-US" sz="1300" b="1" dirty="0">
-                <a:solidFill>
-                  <a:srgbClr val="F0544F"/>
-                </a:solidFill>
-                <a:latin typeface="Calibri" pitchFamily="34" charset="0"/>
-                <a:ea typeface="Calibri" pitchFamily="34" charset="-122"/>
-                <a:cs typeface="Calibri" pitchFamily="34" charset="-120"/>
-              </a:rPr>
-              <a:t>Not there yet?  </a:t>
-            </a:r>
-            <a:pPr algn="l" indent="0" marL="0">
-              <a:lnSpc>
-                <a:spcPct val="115000"/>
-              </a:lnSpc>
-              <a:buNone/>
-            </a:pPr>
-            <a:r>
-              <a:rPr lang="en-US" sz="1300" dirty="0">
-                <a:solidFill>
-                  <a:srgbClr val="5B6472"/>
-                </a:solidFill>
-                <a:latin typeface="Calibri" pitchFamily="34" charset="0"/>
-                <a:ea typeface="Calibri" pitchFamily="34" charset="-122"/>
-                <a:cs typeface="Calibri" pitchFamily="34" charset="-120"/>
-              </a:rPr>
-              <a:t>The trainer releases each day's folder in the morning. Pull again in a minute.</a:t>
-            </a:r>
-            <a:endParaRPr lang="en-US" sz="1300" dirty="0"/>
+              <a:t>15 Qs tagged · safe_customers.csv fully masked (customer_id kept) · 3 stats done · audit.md records your rules + the one risky question.</a:t>
+            </a:r>
+            <a:endParaRPr lang="en-US" sz="1100" dirty="0"/>
           </a:p>
         </p:txBody>
       </p:sp>
@@ -7007,7 +8581,7 @@
                 <a:ea typeface="Calibri" pitchFamily="34" charset="-122"/>
                 <a:cs typeface="Calibri" pitchFamily="34" charset="-120"/>
               </a:rPr>
-              <a:t>WRAP · 15 MIN</a:t>
+              <a:t>PULL IT FIRST</a:t>
             </a:r>
             <a:endParaRPr lang="en-US" sz="1150" dirty="0"/>
           </a:p>
@@ -7046,7 +8620,7 @@
                 <a:ea typeface="Calibri" pitchFamily="34" charset="-122"/>
                 <a:cs typeface="Calibri" pitchFamily="34" charset="-120"/>
               </a:rPr>
-              <a:t>Hand it in — your Pull Request</a:t>
+              <a:t>What's in Day_02_Analytics_Types_and_Ethics/</a:t>
             </a:r>
             <a:endParaRPr lang="en-US" sz="3000" dirty="0"/>
           </a:p>
@@ -7060,12 +8634,12 @@
         </p:nvSpPr>
         <p:spPr>
           <a:xfrm>
-            <a:off x="566928" y="1783080"/>
-            <a:ext cx="6858000" cy="3566160"/>
+            <a:off x="566928" y="1737360"/>
+            <a:ext cx="6766560" cy="3749040"/>
           </a:xfrm>
           <a:prstGeom prst="roundRect">
             <a:avLst>
-              <a:gd name="adj" fmla="val 1538"/>
+              <a:gd name="adj" fmla="val 1463"/>
             </a:avLst>
           </a:prstGeom>
           <a:solidFill>
@@ -7089,8 +8663,8 @@
         </p:nvSpPr>
         <p:spPr>
           <a:xfrm>
-            <a:off x="768096" y="1911096"/>
-            <a:ext cx="6455664" cy="3310128"/>
+            <a:off x="768096" y="1865376"/>
+            <a:ext cx="6364224" cy="3493008"/>
           </a:xfrm>
           <a:prstGeom prst="rect">
             <a:avLst/>
@@ -7109,18 +8683,18 @@
               <a:buNone/>
             </a:pPr>
             <a:r>
-              <a:rPr lang="en-US" sz="1400" dirty="0">
-                <a:solidFill>
-                  <a:srgbClr val="7FE3CF"/>
+              <a:rPr lang="en-US" sz="1350" dirty="0">
+                <a:solidFill>
+                  <a:srgbClr val="CAD2E6"/>
                 </a:solidFill>
                 <a:latin typeface="Consolas" pitchFamily="34" charset="0"/>
                 <a:ea typeface="Consolas" pitchFamily="34" charset="-122"/>
                 <a:cs typeface="Consolas" pitchFamily="34" charset="-120"/>
               </a:rPr>
-              <a:t>git pull upstream main
+              <a:t>Day_02_Analytics_Types_and_Ethics/
 </a:t>
             </a:r>
-            <a:endParaRPr lang="en-US" sz="1400" dirty="0"/>
+            <a:endParaRPr lang="en-US" sz="1350" dirty="0"/>
           </a:p>
           <a:p>
             <a:pPr algn="l" indent="0" marL="0">
@@ -7130,18 +8704,18 @@
               <a:buNone/>
             </a:pPr>
             <a:r>
-              <a:rPr lang="en-US" sz="1400" dirty="0">
-                <a:solidFill>
-                  <a:srgbClr val="7FE3CF"/>
+              <a:rPr lang="en-US" sz="1350" dirty="0">
+                <a:solidFill>
+                  <a:srgbClr val="CAD2E6"/>
                 </a:solidFill>
                 <a:latin typeface="Consolas" pitchFamily="34" charset="0"/>
                 <a:ea typeface="Consolas" pitchFamily="34" charset="-122"/>
                 <a:cs typeface="Consolas" pitchFamily="34" charset="-120"/>
               </a:rPr>
-              <a:t>git checkout -b day02-yourname
+              <a:t>├── instructions.md                 # read this
 </a:t>
             </a:r>
-            <a:endParaRPr lang="en-US" sz="1400" dirty="0"/>
+            <a:endParaRPr lang="en-US" sz="1350" dirty="0"/>
           </a:p>
           <a:p>
             <a:pPr algn="l" indent="0" marL="0">
@@ -7151,18 +8725,18 @@
               <a:buNone/>
             </a:pPr>
             <a:r>
-              <a:rPr lang="en-US" sz="1400" dirty="0">
-                <a:solidFill>
-                  <a:srgbClr val="7FE3CF"/>
+              <a:rPr lang="en-US" sz="1350" dirty="0">
+                <a:solidFill>
+                  <a:srgbClr val="CAD2E6"/>
                 </a:solidFill>
                 <a:latin typeface="Consolas" pitchFamily="34" charset="0"/>
                 <a:ea typeface="Consolas" pitchFamily="34" charset="-122"/>
                 <a:cs typeface="Consolas" pitchFamily="34" charset="-120"/>
               </a:rPr>
-              <a:t>git add Day_02_Analytics_Types_and_Ethics/
+              <a:t>├── data/
 </a:t>
             </a:r>
-            <a:endParaRPr lang="en-US" sz="1400" dirty="0"/>
+            <a:endParaRPr lang="en-US" sz="1350" dirty="0"/>
           </a:p>
           <a:p>
             <a:pPr algn="l" indent="0" marL="0">
@@ -7172,18 +8746,18 @@
               <a:buNone/>
             </a:pPr>
             <a:r>
-              <a:rPr lang="en-US" sz="1400" dirty="0">
-                <a:solidFill>
-                  <a:srgbClr val="7FE3CF"/>
+              <a:rPr lang="en-US" sz="1350" dirty="0">
+                <a:solidFill>
+                  <a:srgbClr val="CAD2E6"/>
                 </a:solidFill>
                 <a:latin typeface="Consolas" pitchFamily="34" charset="0"/>
                 <a:ea typeface="Consolas" pitchFamily="34" charset="-122"/>
                 <a:cs typeface="Consolas" pitchFamily="34" charset="-120"/>
               </a:rPr>
-              <a:t>git commit -m "Day 2: analytics types + PII audit"
+              <a:t>│   ├── business_questions.csv      # tag all 15
 </a:t>
             </a:r>
-            <a:endParaRPr lang="en-US" sz="1400" dirty="0"/>
+            <a:endParaRPr lang="en-US" sz="1350" dirty="0"/>
           </a:p>
           <a:p>
             <a:pPr algn="l" indent="0" marL="0">
@@ -7193,18 +8767,18 @@
               <a:buNone/>
             </a:pPr>
             <a:r>
-              <a:rPr lang="en-US" sz="1400" dirty="0">
-                <a:solidFill>
-                  <a:srgbClr val="7FE3CF"/>
+              <a:rPr lang="en-US" sz="1350" dirty="0">
+                <a:solidFill>
+                  <a:srgbClr val="CAD2E6"/>
                 </a:solidFill>
                 <a:latin typeface="Consolas" pitchFamily="34" charset="0"/>
                 <a:ea typeface="Consolas" pitchFamily="34" charset="-122"/>
                 <a:cs typeface="Consolas" pitchFamily="34" charset="-120"/>
               </a:rPr>
-              <a:t>git push origin day02-yourname
+              <a:t>│   ├── customers_pii.csv           # audit &amp; mask
 </a:t>
             </a:r>
-            <a:endParaRPr lang="en-US" sz="1400" dirty="0"/>
+            <a:endParaRPr lang="en-US" sz="1350" dirty="0"/>
           </a:p>
           <a:p>
             <a:pPr algn="l" indent="0" marL="0">
@@ -7214,17 +8788,17 @@
               <a:buNone/>
             </a:pPr>
             <a:r>
-              <a:rPr lang="en-US" sz="1400" dirty="0">
-                <a:solidFill>
-                  <a:srgbClr val="7F8AB5"/>
+              <a:rPr lang="en-US" sz="1350" dirty="0">
+                <a:solidFill>
+                  <a:srgbClr val="CAD2E6"/>
                 </a:solidFill>
                 <a:latin typeface="Consolas" pitchFamily="34" charset="0"/>
                 <a:ea typeface="Consolas" pitchFamily="34" charset="-122"/>
                 <a:cs typeface="Consolas" pitchFamily="34" charset="-120"/>
               </a:rPr>
-              <a:t># then click 'Compare &amp; pull request' on GitHub</a:t>
-            </a:r>
-            <a:endParaRPr lang="en-US" sz="1400" dirty="0"/>
+              <a:t>│   └── orders_sample.csv           # 3 quick stats</a:t>
+            </a:r>
+            <a:endParaRPr lang="en-US" sz="1350" dirty="0"/>
           </a:p>
         </p:txBody>
       </p:sp>
@@ -7236,12 +8810,12 @@
         </p:nvSpPr>
         <p:spPr>
           <a:xfrm>
-            <a:off x="7726680" y="1783080"/>
-            <a:ext cx="3886200" cy="1051560"/>
+            <a:off x="7635240" y="1737360"/>
+            <a:ext cx="3977640" cy="3749040"/>
           </a:xfrm>
           <a:prstGeom prst="roundRect">
             <a:avLst>
-              <a:gd name="adj" fmla="val 6957"/>
+              <a:gd name="adj" fmla="val 1951"/>
             </a:avLst>
           </a:prstGeom>
           <a:solidFill>
@@ -7263,138 +8837,154 @@
         </p:nvSpPr>
         <p:spPr>
           <a:xfrm>
-            <a:off x="7955280" y="1856232"/>
-            <a:ext cx="3474720" cy="914400"/>
-          </a:xfrm>
-          <a:prstGeom prst="rect">
-            <a:avLst/>
-          </a:prstGeom>
-          <a:noFill/>
-          <a:ln/>
-        </p:spPr>
-        <p:txBody>
-          <a:bodyPr wrap="square" lIns="0" tIns="0" rIns="0" bIns="0" rtlCol="0" anchor="ctr"/>
+            <a:off x="7909560" y="1965960"/>
+            <a:ext cx="3474720" cy="457200"/>
+          </a:xfrm>
+          <a:prstGeom prst="rect">
+            <a:avLst/>
+          </a:prstGeom>
+          <a:noFill/>
+          <a:ln/>
+        </p:spPr>
+        <p:txBody>
+          <a:bodyPr wrap="square" lIns="0" tIns="0" rIns="0" bIns="0" rtlCol="0" anchor="ctr"/>
+          <a:lstStyle/>
+          <a:p>
+            <a:pPr algn="l" indent="0" marL="0">
+              <a:buNone/>
+            </a:pPr>
+            <a:r>
+              <a:rPr lang="en-US" sz="1500" b="1" dirty="0">
+                <a:solidFill>
+                  <a:srgbClr val="1B1B2F"/>
+                </a:solidFill>
+                <a:latin typeface="Calibri" pitchFamily="34" charset="0"/>
+                <a:ea typeface="Calibri" pitchFamily="34" charset="-122"/>
+                <a:cs typeface="Calibri" pitchFamily="34" charset="-120"/>
+              </a:rPr>
+              <a:t>Get today's folder</a:t>
+            </a:r>
+            <a:endParaRPr lang="en-US" sz="1500" dirty="0"/>
+          </a:p>
+        </p:txBody>
+      </p:sp>
+      <p:sp>
+        <p:nvSpPr>
+          <p:cNvPr id="8" name="Shape 6"/>
+          <p:cNvSpPr/>
+          <p:nvPr/>
+        </p:nvSpPr>
+        <p:spPr>
+          <a:xfrm>
+            <a:off x="7909560" y="2468880"/>
+            <a:ext cx="3429000" cy="685800"/>
+          </a:xfrm>
+          <a:prstGeom prst="roundRect">
+            <a:avLst>
+              <a:gd name="adj" fmla="val 8000"/>
+            </a:avLst>
+          </a:prstGeom>
+          <a:solidFill>
+            <a:srgbClr val="151E42"/>
+          </a:solidFill>
+          <a:ln/>
+          <a:effectLst>
+            <a:outerShdw sx="100000" sy="100000" kx="0" ky="0" algn="bl" rotWithShape="0" blurRad="88900" dist="38100" dir="5400000">
+              <a:srgbClr val="1B1B2F">
+                <a:alpha val="16000"/>
+              </a:srgbClr>
+            </a:outerShdw>
+          </a:effectLst>
+        </p:spPr>
+      </p:sp>
+      <p:sp>
+        <p:nvSpPr>
+          <p:cNvPr id="9" name="Text 7"/>
+          <p:cNvSpPr txBox="1"/>
+          <p:nvPr/>
+        </p:nvSpPr>
+        <p:spPr>
+          <a:xfrm>
+            <a:off x="8110728" y="2596896"/>
+            <a:ext cx="3026664" cy="429768"/>
+          </a:xfrm>
+          <a:prstGeom prst="rect">
+            <a:avLst/>
+          </a:prstGeom>
+          <a:noFill/>
+          <a:ln/>
+        </p:spPr>
+        <p:txBody>
+          <a:bodyPr wrap="square" lIns="0" tIns="0" rIns="0" bIns="0" rtlCol="0" anchor="t"/>
           <a:lstStyle/>
           <a:p>
             <a:pPr algn="l" indent="0" marL="0">
               <a:lnSpc>
-                <a:spcPct val="100000"/>
+                <a:spcPct val="115000"/>
               </a:lnSpc>
               <a:buNone/>
             </a:pPr>
             <a:r>
-              <a:rPr lang="en-US" sz="1350" b="1" dirty="0">
-                <a:solidFill>
-                  <a:srgbClr val="1B1B2F"/>
-                </a:solidFill>
-                <a:latin typeface="Calibri" pitchFamily="34" charset="0"/>
-                <a:ea typeface="Calibri" pitchFamily="34" charset="-122"/>
-                <a:cs typeface="Calibri" pitchFamily="34" charset="-120"/>
-              </a:rPr>
-              <a:t>Stage only your folder
-</a:t>
-            </a:r>
-            <a:endParaRPr lang="en-US" sz="1350" dirty="0"/>
-          </a:p>
-          <a:p>
-            <a:pPr algn="l" indent="0" marL="0">
-              <a:lnSpc>
-                <a:spcPct val="100000"/>
-              </a:lnSpc>
-              <a:buNone/>
-            </a:pPr>
-            <a:r>
-              <a:rPr lang="en-US" sz="1100" dirty="0">
-                <a:solidFill>
-                  <a:srgbClr val="5B6472"/>
+              <a:rPr lang="en-US" sz="1250" dirty="0">
+                <a:solidFill>
+                  <a:srgbClr val="7FE3CF"/>
                 </a:solidFill>
                 <a:latin typeface="Consolas" pitchFamily="34" charset="0"/>
                 <a:ea typeface="Consolas" pitchFamily="34" charset="-122"/>
                 <a:cs typeface="Consolas" pitchFamily="34" charset="-120"/>
               </a:rPr>
-              <a:t>git add Day_02_Analytics_Types_and_Ethics/ — never git add .</a:t>
-            </a:r>
-            <a:endParaRPr lang="en-US" sz="1350" dirty="0"/>
-          </a:p>
-        </p:txBody>
-      </p:sp>
-      <p:sp>
-        <p:nvSpPr>
-          <p:cNvPr id="8" name="Shape 6"/>
-          <p:cNvSpPr/>
-          <p:nvPr/>
-        </p:nvSpPr>
-        <p:spPr>
-          <a:xfrm>
-            <a:off x="7726680" y="2990088"/>
-            <a:ext cx="3886200" cy="1051560"/>
-          </a:xfrm>
-          <a:prstGeom prst="roundRect">
-            <a:avLst>
-              <a:gd name="adj" fmla="val 6957"/>
-            </a:avLst>
-          </a:prstGeom>
-          <a:solidFill>
-            <a:srgbClr val="F4F6F9"/>
-          </a:solidFill>
-          <a:ln w="12700">
-            <a:solidFill>
-              <a:srgbClr val="DCE2EA"/>
-            </a:solidFill>
-            <a:prstDash val="solid"/>
-          </a:ln>
-        </p:spPr>
-      </p:sp>
-      <p:sp>
-        <p:nvSpPr>
-          <p:cNvPr id="9" name="Text 7"/>
-          <p:cNvSpPr txBox="1"/>
-          <p:nvPr/>
-        </p:nvSpPr>
-        <p:spPr>
-          <a:xfrm>
-            <a:off x="7955280" y="3063240"/>
-            <a:ext cx="3474720" cy="914400"/>
-          </a:xfrm>
-          <a:prstGeom prst="rect">
-            <a:avLst/>
-          </a:prstGeom>
-          <a:noFill/>
-          <a:ln/>
-        </p:spPr>
-        <p:txBody>
-          <a:bodyPr wrap="square" lIns="0" tIns="0" rIns="0" bIns="0" rtlCol="0" anchor="ctr"/>
+              <a:t>git pull upstream main</a:t>
+            </a:r>
+            <a:endParaRPr lang="en-US" sz="1250" dirty="0"/>
+          </a:p>
+        </p:txBody>
+      </p:sp>
+      <p:sp>
+        <p:nvSpPr>
+          <p:cNvPr id="10" name="Text 8"/>
+          <p:cNvSpPr txBox="1"/>
+          <p:nvPr/>
+        </p:nvSpPr>
+        <p:spPr>
+          <a:xfrm>
+            <a:off x="7909560" y="3383280"/>
+            <a:ext cx="3474720" cy="1737360"/>
+          </a:xfrm>
+          <a:prstGeom prst="rect">
+            <a:avLst/>
+          </a:prstGeom>
+          <a:noFill/>
+          <a:ln/>
+        </p:spPr>
+        <p:txBody>
+          <a:bodyPr wrap="square" lIns="0" tIns="0" rIns="0" bIns="0" rtlCol="0" anchor="t"/>
           <a:lstStyle/>
           <a:p>
             <a:pPr algn="l" indent="0" marL="0">
               <a:lnSpc>
-                <a:spcPct val="100000"/>
+                <a:spcPct val="115000"/>
               </a:lnSpc>
               <a:buNone/>
             </a:pPr>
             <a:r>
-              <a:rPr lang="en-US" sz="1350" b="1" dirty="0">
-                <a:solidFill>
-                  <a:srgbClr val="1B1B2F"/>
-                </a:solidFill>
-                <a:latin typeface="Calibri" pitchFamily="34" charset="0"/>
-                <a:ea typeface="Calibri" pitchFamily="34" charset="-122"/>
-                <a:cs typeface="Calibri" pitchFamily="34" charset="-120"/>
-              </a:rPr>
-              <a:t>Push to origin (your fork)
-</a:t>
-            </a:r>
-            <a:endParaRPr lang="en-US" sz="1350" dirty="0"/>
-          </a:p>
-          <a:p>
+              <a:rPr lang="en-US" sz="1300" b="1" dirty="0">
+                <a:solidFill>
+                  <a:srgbClr val="F0544F"/>
+                </a:solidFill>
+                <a:latin typeface="Calibri" pitchFamily="34" charset="0"/>
+                <a:ea typeface="Calibri" pitchFamily="34" charset="-122"/>
+                <a:cs typeface="Calibri" pitchFamily="34" charset="-120"/>
+              </a:rPr>
+              <a:t>Not there yet?  </a:t>
+            </a:r>
             <a:pPr algn="l" indent="0" marL="0">
               <a:lnSpc>
-                <a:spcPct val="100000"/>
+                <a:spcPct val="115000"/>
               </a:lnSpc>
               <a:buNone/>
             </a:pPr>
             <a:r>
-              <a:rPr lang="en-US" sz="1100" dirty="0">
+              <a:rPr lang="en-US" sz="1300" dirty="0">
                 <a:solidFill>
                   <a:srgbClr val="5B6472"/>
                 </a:solidFill>
@@ -7402,99 +8992,9 @@
                 <a:ea typeface="Calibri" pitchFamily="34" charset="-122"/>
                 <a:cs typeface="Calibri" pitchFamily="34" charset="-120"/>
               </a:rPr>
-              <a:t>not upstream — that's the trainer's.</a:t>
-            </a:r>
-            <a:endParaRPr lang="en-US" sz="1350" dirty="0"/>
-          </a:p>
-        </p:txBody>
-      </p:sp>
-      <p:sp>
-        <p:nvSpPr>
-          <p:cNvPr id="10" name="Shape 8"/>
-          <p:cNvSpPr/>
-          <p:nvPr/>
-        </p:nvSpPr>
-        <p:spPr>
-          <a:xfrm>
-            <a:off x="7726680" y="4197096"/>
-            <a:ext cx="3886200" cy="1051560"/>
-          </a:xfrm>
-          <a:prstGeom prst="roundRect">
-            <a:avLst>
-              <a:gd name="adj" fmla="val 6957"/>
-            </a:avLst>
-          </a:prstGeom>
-          <a:solidFill>
-            <a:srgbClr val="F4F6F9"/>
-          </a:solidFill>
-          <a:ln w="12700">
-            <a:solidFill>
-              <a:srgbClr val="DCE2EA"/>
-            </a:solidFill>
-            <a:prstDash val="solid"/>
-          </a:ln>
-        </p:spPr>
-      </p:sp>
-      <p:sp>
-        <p:nvSpPr>
-          <p:cNvPr id="11" name="Text 9"/>
-          <p:cNvSpPr txBox="1"/>
-          <p:nvPr/>
-        </p:nvSpPr>
-        <p:spPr>
-          <a:xfrm>
-            <a:off x="7955280" y="4270248"/>
-            <a:ext cx="3474720" cy="914400"/>
-          </a:xfrm>
-          <a:prstGeom prst="rect">
-            <a:avLst/>
-          </a:prstGeom>
-          <a:noFill/>
-          <a:ln/>
-        </p:spPr>
-        <p:txBody>
-          <a:bodyPr wrap="square" lIns="0" tIns="0" rIns="0" bIns="0" rtlCol="0" anchor="ctr"/>
-          <a:lstStyle/>
-          <a:p>
-            <a:pPr algn="l" indent="0" marL="0">
-              <a:lnSpc>
-                <a:spcPct val="100000"/>
-              </a:lnSpc>
-              <a:buNone/>
-            </a:pPr>
-            <a:r>
-              <a:rPr lang="en-US" sz="1350" b="1" dirty="0">
-                <a:solidFill>
-                  <a:srgbClr val="1B1B2F"/>
-                </a:solidFill>
-                <a:latin typeface="Calibri" pitchFamily="34" charset="0"/>
-                <a:ea typeface="Calibri" pitchFamily="34" charset="-122"/>
-                <a:cs typeface="Calibri" pitchFamily="34" charset="-120"/>
-              </a:rPr>
-              <a:t>The PR is your submission
-</a:t>
-            </a:r>
-            <a:endParaRPr lang="en-US" sz="1350" dirty="0"/>
-          </a:p>
-          <a:p>
-            <a:pPr algn="l" indent="0" marL="0">
-              <a:lnSpc>
-                <a:spcPct val="100000"/>
-              </a:lnSpc>
-              <a:buNone/>
-            </a:pPr>
-            <a:r>
-              <a:rPr lang="en-US" sz="1100" dirty="0">
-                <a:solidFill>
-                  <a:srgbClr val="5B6472"/>
-                </a:solidFill>
-                <a:latin typeface="Calibri" pitchFamily="34" charset="0"/>
-                <a:ea typeface="Calibri" pitchFamily="34" charset="-122"/>
-                <a:cs typeface="Calibri" pitchFamily="34" charset="-120"/>
-              </a:rPr>
-              <a:t>the trainer reviews a couple live.</a:t>
-            </a:r>
-            <a:endParaRPr lang="en-US" sz="1350" dirty="0"/>
+              <a:t>The trainer releases each day's folder in the morning. Pull again in a minute.</a:t>
+            </a:r>
+            <a:endParaRPr lang="en-US" sz="1300" dirty="0"/>
           </a:p>
         </p:txBody>
       </p:sp>
